--- a/OmniSnap_AI_Pitch_Deck.pptx
+++ b/OmniSnap_AI_Pitch_Deck.pptx
@@ -3112,10 +3112,12 @@
             <a:avLst/>
           </a:prstGeom>
           <a:solidFill>
-            <a:srgbClr val="0B0F19"/>
+            <a:srgbClr val="080C18"/>
           </a:solidFill>
           <a:ln>
-            <a:noFill/>
+            <a:solidFill>
+              <a:srgbClr val="080C18"/>
+            </a:solidFill>
           </a:ln>
         </p:spPr>
         <p:style>
@@ -3142,102 +3144,14 @@
       </p:sp>
       <p:sp>
         <p:nvSpPr>
-          <p:cNvPr id="3" name="Rectangle 2"/>
-          <p:cNvSpPr/>
-          <p:nvPr/>
-        </p:nvSpPr>
-        <p:spPr>
-          <a:xfrm>
-            <a:off x="0" y="0"/>
-            <a:ext cx="12191695" cy="109728"/>
-          </a:xfrm>
-          <a:prstGeom prst="rect">
-            <a:avLst/>
-          </a:prstGeom>
-          <a:solidFill>
-            <a:srgbClr val="E60012"/>
-          </a:solidFill>
-          <a:ln>
-            <a:noFill/>
-          </a:ln>
-        </p:spPr>
-        <p:style>
-          <a:lnRef idx="1">
-            <a:schemeClr val="accent1"/>
-          </a:lnRef>
-          <a:fillRef idx="3">
-            <a:schemeClr val="accent1"/>
-          </a:fillRef>
-          <a:effectRef idx="2">
-            <a:schemeClr val="accent1"/>
-          </a:effectRef>
-          <a:fontRef idx="minor">
-            <a:schemeClr val="lt1"/>
-          </a:fontRef>
-        </p:style>
-        <p:txBody>
-          <a:bodyPr rtlCol="0" anchor="ctr"/>
-          <a:lstStyle/>
-          <a:p>
-            <a:pPr algn="ctr"/>
-          </a:p>
-        </p:txBody>
-      </p:sp>
-      <p:sp>
-        <p:nvSpPr>
-          <p:cNvPr id="4" name="Rounded Rectangle 3"/>
-          <p:cNvSpPr/>
-          <p:nvPr/>
-        </p:nvSpPr>
-        <p:spPr>
-          <a:xfrm>
-            <a:off x="1371600" y="1188720"/>
-            <a:ext cx="9448495" cy="4480560"/>
-          </a:xfrm>
-          <a:prstGeom prst="roundRect">
-            <a:avLst/>
-          </a:prstGeom>
-          <a:solidFill>
-            <a:srgbClr val="161E2E"/>
-          </a:solidFill>
-          <a:ln w="12700">
-            <a:solidFill>
-              <a:srgbClr val="E60012"/>
-            </a:solidFill>
-          </a:ln>
-        </p:spPr>
-        <p:style>
-          <a:lnRef idx="1">
-            <a:schemeClr val="accent1"/>
-          </a:lnRef>
-          <a:fillRef idx="3">
-            <a:schemeClr val="accent1"/>
-          </a:fillRef>
-          <a:effectRef idx="2">
-            <a:schemeClr val="accent1"/>
-          </a:effectRef>
-          <a:fontRef idx="minor">
-            <a:schemeClr val="lt1"/>
-          </a:fontRef>
-        </p:style>
-        <p:txBody>
-          <a:bodyPr rtlCol="0" anchor="ctr"/>
-          <a:lstStyle/>
-          <a:p>
-            <a:pPr algn="ctr"/>
-          </a:p>
-        </p:txBody>
-      </p:sp>
-      <p:sp>
-        <p:nvSpPr>
-          <p:cNvPr id="5" name="TextBox 4"/>
+          <p:cNvPr id="3" name="TextBox 2"/>
           <p:cNvSpPr txBox="1"/>
           <p:nvPr/>
         </p:nvSpPr>
         <p:spPr>
           <a:xfrm>
-            <a:off x="1828800" y="1463040"/>
-            <a:ext cx="8534095" cy="3931920"/>
+            <a:off x="457200" y="6400800"/>
+            <a:ext cx="11277295" cy="365760"/>
           </a:xfrm>
           <a:prstGeom prst="rect">
             <a:avLst/>
@@ -3245,78 +3159,156 @@
           <a:noFill/>
         </p:spPr>
         <p:txBody>
-          <a:bodyPr wrap="square">
+          <a:bodyPr wrap="none">
             <a:spAutoFit/>
           </a:bodyPr>
           <a:lstStyle/>
           <a:p>
+            <a:pPr algn="ctr">
+              <a:defRPr sz="1000">
+                <a:solidFill>
+                  <a:srgbClr val="8892B0"/>
+                </a:solidFill>
+              </a:defRPr>
+            </a:pPr>
+            <a:r>
+              <a:t>Qualcomm Snapdragon® AI Lab Build &amp; Present Challenge • Solution Submission • September 2026</a:t>
+            </a:r>
+          </a:p>
+        </p:txBody>
+      </p:sp>
+      <p:sp>
+        <p:nvSpPr>
+          <p:cNvPr id="4" name="TextBox 3"/>
+          <p:cNvSpPr txBox="1"/>
+          <p:nvPr/>
+        </p:nvSpPr>
+        <p:spPr>
+          <a:xfrm>
+            <a:off x="914400" y="1828800"/>
+            <a:ext cx="10362895" cy="1828800"/>
+          </a:xfrm>
+          <a:prstGeom prst="rect">
+            <a:avLst/>
+          </a:prstGeom>
+          <a:noFill/>
+        </p:spPr>
+        <p:txBody>
+          <a:bodyPr wrap="none">
+            <a:spAutoFit/>
+          </a:bodyPr>
+          <a:lstStyle/>
+          <a:p>
+            <a:pPr algn="ctr">
+              <a:defRPr b="1" sz="4400">
+                <a:solidFill>
+                  <a:srgbClr val="00D4FF"/>
+                </a:solidFill>
+              </a:defRPr>
+            </a:pPr>
+            <a:r>
+              <a:t>QUALCOMM SNAPDRAGON® AI LAB CHALLENGE</a:t>
+            </a:r>
+            <a:br/>
+            <a:r>
+              <a:t>OmniSnap AI</a:t>
+            </a:r>
+          </a:p>
+          <a:p>
+            <a:pPr algn="ctr">
+              <a:spcBef>
+                <a:spcPts val="2000"/>
+              </a:spcBef>
+              <a:defRPr sz="2400">
+                <a:solidFill>
+                  <a:srgbClr val="FFFFFF"/>
+                </a:solidFill>
+              </a:defRPr>
+            </a:pPr>
+            <a:r>
+              <a:t>Zero-Cloud Autonomous Multimodal Copilot &amp; Privacy Intelligence for Snapdragon®-Powered HP OmniBook PCs</a:t>
+            </a:r>
+          </a:p>
+        </p:txBody>
+      </p:sp>
+      <p:sp>
+        <p:nvSpPr>
+          <p:cNvPr id="5" name="TextBox 4"/>
+          <p:cNvSpPr txBox="1"/>
+          <p:nvPr/>
+        </p:nvSpPr>
+        <p:spPr>
+          <a:xfrm>
+            <a:off x="1371600" y="4114800"/>
+            <a:ext cx="9448495" cy="1371600"/>
+          </a:xfrm>
+          <a:prstGeom prst="rect">
+            <a:avLst/>
+          </a:prstGeom>
+          <a:noFill/>
+        </p:spPr>
+        <p:txBody>
+          <a:bodyPr wrap="none">
+            <a:spAutoFit/>
+          </a:bodyPr>
+          <a:lstStyle/>
+          <a:p/>
+          <a:p>
             <a:pPr>
-              <a:defRPr sz="1200" b="1">
-                <a:solidFill>
-                  <a:srgbClr val="FF4B4B"/>
-                </a:solidFill>
-              </a:defRPr>
-            </a:pPr>
-            <a:r>
-              <a:t>QUALCOMM SNAPDRAGON® AI LAB CHALLENGE</a:t>
+              <a:spcAft>
+                <a:spcPts val="800"/>
+              </a:spcAft>
+              <a:defRPr sz="1800">
+                <a:solidFill>
+                  <a:srgbClr val="8892B0"/>
+                </a:solidFill>
+              </a:defRPr>
+            </a:pPr>
+            <a:r>
+              <a:t>• Accelerated by Qualcomm Hexagon NPU (45 TOPS) via QNN Execution Provider</a:t>
             </a:r>
           </a:p>
           <a:p>
             <a:pPr>
-              <a:defRPr sz="4000" b="1">
-                <a:solidFill>
-                  <a:srgbClr val="F8FAFC"/>
-                </a:solidFill>
-              </a:defRPr>
-            </a:pPr>
-            <a:r>
-              <a:t>OmniSnap AI</a:t>
+              <a:spcAft>
+                <a:spcPts val="800"/>
+              </a:spcAft>
+              <a:defRPr sz="1800">
+                <a:solidFill>
+                  <a:srgbClr val="8892B0"/>
+                </a:solidFill>
+              </a:defRPr>
+            </a:pPr>
+            <a:r>
+              <a:t>• Heterogeneous Qualcomm AI Hub Models: Whisper, Llama-3.2, YOLOv11 &amp; Local RAG</a:t>
             </a:r>
           </a:p>
           <a:p>
             <a:pPr>
-              <a:defRPr sz="1600">
-                <a:solidFill>
-                  <a:srgbClr val="06B6D4"/>
-                </a:solidFill>
-              </a:defRPr>
-            </a:pPr>
-            <a:r>
-              <a:t>Zero-Cloud Autonomous Multimodal Copilot &amp; Privacy Intelligence for Snapdragon®-Powered HP OmniBook PCs</a:t>
+              <a:spcAft>
+                <a:spcPts val="800"/>
+              </a:spcAft>
+              <a:defRPr sz="1800">
+                <a:solidFill>
+                  <a:srgbClr val="8892B0"/>
+                </a:solidFill>
+              </a:defRPr>
+            </a:pPr>
+            <a:r>
+              <a:t>• 100% Air-Gapped Privacy • 22.5hr Continuous AI Battery on HP OmniBook</a:t>
             </a:r>
           </a:p>
           <a:p>
             <a:br/>
-            <a:pPr>
-              <a:defRPr sz="1300">
-                <a:solidFill>
-                  <a:srgbClr val="94A3B8"/>
-                </a:solidFill>
-              </a:defRPr>
-            </a:pPr>
-            <a:r>
-              <a:t>• Accelerated by Qualcomm Hexagon NPU (45 TOPS) via QNN Execution Provider</a:t>
-            </a:r>
-            <a:br/>
-            <a:r>
-              <a:t>• Heterogeneous Qualcomm AI Hub Models: Whisper, Llama-3.2, YOLOv11 &amp; Local RAG</a:t>
-            </a:r>
-            <a:br/>
-            <a:r>
-              <a:t>• 100% Air-Gapped Privacy • 22.5hr Continuous AI Battery on HP OmniBook</a:t>
-            </a:r>
-          </a:p>
-          <a:p>
-            <a:br/>
-            <a:pPr>
-              <a:defRPr sz="1200" b="1">
-                <a:solidFill>
-                  <a:srgbClr val="F8FAFC"/>
-                </a:solidFill>
-              </a:defRPr>
-            </a:pPr>
-            <a:r>
-              <a:t>Submitted by: Anurag Kannojia  |  Target Platform: HP OmniBook X / Ultra (Snapdragon X Elite)</a:t>
+            <a:pPr algn="ctr">
+              <a:defRPr sz="1600" i="1">
+                <a:solidFill>
+                  <a:srgbClr val="00D4FF"/>
+                </a:solidFill>
+              </a:defRPr>
+            </a:pPr>
+            <a:r>
+              <a:t>Submitted by: Anurag Kannojiya | Target Platform: HP OmniBook X / Ultra (Snapdragon X Elite)</a:t>
             </a:r>
           </a:p>
         </p:txBody>
@@ -3354,10 +3346,12 @@
             <a:avLst/>
           </a:prstGeom>
           <a:solidFill>
-            <a:srgbClr val="0B0F19"/>
+            <a:srgbClr val="080C18"/>
           </a:solidFill>
           <a:ln>
-            <a:noFill/>
+            <a:solidFill>
+              <a:srgbClr val="080C18"/>
+            </a:solidFill>
           </a:ln>
         </p:spPr>
         <p:style>
@@ -3390,8 +3384,8 @@
         </p:nvSpPr>
         <p:spPr>
           <a:xfrm>
-            <a:off x="731520" y="365760"/>
-            <a:ext cx="10058400" cy="320040"/>
+            <a:off x="457200" y="6400800"/>
+            <a:ext cx="11277295" cy="365760"/>
           </a:xfrm>
           <a:prstGeom prst="rect">
             <a:avLst/>
@@ -3399,20 +3393,20 @@
           <a:noFill/>
         </p:spPr>
         <p:txBody>
-          <a:bodyPr wrap="square">
+          <a:bodyPr wrap="none">
             <a:spAutoFit/>
           </a:bodyPr>
           <a:lstStyle/>
           <a:p>
-            <a:pPr>
-              <a:defRPr sz="1000" b="1">
-                <a:solidFill>
-                  <a:srgbClr val="FF4B4B"/>
-                </a:solidFill>
-              </a:defRPr>
-            </a:pPr>
-            <a:r>
-              <a:t>SNAPDRAGON® AI LAB BUILD &amp; PRESENT CHALLENGE</a:t>
+            <a:pPr algn="ctr">
+              <a:defRPr sz="1000">
+                <a:solidFill>
+                  <a:srgbClr val="8892B0"/>
+                </a:solidFill>
+              </a:defRPr>
+            </a:pPr>
+            <a:r>
+              <a:t>Qualcomm Snapdragon® AI Lab Build &amp; Present Challenge • Solution Submission • September 2026</a:t>
             </a:r>
           </a:p>
         </p:txBody>
@@ -3425,8 +3419,8 @@
         </p:nvSpPr>
         <p:spPr>
           <a:xfrm>
-            <a:off x="731520" y="640080"/>
-            <a:ext cx="10515600" cy="548640"/>
+            <a:off x="548640" y="365760"/>
+            <a:ext cx="11094415" cy="914400"/>
           </a:xfrm>
           <a:prstGeom prst="rect">
             <a:avLst/>
@@ -3434,15 +3428,15 @@
           <a:noFill/>
         </p:spPr>
         <p:txBody>
-          <a:bodyPr wrap="square">
+          <a:bodyPr wrap="none">
             <a:spAutoFit/>
           </a:bodyPr>
           <a:lstStyle/>
           <a:p>
             <a:pPr>
-              <a:defRPr sz="2200" b="1">
-                <a:solidFill>
-                  <a:srgbClr val="F8FAFC"/>
+              <a:defRPr b="1" sz="3600">
+                <a:solidFill>
+                  <a:srgbClr val="00D4FF"/>
                 </a:solidFill>
               </a:defRPr>
             </a:pPr>
@@ -3460,18 +3454,18 @@
         </p:nvSpPr>
         <p:spPr>
           <a:xfrm>
-            <a:off x="731520" y="1371600"/>
-            <a:ext cx="10728655" cy="1005840"/>
+            <a:off x="548640" y="1645920"/>
+            <a:ext cx="2560320" cy="3200400"/>
           </a:xfrm>
           <a:prstGeom prst="roundRect">
             <a:avLst/>
           </a:prstGeom>
           <a:solidFill>
-            <a:srgbClr val="161E2E"/>
+            <a:srgbClr val="1A2744"/>
           </a:solidFill>
-          <a:ln w="12700">
+          <a:ln w="19050">
             <a:solidFill>
-              <a:srgbClr val="28354C"/>
+              <a:srgbClr val="00D4FF"/>
             </a:solidFill>
           </a:ln>
         </p:spPr>
@@ -3490,80 +3484,60 @@
           </a:fontRef>
         </p:style>
         <p:txBody>
-          <a:bodyPr rtlCol="0" anchor="ctr"/>
-          <a:lstStyle/>
-          <a:p>
-            <a:pPr algn="ctr"/>
-          </a:p>
-        </p:txBody>
-      </p:sp>
-      <p:sp>
-        <p:nvSpPr>
-          <p:cNvPr id="6" name="TextBox 5"/>
-          <p:cNvSpPr txBox="1"/>
-          <p:nvPr/>
-        </p:nvSpPr>
-        <p:spPr>
-          <a:xfrm>
-            <a:off x="1005840" y="1481328"/>
-            <a:ext cx="10149840" cy="777240"/>
-          </a:xfrm>
-          <a:prstGeom prst="rect">
-            <a:avLst/>
-          </a:prstGeom>
-          <a:noFill/>
-        </p:spPr>
-        <p:txBody>
-          <a:bodyPr wrap="square">
-            <a:spAutoFit/>
-          </a:bodyPr>
-          <a:lstStyle/>
+          <a:bodyPr rtlCol="0" anchor="ctr" wrap="square"/>
+          <a:lstStyle/>
+          <a:p>
+            <a:pPr algn="l">
+              <a:spcAft>
+                <a:spcPts val="1000"/>
+              </a:spcAft>
+              <a:defRPr b="1" sz="2000">
+                <a:solidFill>
+                  <a:srgbClr val="FFFFFF"/>
+                </a:solidFill>
+              </a:defRPr>
+            </a:pPr>
+            <a:r>
+              <a:t>🏆 Technical Implementation</a:t>
+            </a:r>
+          </a:p>
           <a:p>
             <a:pPr>
-              <a:defRPr sz="1400" b="1">
-                <a:solidFill>
-                  <a:srgbClr val="FF4B4B"/>
-                </a:solidFill>
-              </a:defRPr>
-            </a:pPr>
-            <a:r>
-              <a:t>🏆  Technical Implementation</a:t>
-            </a:r>
-          </a:p>
-          <a:p>
-            <a:pPr>
-              <a:defRPr sz="1100">
-                <a:solidFill>
-                  <a:srgbClr val="94A3B8"/>
-                </a:solidFill>
-              </a:defRPr>
-            </a:pPr>
-            <a:r>
-              <a:t>Multi-model pipeline (Whisper + Llama + YOLO + MiniLM) sourced from Qualcomm AI Hub and accelerated via QNN Execution Provider on the 45 TOPS Hexagon NPU.</a:t>
-            </a:r>
-          </a:p>
-        </p:txBody>
-      </p:sp>
-      <p:sp>
-        <p:nvSpPr>
-          <p:cNvPr id="7" name="Rounded Rectangle 6"/>
+              <a:spcAft>
+                <a:spcPts val="500"/>
+              </a:spcAft>
+              <a:defRPr sz="1400">
+                <a:solidFill>
+                  <a:srgbClr val="8892B0"/>
+                </a:solidFill>
+              </a:defRPr>
+            </a:pPr>
+            <a:r>
+              <a:t>Multi-model QNN pipeline from Qualcomm AI Hub</a:t>
+            </a:r>
+          </a:p>
+        </p:txBody>
+      </p:sp>
+      <p:sp>
+        <p:nvSpPr>
+          <p:cNvPr id="6" name="Rounded Rectangle 5"/>
           <p:cNvSpPr/>
           <p:nvPr/>
         </p:nvSpPr>
         <p:spPr>
           <a:xfrm>
-            <a:off x="731520" y="2514600"/>
-            <a:ext cx="10728655" cy="1005840"/>
+            <a:off x="3383280" y="1645920"/>
+            <a:ext cx="2560320" cy="3200400"/>
           </a:xfrm>
           <a:prstGeom prst="roundRect">
             <a:avLst/>
           </a:prstGeom>
           <a:solidFill>
-            <a:srgbClr val="161E2E"/>
+            <a:srgbClr val="1A2744"/>
           </a:solidFill>
-          <a:ln w="12700">
+          <a:ln w="19050">
             <a:solidFill>
-              <a:srgbClr val="28354C"/>
+              <a:srgbClr val="00D4FF"/>
             </a:solidFill>
           </a:ln>
         </p:spPr>
@@ -3582,80 +3556,60 @@
           </a:fontRef>
         </p:style>
         <p:txBody>
-          <a:bodyPr rtlCol="0" anchor="ctr"/>
-          <a:lstStyle/>
-          <a:p>
-            <a:pPr algn="ctr"/>
-          </a:p>
-        </p:txBody>
-      </p:sp>
-      <p:sp>
-        <p:nvSpPr>
-          <p:cNvPr id="8" name="TextBox 7"/>
-          <p:cNvSpPr txBox="1"/>
-          <p:nvPr/>
-        </p:nvSpPr>
-        <p:spPr>
-          <a:xfrm>
-            <a:off x="1005840" y="2624328"/>
-            <a:ext cx="10149840" cy="777240"/>
-          </a:xfrm>
-          <a:prstGeom prst="rect">
-            <a:avLst/>
-          </a:prstGeom>
-          <a:noFill/>
-        </p:spPr>
-        <p:txBody>
-          <a:bodyPr wrap="square">
-            <a:spAutoFit/>
-          </a:bodyPr>
-          <a:lstStyle/>
+          <a:bodyPr rtlCol="0" anchor="ctr" wrap="square"/>
+          <a:lstStyle/>
+          <a:p>
+            <a:pPr algn="l">
+              <a:spcAft>
+                <a:spcPts val="1000"/>
+              </a:spcAft>
+              <a:defRPr b="1" sz="2000">
+                <a:solidFill>
+                  <a:srgbClr val="FFFFFF"/>
+                </a:solidFill>
+              </a:defRPr>
+            </a:pPr>
+            <a:r>
+              <a:t>🏆 Application Use Case &amp; Innovation</a:t>
+            </a:r>
+          </a:p>
           <a:p>
             <a:pPr>
-              <a:defRPr sz="1400" b="1">
-                <a:solidFill>
-                  <a:srgbClr val="FF4B4B"/>
-                </a:solidFill>
-              </a:defRPr>
-            </a:pPr>
-            <a:r>
-              <a:t>🏆  Application Use Case &amp; Innovation</a:t>
-            </a:r>
-          </a:p>
-          <a:p>
-            <a:pPr>
-              <a:defRPr sz="1100">
-                <a:solidFill>
-                  <a:srgbClr val="94A3B8"/>
-                </a:solidFill>
-              </a:defRPr>
-            </a:pPr>
-            <a:r>
-              <a:t>Tackles the #1 pain point of modern AI: privacy, offline usability, and cloud cost. Turns HP OmniBook into a secure, air-gapped executive assistant.</a:t>
-            </a:r>
-          </a:p>
-        </p:txBody>
-      </p:sp>
-      <p:sp>
-        <p:nvSpPr>
-          <p:cNvPr id="9" name="Rounded Rectangle 8"/>
+              <a:spcAft>
+                <a:spcPts val="500"/>
+              </a:spcAft>
+              <a:defRPr sz="1400">
+                <a:solidFill>
+                  <a:srgbClr val="8892B0"/>
+                </a:solidFill>
+              </a:defRPr>
+            </a:pPr>
+            <a:r>
+              <a:t>Tackles privacy, offline usability, cloud cost</a:t>
+            </a:r>
+          </a:p>
+        </p:txBody>
+      </p:sp>
+      <p:sp>
+        <p:nvSpPr>
+          <p:cNvPr id="7" name="Rounded Rectangle 6"/>
           <p:cNvSpPr/>
           <p:nvPr/>
         </p:nvSpPr>
         <p:spPr>
           <a:xfrm>
-            <a:off x="731520" y="3657600"/>
-            <a:ext cx="10728655" cy="1005840"/>
+            <a:off x="6217920" y="1645920"/>
+            <a:ext cx="2560320" cy="3200400"/>
           </a:xfrm>
           <a:prstGeom prst="roundRect">
             <a:avLst/>
           </a:prstGeom>
           <a:solidFill>
-            <a:srgbClr val="161E2E"/>
+            <a:srgbClr val="1A2744"/>
           </a:solidFill>
-          <a:ln w="12700">
+          <a:ln w="19050">
             <a:solidFill>
-              <a:srgbClr val="28354C"/>
+              <a:srgbClr val="00D4FF"/>
             </a:solidFill>
           </a:ln>
         </p:spPr>
@@ -3674,80 +3628,60 @@
           </a:fontRef>
         </p:style>
         <p:txBody>
-          <a:bodyPr rtlCol="0" anchor="ctr"/>
-          <a:lstStyle/>
-          <a:p>
-            <a:pPr algn="ctr"/>
-          </a:p>
-        </p:txBody>
-      </p:sp>
-      <p:sp>
-        <p:nvSpPr>
-          <p:cNvPr id="10" name="TextBox 9"/>
-          <p:cNvSpPr txBox="1"/>
-          <p:nvPr/>
-        </p:nvSpPr>
-        <p:spPr>
-          <a:xfrm>
-            <a:off x="1005840" y="3767328"/>
-            <a:ext cx="10149840" cy="777240"/>
-          </a:xfrm>
-          <a:prstGeom prst="rect">
-            <a:avLst/>
-          </a:prstGeom>
-          <a:noFill/>
-        </p:spPr>
-        <p:txBody>
-          <a:bodyPr wrap="square">
-            <a:spAutoFit/>
-          </a:bodyPr>
-          <a:lstStyle/>
+          <a:bodyPr rtlCol="0" anchor="ctr" wrap="square"/>
+          <a:lstStyle/>
+          <a:p>
+            <a:pPr algn="l">
+              <a:spcAft>
+                <a:spcPts val="1000"/>
+              </a:spcAft>
+              <a:defRPr b="1" sz="2000">
+                <a:solidFill>
+                  <a:srgbClr val="FFFFFF"/>
+                </a:solidFill>
+              </a:defRPr>
+            </a:pPr>
+            <a:r>
+              <a:t>🏆 Deployment &amp; Accessibility</a:t>
+            </a:r>
+          </a:p>
           <a:p>
             <a:pPr>
-              <a:defRPr sz="1400" b="1">
-                <a:solidFill>
-                  <a:srgbClr val="FF4B4B"/>
-                </a:solidFill>
-              </a:defRPr>
-            </a:pPr>
-            <a:r>
-              <a:t>🏆  Deployment &amp; Accessibility</a:t>
-            </a:r>
-          </a:p>
-          <a:p>
-            <a:pPr>
-              <a:defRPr sz="1100">
-                <a:solidFill>
-                  <a:srgbClr val="94A3B8"/>
-                </a:solidFill>
-              </a:defRPr>
-            </a:pPr>
-            <a:r>
-              <a:t>Clean, functional FastAPI architecture with cross-platform fallback, automated tests, and intuitive Glassmorphism web UI.</a:t>
-            </a:r>
-          </a:p>
-        </p:txBody>
-      </p:sp>
-      <p:sp>
-        <p:nvSpPr>
-          <p:cNvPr id="11" name="Rounded Rectangle 10"/>
+              <a:spcAft>
+                <a:spcPts val="500"/>
+              </a:spcAft>
+              <a:defRPr sz="1400">
+                <a:solidFill>
+                  <a:srgbClr val="8892B0"/>
+                </a:solidFill>
+              </a:defRPr>
+            </a:pPr>
+            <a:r>
+              <a:t>Cross-platform fallback, automated tests, intuitive UI</a:t>
+            </a:r>
+          </a:p>
+        </p:txBody>
+      </p:sp>
+      <p:sp>
+        <p:nvSpPr>
+          <p:cNvPr id="8" name="Rounded Rectangle 7"/>
           <p:cNvSpPr/>
           <p:nvPr/>
         </p:nvSpPr>
         <p:spPr>
           <a:xfrm>
-            <a:off x="731520" y="4800600"/>
-            <a:ext cx="10728655" cy="1005840"/>
+            <a:off x="9052560" y="1645920"/>
+            <a:ext cx="2560320" cy="3200400"/>
           </a:xfrm>
           <a:prstGeom prst="roundRect">
             <a:avLst/>
           </a:prstGeom>
           <a:solidFill>
-            <a:srgbClr val="161E2E"/>
+            <a:srgbClr val="1A2744"/>
           </a:solidFill>
-          <a:ln w="12700">
+          <a:ln w="19050">
             <a:solidFill>
-              <a:srgbClr val="28354C"/>
+              <a:srgbClr val="00D4FF"/>
             </a:solidFill>
           </a:ln>
         </p:spPr>
@@ -3766,23 +3700,50 @@
           </a:fontRef>
         </p:style>
         <p:txBody>
-          <a:bodyPr rtlCol="0" anchor="ctr"/>
-          <a:lstStyle/>
-          <a:p>
-            <a:pPr algn="ctr"/>
-          </a:p>
-        </p:txBody>
-      </p:sp>
-      <p:sp>
-        <p:nvSpPr>
-          <p:cNvPr id="12" name="TextBox 11"/>
+          <a:bodyPr rtlCol="0" anchor="ctr" wrap="square"/>
+          <a:lstStyle/>
+          <a:p>
+            <a:pPr algn="l">
+              <a:spcAft>
+                <a:spcPts val="1000"/>
+              </a:spcAft>
+              <a:defRPr b="1" sz="2000">
+                <a:solidFill>
+                  <a:srgbClr val="FFFFFF"/>
+                </a:solidFill>
+              </a:defRPr>
+            </a:pPr>
+            <a:r>
+              <a:t>🏆 Presentation &amp; Documentation</a:t>
+            </a:r>
+          </a:p>
+          <a:p>
+            <a:pPr>
+              <a:spcAft>
+                <a:spcPts val="500"/>
+              </a:spcAft>
+              <a:defRPr sz="1400">
+                <a:solidFill>
+                  <a:srgbClr val="8892B0"/>
+                </a:solidFill>
+              </a:defRPr>
+            </a:pPr>
+            <a:r>
+              <a:t>Complete whitepaper, pitch deck, benchmarks, GitHub</a:t>
+            </a:r>
+          </a:p>
+        </p:txBody>
+      </p:sp>
+      <p:sp>
+        <p:nvSpPr>
+          <p:cNvPr id="9" name="TextBox 8"/>
           <p:cNvSpPr txBox="1"/>
           <p:nvPr/>
         </p:nvSpPr>
         <p:spPr>
           <a:xfrm>
-            <a:off x="1005840" y="4910328"/>
-            <a:ext cx="10149840" cy="777240"/>
+            <a:off x="548640" y="5303520"/>
+            <a:ext cx="11094415" cy="731520"/>
           </a:xfrm>
           <a:prstGeom prst="rect">
             <a:avLst/>
@@ -3790,112 +3751,24 @@
           <a:noFill/>
         </p:spPr>
         <p:txBody>
-          <a:bodyPr wrap="square">
-            <a:spAutoFit/>
-          </a:bodyPr>
-          <a:lstStyle/>
-          <a:p>
-            <a:pPr>
-              <a:defRPr sz="1400" b="1">
-                <a:solidFill>
-                  <a:srgbClr val="FF4B4B"/>
-                </a:solidFill>
-              </a:defRPr>
-            </a:pPr>
-            <a:r>
-              <a:t>🏆  Presentation &amp; Documentation</a:t>
-            </a:r>
-          </a:p>
-          <a:p>
-            <a:pPr>
-              <a:defRPr sz="1100">
-                <a:solidFill>
-                  <a:srgbClr val="94A3B8"/>
-                </a:solidFill>
-              </a:defRPr>
-            </a:pPr>
-            <a:r>
-              <a:t>Complete whitepaper, 10-slide pitch presentation, verifiable benchmarks, and comprehensive GitHub repository.</a:t>
-            </a:r>
-          </a:p>
-        </p:txBody>
-      </p:sp>
-      <p:sp>
-        <p:nvSpPr>
-          <p:cNvPr id="13" name="Rounded Rectangle 12"/>
-          <p:cNvSpPr/>
-          <p:nvPr/>
-        </p:nvSpPr>
-        <p:spPr>
-          <a:xfrm>
-            <a:off x="731520" y="6035040"/>
-            <a:ext cx="10728655" cy="548640"/>
-          </a:xfrm>
-          <a:prstGeom prst="roundRect">
-            <a:avLst/>
-          </a:prstGeom>
-          <a:solidFill>
-            <a:srgbClr val="161E2E"/>
-          </a:solidFill>
-          <a:ln w="12700">
-            <a:solidFill>
-              <a:srgbClr val="E60012"/>
-            </a:solidFill>
-          </a:ln>
-        </p:spPr>
-        <p:style>
-          <a:lnRef idx="1">
-            <a:schemeClr val="accent1"/>
-          </a:lnRef>
-          <a:fillRef idx="3">
-            <a:schemeClr val="accent1"/>
-          </a:fillRef>
-          <a:effectRef idx="2">
-            <a:schemeClr val="accent1"/>
-          </a:effectRef>
-          <a:fontRef idx="minor">
-            <a:schemeClr val="lt1"/>
-          </a:fontRef>
-        </p:style>
-        <p:txBody>
-          <a:bodyPr rtlCol="0" anchor="ctr"/>
-          <a:lstStyle/>
-          <a:p>
-            <a:pPr algn="ctr"/>
-          </a:p>
-        </p:txBody>
-      </p:sp>
-      <p:sp>
-        <p:nvSpPr>
-          <p:cNvPr id="14" name="TextBox 13"/>
-          <p:cNvSpPr txBox="1"/>
-          <p:nvPr/>
-        </p:nvSpPr>
-        <p:spPr>
-          <a:xfrm>
-            <a:off x="914400" y="6080760"/>
-            <a:ext cx="10332720" cy="457200"/>
-          </a:xfrm>
-          <a:prstGeom prst="rect">
-            <a:avLst/>
-          </a:prstGeom>
-          <a:noFill/>
-        </p:spPr>
-        <p:txBody>
           <a:bodyPr wrap="none">
             <a:spAutoFit/>
           </a:bodyPr>
           <a:lstStyle/>
           <a:p>
-            <a:pPr>
-              <a:defRPr sz="1100" b="1">
-                <a:solidFill>
-                  <a:srgbClr val="F8FAFC"/>
-                </a:solidFill>
-              </a:defRPr>
-            </a:pPr>
-            <a:r>
-              <a:t>Thank you Qualcomm &amp; Snapdragon AI Lab! Ready for demo on Snapdragon-powered HP PCs.</a:t>
+            <a:pPr algn="ctr">
+              <a:defRPr b="1" sz="2400">
+                <a:solidFill>
+                  <a:srgbClr val="00D4FF"/>
+                </a:solidFill>
+              </a:defRPr>
+            </a:pPr>
+            <a:r>
+              <a:t>Thank you Qualcomm &amp; Snapdragon AI Lab!</a:t>
+            </a:r>
+            <a:br/>
+            <a:r>
+              <a:t>Ready for demo on Snapdragon-powered HP PCs.</a:t>
             </a:r>
           </a:p>
         </p:txBody>
@@ -3933,10 +3806,12 @@
             <a:avLst/>
           </a:prstGeom>
           <a:solidFill>
-            <a:srgbClr val="0B0F19"/>
+            <a:srgbClr val="080C18"/>
           </a:solidFill>
           <a:ln>
-            <a:noFill/>
+            <a:solidFill>
+              <a:srgbClr val="080C18"/>
+            </a:solidFill>
           </a:ln>
         </p:spPr>
         <p:style>
@@ -3969,8 +3844,8 @@
         </p:nvSpPr>
         <p:spPr>
           <a:xfrm>
-            <a:off x="731520" y="365760"/>
-            <a:ext cx="10058400" cy="320040"/>
+            <a:off x="457200" y="6400800"/>
+            <a:ext cx="11277295" cy="365760"/>
           </a:xfrm>
           <a:prstGeom prst="rect">
             <a:avLst/>
@@ -3978,20 +3853,20 @@
           <a:noFill/>
         </p:spPr>
         <p:txBody>
-          <a:bodyPr wrap="square">
+          <a:bodyPr wrap="none">
             <a:spAutoFit/>
           </a:bodyPr>
           <a:lstStyle/>
           <a:p>
-            <a:pPr>
-              <a:defRPr sz="1000" b="1">
-                <a:solidFill>
-                  <a:srgbClr val="FF4B4B"/>
-                </a:solidFill>
-              </a:defRPr>
-            </a:pPr>
-            <a:r>
-              <a:t>SNAPDRAGON® AI LAB BUILD &amp; PRESENT CHALLENGE</a:t>
+            <a:pPr algn="ctr">
+              <a:defRPr sz="1000">
+                <a:solidFill>
+                  <a:srgbClr val="8892B0"/>
+                </a:solidFill>
+              </a:defRPr>
+            </a:pPr>
+            <a:r>
+              <a:t>Qualcomm Snapdragon® AI Lab Build &amp; Present Challenge • Solution Submission • September 2026</a:t>
             </a:r>
           </a:p>
         </p:txBody>
@@ -4004,8 +3879,8 @@
         </p:nvSpPr>
         <p:spPr>
           <a:xfrm>
-            <a:off x="731520" y="640080"/>
-            <a:ext cx="10515600" cy="548640"/>
+            <a:off x="548640" y="365760"/>
+            <a:ext cx="11094415" cy="914400"/>
           </a:xfrm>
           <a:prstGeom prst="rect">
             <a:avLst/>
@@ -4013,15 +3888,15 @@
           <a:noFill/>
         </p:spPr>
         <p:txBody>
-          <a:bodyPr wrap="square">
+          <a:bodyPr wrap="none">
             <a:spAutoFit/>
           </a:bodyPr>
           <a:lstStyle/>
           <a:p>
             <a:pPr>
-              <a:defRPr sz="2200" b="1">
-                <a:solidFill>
-                  <a:srgbClr val="F8FAFC"/>
+              <a:defRPr b="1" sz="3600">
+                <a:solidFill>
+                  <a:srgbClr val="00D4FF"/>
                 </a:solidFill>
               </a:defRPr>
             </a:pPr>
@@ -4039,18 +3914,18 @@
         </p:nvSpPr>
         <p:spPr>
           <a:xfrm>
-            <a:off x="731520" y="1371600"/>
-            <a:ext cx="5120640" cy="2194560"/>
+            <a:off x="548640" y="1828800"/>
+            <a:ext cx="2560320" cy="3657600"/>
           </a:xfrm>
           <a:prstGeom prst="roundRect">
             <a:avLst/>
           </a:prstGeom>
           <a:solidFill>
-            <a:srgbClr val="161E2E"/>
+            <a:srgbClr val="1A2744"/>
           </a:solidFill>
-          <a:ln w="12700">
+          <a:ln w="19050">
             <a:solidFill>
-              <a:srgbClr val="28354C"/>
+              <a:srgbClr val="00D4FF"/>
             </a:solidFill>
           </a:ln>
         </p:spPr>
@@ -4069,81 +3944,60 @@
           </a:fontRef>
         </p:style>
         <p:txBody>
-          <a:bodyPr rtlCol="0" anchor="ctr"/>
-          <a:lstStyle/>
-          <a:p>
-            <a:pPr algn="ctr"/>
-          </a:p>
-        </p:txBody>
-      </p:sp>
-      <p:sp>
-        <p:nvSpPr>
-          <p:cNvPr id="6" name="TextBox 5"/>
-          <p:cNvSpPr txBox="1"/>
-          <p:nvPr/>
-        </p:nvSpPr>
-        <p:spPr>
-          <a:xfrm>
-            <a:off x="1005840" y="1554480"/>
-            <a:ext cx="4572000" cy="1828800"/>
-          </a:xfrm>
-          <a:prstGeom prst="rect">
-            <a:avLst/>
-          </a:prstGeom>
-          <a:noFill/>
-        </p:spPr>
-        <p:txBody>
-          <a:bodyPr wrap="square">
-            <a:spAutoFit/>
-          </a:bodyPr>
-          <a:lstStyle/>
+          <a:bodyPr rtlCol="0" anchor="ctr" wrap="square"/>
+          <a:lstStyle/>
+          <a:p>
+            <a:pPr algn="l">
+              <a:spcAft>
+                <a:spcPts val="1000"/>
+              </a:spcAft>
+              <a:defRPr b="1" sz="2000">
+                <a:solidFill>
+                  <a:srgbClr val="FFFFFF"/>
+                </a:solidFill>
+              </a:defRPr>
+            </a:pPr>
+            <a:r>
+              <a:t>❌ Cloud Latency &amp; Jitter</a:t>
+            </a:r>
+          </a:p>
           <a:p>
             <a:pPr>
-              <a:defRPr sz="1600" b="1">
-                <a:solidFill>
-                  <a:srgbClr val="FF4B4B"/>
-                </a:solidFill>
-              </a:defRPr>
-            </a:pPr>
-            <a:r>
-              <a:t>❌  Cloud Latency &amp; Jitter</a:t>
-            </a:r>
-          </a:p>
-          <a:p>
-            <a:br/>
-            <a:pPr>
-              <a:defRPr sz="1200">
-                <a:solidFill>
-                  <a:srgbClr val="94A3B8"/>
-                </a:solidFill>
-              </a:defRPr>
-            </a:pPr>
-            <a:r>
-              <a:t>250ms - 1000ms+ round-trip latency disrupts fluid voice meetings, typing, and screen-sharing interactions.</a:t>
-            </a:r>
-          </a:p>
-        </p:txBody>
-      </p:sp>
-      <p:sp>
-        <p:nvSpPr>
-          <p:cNvPr id="7" name="Rounded Rectangle 6"/>
+              <a:spcAft>
+                <a:spcPts val="500"/>
+              </a:spcAft>
+              <a:defRPr sz="1400">
+                <a:solidFill>
+                  <a:srgbClr val="8892B0"/>
+                </a:solidFill>
+              </a:defRPr>
+            </a:pPr>
+            <a:r>
+              <a:t>250ms-1000ms+ round-trip latency</a:t>
+            </a:r>
+          </a:p>
+        </p:txBody>
+      </p:sp>
+      <p:sp>
+        <p:nvSpPr>
+          <p:cNvPr id="6" name="Rounded Rectangle 5"/>
           <p:cNvSpPr/>
           <p:nvPr/>
         </p:nvSpPr>
         <p:spPr>
           <a:xfrm>
-            <a:off x="6126480" y="1371600"/>
-            <a:ext cx="5120640" cy="2194560"/>
+            <a:off x="3383280" y="1828800"/>
+            <a:ext cx="2560320" cy="3657600"/>
           </a:xfrm>
           <a:prstGeom prst="roundRect">
             <a:avLst/>
           </a:prstGeom>
           <a:solidFill>
-            <a:srgbClr val="161E2E"/>
+            <a:srgbClr val="1A2744"/>
           </a:solidFill>
-          <a:ln w="12700">
+          <a:ln w="19050">
             <a:solidFill>
-              <a:srgbClr val="28354C"/>
+              <a:srgbClr val="00D4FF"/>
             </a:solidFill>
           </a:ln>
         </p:spPr>
@@ -4162,81 +4016,60 @@
           </a:fontRef>
         </p:style>
         <p:txBody>
-          <a:bodyPr rtlCol="0" anchor="ctr"/>
-          <a:lstStyle/>
-          <a:p>
-            <a:pPr algn="ctr"/>
-          </a:p>
-        </p:txBody>
-      </p:sp>
-      <p:sp>
-        <p:nvSpPr>
-          <p:cNvPr id="8" name="TextBox 7"/>
-          <p:cNvSpPr txBox="1"/>
-          <p:nvPr/>
-        </p:nvSpPr>
-        <p:spPr>
-          <a:xfrm>
-            <a:off x="6400800" y="1554480"/>
-            <a:ext cx="4572000" cy="1828800"/>
-          </a:xfrm>
-          <a:prstGeom prst="rect">
-            <a:avLst/>
-          </a:prstGeom>
-          <a:noFill/>
-        </p:spPr>
-        <p:txBody>
-          <a:bodyPr wrap="square">
-            <a:spAutoFit/>
-          </a:bodyPr>
-          <a:lstStyle/>
+          <a:bodyPr rtlCol="0" anchor="ctr" wrap="square"/>
+          <a:lstStyle/>
+          <a:p>
+            <a:pPr algn="l">
+              <a:spcAft>
+                <a:spcPts val="1000"/>
+              </a:spcAft>
+              <a:defRPr b="1" sz="2000">
+                <a:solidFill>
+                  <a:srgbClr val="FFFFFF"/>
+                </a:solidFill>
+              </a:defRPr>
+            </a:pPr>
+            <a:r>
+              <a:t>❌ Corporate Data &amp; IP Leaks</a:t>
+            </a:r>
+          </a:p>
           <a:p>
             <a:pPr>
-              <a:defRPr sz="1600" b="1">
-                <a:solidFill>
-                  <a:srgbClr val="E60012"/>
-                </a:solidFill>
-              </a:defRPr>
-            </a:pPr>
-            <a:r>
-              <a:t>❌  Corporate Data &amp; IP Leaks</a:t>
-            </a:r>
-          </a:p>
-          <a:p>
-            <a:br/>
-            <a:pPr>
-              <a:defRPr sz="1200">
-                <a:solidFill>
-                  <a:srgbClr val="94A3B8"/>
-                </a:solidFill>
-              </a:defRPr>
-            </a:pPr>
-            <a:r>
-              <a:t>Streaming confidential meetings, source code, and financial documents to remote third-party LLM clouds creates severe compliance vulnerabilities.</a:t>
-            </a:r>
-          </a:p>
-        </p:txBody>
-      </p:sp>
-      <p:sp>
-        <p:nvSpPr>
-          <p:cNvPr id="9" name="Rounded Rectangle 8"/>
+              <a:spcAft>
+                <a:spcPts val="500"/>
+              </a:spcAft>
+              <a:defRPr sz="1400">
+                <a:solidFill>
+                  <a:srgbClr val="8892B0"/>
+                </a:solidFill>
+              </a:defRPr>
+            </a:pPr>
+            <a:r>
+              <a:t>Streaming confidential data to 3rd-party LLM clouds</a:t>
+            </a:r>
+          </a:p>
+        </p:txBody>
+      </p:sp>
+      <p:sp>
+        <p:nvSpPr>
+          <p:cNvPr id="7" name="Rounded Rectangle 6"/>
           <p:cNvSpPr/>
           <p:nvPr/>
         </p:nvSpPr>
         <p:spPr>
           <a:xfrm>
-            <a:off x="731520" y="3840480"/>
-            <a:ext cx="5120640" cy="2194560"/>
+            <a:off x="6217920" y="1828800"/>
+            <a:ext cx="2560320" cy="3657600"/>
           </a:xfrm>
           <a:prstGeom prst="roundRect">
             <a:avLst/>
           </a:prstGeom>
           <a:solidFill>
-            <a:srgbClr val="161E2E"/>
+            <a:srgbClr val="1A2744"/>
           </a:solidFill>
-          <a:ln w="12700">
+          <a:ln w="19050">
             <a:solidFill>
-              <a:srgbClr val="28354C"/>
+              <a:srgbClr val="00D4FF"/>
             </a:solidFill>
           </a:ln>
         </p:spPr>
@@ -4255,81 +4088,60 @@
           </a:fontRef>
         </p:style>
         <p:txBody>
-          <a:bodyPr rtlCol="0" anchor="ctr"/>
-          <a:lstStyle/>
-          <a:p>
-            <a:pPr algn="ctr"/>
-          </a:p>
-        </p:txBody>
-      </p:sp>
-      <p:sp>
-        <p:nvSpPr>
-          <p:cNvPr id="10" name="TextBox 9"/>
-          <p:cNvSpPr txBox="1"/>
-          <p:nvPr/>
-        </p:nvSpPr>
-        <p:spPr>
-          <a:xfrm>
-            <a:off x="1005840" y="4023360"/>
-            <a:ext cx="4572000" cy="1828800"/>
-          </a:xfrm>
-          <a:prstGeom prst="rect">
-            <a:avLst/>
-          </a:prstGeom>
-          <a:noFill/>
-        </p:spPr>
-        <p:txBody>
-          <a:bodyPr wrap="square">
-            <a:spAutoFit/>
-          </a:bodyPr>
-          <a:lstStyle/>
+          <a:bodyPr rtlCol="0" anchor="ctr" wrap="square"/>
+          <a:lstStyle/>
+          <a:p>
+            <a:pPr algn="l">
+              <a:spcAft>
+                <a:spcPts val="1000"/>
+              </a:spcAft>
+              <a:defRPr b="1" sz="2000">
+                <a:solidFill>
+                  <a:srgbClr val="FFFFFF"/>
+                </a:solidFill>
+              </a:defRPr>
+            </a:pPr>
+            <a:r>
+              <a:t>❌ Battery Drain &amp; Thermals on x86</a:t>
+            </a:r>
+          </a:p>
           <a:p>
             <a:pPr>
-              <a:defRPr sz="1600" b="1">
-                <a:solidFill>
-                  <a:srgbClr val="F59E0B"/>
-                </a:solidFill>
-              </a:defRPr>
-            </a:pPr>
-            <a:r>
-              <a:t>❌  Battery Drain &amp; Thermals on x86</a:t>
-            </a:r>
-          </a:p>
-          <a:p>
-            <a:br/>
-            <a:pPr>
-              <a:defRPr sz="1200">
-                <a:solidFill>
-                  <a:srgbClr val="94A3B8"/>
-                </a:solidFill>
-              </a:defRPr>
-            </a:pPr>
-            <a:r>
-              <a:t>Legacy x86 PC chips consume 35W-65W running AI, triggering noisy thermal fans and draining laptop batteries within 3 hours.</a:t>
-            </a:r>
-          </a:p>
-        </p:txBody>
-      </p:sp>
-      <p:sp>
-        <p:nvSpPr>
-          <p:cNvPr id="11" name="Rounded Rectangle 10"/>
+              <a:spcAft>
+                <a:spcPts val="500"/>
+              </a:spcAft>
+              <a:defRPr sz="1400">
+                <a:solidFill>
+                  <a:srgbClr val="8892B0"/>
+                </a:solidFill>
+              </a:defRPr>
+            </a:pPr>
+            <a:r>
+              <a:t>35W-65W consuming AI, 3hr battery</a:t>
+            </a:r>
+          </a:p>
+        </p:txBody>
+      </p:sp>
+      <p:sp>
+        <p:nvSpPr>
+          <p:cNvPr id="8" name="Rounded Rectangle 7"/>
           <p:cNvSpPr/>
           <p:nvPr/>
         </p:nvSpPr>
         <p:spPr>
           <a:xfrm>
-            <a:off x="6126480" y="3840480"/>
-            <a:ext cx="5120640" cy="2194560"/>
+            <a:off x="9052560" y="1828800"/>
+            <a:ext cx="2560320" cy="3657600"/>
           </a:xfrm>
           <a:prstGeom prst="roundRect">
             <a:avLst/>
           </a:prstGeom>
           <a:solidFill>
-            <a:srgbClr val="161E2E"/>
+            <a:srgbClr val="1A2744"/>
           </a:solidFill>
-          <a:ln w="12700">
+          <a:ln w="19050">
             <a:solidFill>
-              <a:srgbClr val="28354C"/>
+              <a:srgbClr val="00D4FF"/>
             </a:solidFill>
           </a:ln>
         </p:spPr>
@@ -4348,57 +4160,36 @@
           </a:fontRef>
         </p:style>
         <p:txBody>
-          <a:bodyPr rtlCol="0" anchor="ctr"/>
-          <a:lstStyle/>
-          <a:p>
-            <a:pPr algn="ctr"/>
-          </a:p>
-        </p:txBody>
-      </p:sp>
-      <p:sp>
-        <p:nvSpPr>
-          <p:cNvPr id="12" name="TextBox 11"/>
-          <p:cNvSpPr txBox="1"/>
-          <p:nvPr/>
-        </p:nvSpPr>
-        <p:spPr>
-          <a:xfrm>
-            <a:off x="6400800" y="4023360"/>
-            <a:ext cx="4572000" cy="1828800"/>
-          </a:xfrm>
-          <a:prstGeom prst="rect">
-            <a:avLst/>
-          </a:prstGeom>
-          <a:noFill/>
-        </p:spPr>
-        <p:txBody>
-          <a:bodyPr wrap="square">
-            <a:spAutoFit/>
-          </a:bodyPr>
-          <a:lstStyle/>
+          <a:bodyPr rtlCol="0" anchor="ctr" wrap="square"/>
+          <a:lstStyle/>
+          <a:p>
+            <a:pPr algn="l">
+              <a:spcAft>
+                <a:spcPts val="1000"/>
+              </a:spcAft>
+              <a:defRPr b="1" sz="2000">
+                <a:solidFill>
+                  <a:srgbClr val="FFFFFF"/>
+                </a:solidFill>
+              </a:defRPr>
+            </a:pPr>
+            <a:r>
+              <a:t>❌ Recurring Cost &amp; Offline Failure</a:t>
+            </a:r>
+          </a:p>
           <a:p>
             <a:pPr>
-              <a:defRPr sz="1600" b="1">
-                <a:solidFill>
-                  <a:srgbClr val="06B6D4"/>
-                </a:solidFill>
-              </a:defRPr>
-            </a:pPr>
-            <a:r>
-              <a:t>❌  Recurring Cost &amp; Offline Failure</a:t>
-            </a:r>
-          </a:p>
-          <a:p>
-            <a:br/>
-            <a:pPr>
-              <a:defRPr sz="1200">
-                <a:solidFill>
-                  <a:srgbClr val="94A3B8"/>
-                </a:solidFill>
-              </a:defRPr>
-            </a:pPr>
-            <a:r>
-              <a:t>Cloud subscriptions ($20-$30/seat/mo) become astronomical at scale. Moreover, Cloud AI is completely dead in flights, trains, or low-connectivity zones.</a:t>
+              <a:spcAft>
+                <a:spcPts val="500"/>
+              </a:spcAft>
+              <a:defRPr sz="1400">
+                <a:solidFill>
+                  <a:srgbClr val="8892B0"/>
+                </a:solidFill>
+              </a:defRPr>
+            </a:pPr>
+            <a:r>
+              <a:t>$20-30/seat/mo, dead offline</a:t>
             </a:r>
           </a:p>
         </p:txBody>
@@ -4436,10 +4227,12 @@
             <a:avLst/>
           </a:prstGeom>
           <a:solidFill>
-            <a:srgbClr val="0B0F19"/>
+            <a:srgbClr val="080C18"/>
           </a:solidFill>
           <a:ln>
-            <a:noFill/>
+            <a:solidFill>
+              <a:srgbClr val="080C18"/>
+            </a:solidFill>
           </a:ln>
         </p:spPr>
         <p:style>
@@ -4472,8 +4265,8 @@
         </p:nvSpPr>
         <p:spPr>
           <a:xfrm>
-            <a:off x="731520" y="365760"/>
-            <a:ext cx="10058400" cy="320040"/>
+            <a:off x="457200" y="6400800"/>
+            <a:ext cx="11277295" cy="365760"/>
           </a:xfrm>
           <a:prstGeom prst="rect">
             <a:avLst/>
@@ -4481,20 +4274,20 @@
           <a:noFill/>
         </p:spPr>
         <p:txBody>
-          <a:bodyPr wrap="square">
+          <a:bodyPr wrap="none">
             <a:spAutoFit/>
           </a:bodyPr>
           <a:lstStyle/>
           <a:p>
-            <a:pPr>
-              <a:defRPr sz="1000" b="1">
-                <a:solidFill>
-                  <a:srgbClr val="FF4B4B"/>
-                </a:solidFill>
-              </a:defRPr>
-            </a:pPr>
-            <a:r>
-              <a:t>SNAPDRAGON® AI LAB BUILD &amp; PRESENT CHALLENGE</a:t>
+            <a:pPr algn="ctr">
+              <a:defRPr sz="1000">
+                <a:solidFill>
+                  <a:srgbClr val="8892B0"/>
+                </a:solidFill>
+              </a:defRPr>
+            </a:pPr>
+            <a:r>
+              <a:t>Qualcomm Snapdragon® AI Lab Build &amp; Present Challenge • Solution Submission • September 2026</a:t>
             </a:r>
           </a:p>
         </p:txBody>
@@ -4507,8 +4300,8 @@
         </p:nvSpPr>
         <p:spPr>
           <a:xfrm>
-            <a:off x="731520" y="640080"/>
-            <a:ext cx="10515600" cy="548640"/>
+            <a:off x="548640" y="365760"/>
+            <a:ext cx="11094415" cy="914400"/>
           </a:xfrm>
           <a:prstGeom prst="rect">
             <a:avLst/>
@@ -4516,15 +4309,15 @@
           <a:noFill/>
         </p:spPr>
         <p:txBody>
-          <a:bodyPr wrap="square">
+          <a:bodyPr wrap="none">
             <a:spAutoFit/>
           </a:bodyPr>
           <a:lstStyle/>
           <a:p>
             <a:pPr>
-              <a:defRPr sz="2200" b="1">
-                <a:solidFill>
-                  <a:srgbClr val="F8FAFC"/>
+              <a:defRPr b="1" sz="3600">
+                <a:solidFill>
+                  <a:srgbClr val="00D4FF"/>
                 </a:solidFill>
               </a:defRPr>
             </a:pPr>
@@ -4542,18 +4335,18 @@
         </p:nvSpPr>
         <p:spPr>
           <a:xfrm>
-            <a:off x="731520" y="1371600"/>
-            <a:ext cx="5120640" cy="2194560"/>
+            <a:off x="548640" y="1828800"/>
+            <a:ext cx="2560320" cy="3657600"/>
           </a:xfrm>
           <a:prstGeom prst="roundRect">
             <a:avLst/>
           </a:prstGeom>
           <a:solidFill>
-            <a:srgbClr val="161E2E"/>
+            <a:srgbClr val="1A2744"/>
           </a:solidFill>
-          <a:ln w="12700">
+          <a:ln w="19050">
             <a:solidFill>
-              <a:srgbClr val="28354C"/>
+              <a:srgbClr val="00D4FF"/>
             </a:solidFill>
           </a:ln>
         </p:spPr>
@@ -4572,81 +4365,60 @@
           </a:fontRef>
         </p:style>
         <p:txBody>
-          <a:bodyPr rtlCol="0" anchor="ctr"/>
-          <a:lstStyle/>
-          <a:p>
-            <a:pPr algn="ctr"/>
-          </a:p>
-        </p:txBody>
-      </p:sp>
-      <p:sp>
-        <p:nvSpPr>
-          <p:cNvPr id="6" name="TextBox 5"/>
-          <p:cNvSpPr txBox="1"/>
-          <p:nvPr/>
-        </p:nvSpPr>
-        <p:spPr>
-          <a:xfrm>
-            <a:off x="1005840" y="1554480"/>
-            <a:ext cx="4572000" cy="1828800"/>
-          </a:xfrm>
-          <a:prstGeom prst="rect">
-            <a:avLst/>
-          </a:prstGeom>
-          <a:noFill/>
-        </p:spPr>
-        <p:txBody>
-          <a:bodyPr wrap="square">
-            <a:spAutoFit/>
-          </a:bodyPr>
-          <a:lstStyle/>
+          <a:bodyPr rtlCol="0" anchor="ctr" wrap="square"/>
+          <a:lstStyle/>
+          <a:p>
+            <a:pPr algn="l">
+              <a:spcAft>
+                <a:spcPts val="1000"/>
+              </a:spcAft>
+              <a:defRPr b="1" sz="2000">
+                <a:solidFill>
+                  <a:srgbClr val="FFFFFF"/>
+                </a:solidFill>
+              </a:defRPr>
+            </a:pPr>
+            <a:r>
+              <a:t>✅ 100% On-Device Hexagon NPU</a:t>
+            </a:r>
+          </a:p>
           <a:p>
             <a:pPr>
-              <a:defRPr sz="1600" b="1">
-                <a:solidFill>
-                  <a:srgbClr val="10B981"/>
-                </a:solidFill>
-              </a:defRPr>
-            </a:pPr>
-            <a:r>
-              <a:t>✅  100% On-Device Hexagon NPU</a:t>
-            </a:r>
-          </a:p>
-          <a:p>
-            <a:br/>
-            <a:pPr>
-              <a:defRPr sz="1200">
-                <a:solidFill>
-                  <a:srgbClr val="94A3B8"/>
-                </a:solidFill>
-              </a:defRPr>
-            </a:pPr>
-            <a:r>
-              <a:t>Leverages the 45 TOPS Qualcomm Hexagon NPU on Snapdragon X Elite/Plus for sub-12ms speech and sub-30ms LLM inference.</a:t>
-            </a:r>
-          </a:p>
-        </p:txBody>
-      </p:sp>
-      <p:sp>
-        <p:nvSpPr>
-          <p:cNvPr id="7" name="Rounded Rectangle 6"/>
+              <a:spcAft>
+                <a:spcPts val="500"/>
+              </a:spcAft>
+              <a:defRPr sz="1400">
+                <a:solidFill>
+                  <a:srgbClr val="8892B0"/>
+                </a:solidFill>
+              </a:defRPr>
+            </a:pPr>
+            <a:r>
+              <a:t>45 TOPS, sub-12ms speech, sub-30ms LLM</a:t>
+            </a:r>
+          </a:p>
+        </p:txBody>
+      </p:sp>
+      <p:sp>
+        <p:nvSpPr>
+          <p:cNvPr id="6" name="Rounded Rectangle 5"/>
           <p:cNvSpPr/>
           <p:nvPr/>
         </p:nvSpPr>
         <p:spPr>
           <a:xfrm>
-            <a:off x="6126480" y="1371600"/>
-            <a:ext cx="5120640" cy="2194560"/>
+            <a:off x="3383280" y="1828800"/>
+            <a:ext cx="2560320" cy="3657600"/>
           </a:xfrm>
           <a:prstGeom prst="roundRect">
             <a:avLst/>
           </a:prstGeom>
           <a:solidFill>
-            <a:srgbClr val="161E2E"/>
+            <a:srgbClr val="1A2744"/>
           </a:solidFill>
-          <a:ln w="12700">
+          <a:ln w="19050">
             <a:solidFill>
-              <a:srgbClr val="28354C"/>
+              <a:srgbClr val="00D4FF"/>
             </a:solidFill>
           </a:ln>
         </p:spPr>
@@ -4665,81 +4437,60 @@
           </a:fontRef>
         </p:style>
         <p:txBody>
-          <a:bodyPr rtlCol="0" anchor="ctr"/>
-          <a:lstStyle/>
-          <a:p>
-            <a:pPr algn="ctr"/>
-          </a:p>
-        </p:txBody>
-      </p:sp>
-      <p:sp>
-        <p:nvSpPr>
-          <p:cNvPr id="8" name="TextBox 7"/>
-          <p:cNvSpPr txBox="1"/>
-          <p:nvPr/>
-        </p:nvSpPr>
-        <p:spPr>
-          <a:xfrm>
-            <a:off x="6400800" y="1554480"/>
-            <a:ext cx="4572000" cy="1828800"/>
-          </a:xfrm>
-          <a:prstGeom prst="rect">
-            <a:avLst/>
-          </a:prstGeom>
-          <a:noFill/>
-        </p:spPr>
-        <p:txBody>
-          <a:bodyPr wrap="square">
-            <a:spAutoFit/>
-          </a:bodyPr>
-          <a:lstStyle/>
+          <a:bodyPr rtlCol="0" anchor="ctr" wrap="square"/>
+          <a:lstStyle/>
+          <a:p>
+            <a:pPr algn="l">
+              <a:spcAft>
+                <a:spcPts val="1000"/>
+              </a:spcAft>
+              <a:defRPr b="1" sz="2000">
+                <a:solidFill>
+                  <a:srgbClr val="FFFFFF"/>
+                </a:solidFill>
+              </a:defRPr>
+            </a:pPr>
+            <a:r>
+              <a:t>✅ Qualcomm AI Hub Model Zoo</a:t>
+            </a:r>
+          </a:p>
           <a:p>
             <a:pPr>
-              <a:defRPr sz="1600" b="1">
-                <a:solidFill>
-                  <a:srgbClr val="FF4B4B"/>
-                </a:solidFill>
-              </a:defRPr>
-            </a:pPr>
-            <a:r>
-              <a:t>✅  Qualcomm AI Hub Model Zoo</a:t>
-            </a:r>
-          </a:p>
-          <a:p>
-            <a:br/>
-            <a:pPr>
-              <a:defRPr sz="1200">
-                <a:solidFill>
-                  <a:srgbClr val="94A3B8"/>
-                </a:solidFill>
-              </a:defRPr>
-            </a:pPr>
-            <a:r>
-              <a:t>Integrates pre-compiled, INT4/INT8 quantized models specifically tuned for Qualcomm silicon with QNN Execution Provider.</a:t>
-            </a:r>
-          </a:p>
-        </p:txBody>
-      </p:sp>
-      <p:sp>
-        <p:nvSpPr>
-          <p:cNvPr id="9" name="Rounded Rectangle 8"/>
+              <a:spcAft>
+                <a:spcPts val="500"/>
+              </a:spcAft>
+              <a:defRPr sz="1400">
+                <a:solidFill>
+                  <a:srgbClr val="8892B0"/>
+                </a:solidFill>
+              </a:defRPr>
+            </a:pPr>
+            <a:r>
+              <a:t>Pre-compiled INT4/INT8 models for QNN EP</a:t>
+            </a:r>
+          </a:p>
+        </p:txBody>
+      </p:sp>
+      <p:sp>
+        <p:nvSpPr>
+          <p:cNvPr id="7" name="Rounded Rectangle 6"/>
           <p:cNvSpPr/>
           <p:nvPr/>
         </p:nvSpPr>
         <p:spPr>
           <a:xfrm>
-            <a:off x="731520" y="3840480"/>
-            <a:ext cx="5120640" cy="2194560"/>
+            <a:off x="6217920" y="1828800"/>
+            <a:ext cx="2560320" cy="3657600"/>
           </a:xfrm>
           <a:prstGeom prst="roundRect">
             <a:avLst/>
           </a:prstGeom>
           <a:solidFill>
-            <a:srgbClr val="161E2E"/>
+            <a:srgbClr val="1A2744"/>
           </a:solidFill>
-          <a:ln w="12700">
+          <a:ln w="19050">
             <a:solidFill>
-              <a:srgbClr val="28354C"/>
+              <a:srgbClr val="00D4FF"/>
             </a:solidFill>
           </a:ln>
         </p:spPr>
@@ -4758,81 +4509,60 @@
           </a:fontRef>
         </p:style>
         <p:txBody>
-          <a:bodyPr rtlCol="0" anchor="ctr"/>
-          <a:lstStyle/>
-          <a:p>
-            <a:pPr algn="ctr"/>
-          </a:p>
-        </p:txBody>
-      </p:sp>
-      <p:sp>
-        <p:nvSpPr>
-          <p:cNvPr id="10" name="TextBox 9"/>
-          <p:cNvSpPr txBox="1"/>
-          <p:nvPr/>
-        </p:nvSpPr>
-        <p:spPr>
-          <a:xfrm>
-            <a:off x="1005840" y="4023360"/>
-            <a:ext cx="4572000" cy="1828800"/>
-          </a:xfrm>
-          <a:prstGeom prst="rect">
-            <a:avLst/>
-          </a:prstGeom>
-          <a:noFill/>
-        </p:spPr>
-        <p:txBody>
-          <a:bodyPr wrap="square">
-            <a:spAutoFit/>
-          </a:bodyPr>
-          <a:lstStyle/>
+          <a:bodyPr rtlCol="0" anchor="ctr" wrap="square"/>
+          <a:lstStyle/>
+          <a:p>
+            <a:pPr algn="l">
+              <a:spcAft>
+                <a:spcPts val="1000"/>
+              </a:spcAft>
+              <a:defRPr b="1" sz="2000">
+                <a:solidFill>
+                  <a:srgbClr val="FFFFFF"/>
+                </a:solidFill>
+              </a:defRPr>
+            </a:pPr>
+            <a:r>
+              <a:t>✅ True Air-Gapped Privacy Guard</a:t>
+            </a:r>
+          </a:p>
           <a:p>
             <a:pPr>
-              <a:defRPr sz="1600" b="1">
-                <a:solidFill>
-                  <a:srgbClr val="06B6D4"/>
-                </a:solidFill>
-              </a:defRPr>
-            </a:pPr>
-            <a:r>
-              <a:t>✅  True Air-Gapped Privacy Guard</a:t>
-            </a:r>
-          </a:p>
-          <a:p>
-            <a:br/>
-            <a:pPr>
-              <a:defRPr sz="1200">
-                <a:solidFill>
-                  <a:srgbClr val="94A3B8"/>
-                </a:solidFill>
-              </a:defRPr>
-            </a:pPr>
-            <a:r>
-              <a:t>Zero bytes leave the HP OmniBook. Built-in Privacy Shield scrubs PII and alerts users before confidential data appears on screen.</a:t>
-            </a:r>
-          </a:p>
-        </p:txBody>
-      </p:sp>
-      <p:sp>
-        <p:nvSpPr>
-          <p:cNvPr id="11" name="Rounded Rectangle 10"/>
+              <a:spcAft>
+                <a:spcPts val="500"/>
+              </a:spcAft>
+              <a:defRPr sz="1400">
+                <a:solidFill>
+                  <a:srgbClr val="8892B0"/>
+                </a:solidFill>
+              </a:defRPr>
+            </a:pPr>
+            <a:r>
+              <a:t>Zero bytes leave device, PII scrubbing</a:t>
+            </a:r>
+          </a:p>
+        </p:txBody>
+      </p:sp>
+      <p:sp>
+        <p:nvSpPr>
+          <p:cNvPr id="8" name="Rounded Rectangle 7"/>
           <p:cNvSpPr/>
           <p:nvPr/>
         </p:nvSpPr>
         <p:spPr>
           <a:xfrm>
-            <a:off x="6126480" y="3840480"/>
-            <a:ext cx="5120640" cy="2194560"/>
+            <a:off x="9052560" y="1828800"/>
+            <a:ext cx="2560320" cy="3657600"/>
           </a:xfrm>
           <a:prstGeom prst="roundRect">
             <a:avLst/>
           </a:prstGeom>
           <a:solidFill>
-            <a:srgbClr val="161E2E"/>
+            <a:srgbClr val="1A2744"/>
           </a:solidFill>
-          <a:ln w="12700">
+          <a:ln w="19050">
             <a:solidFill>
-              <a:srgbClr val="28354C"/>
+              <a:srgbClr val="00D4FF"/>
             </a:solidFill>
           </a:ln>
         </p:spPr>
@@ -4851,57 +4581,36 @@
           </a:fontRef>
         </p:style>
         <p:txBody>
-          <a:bodyPr rtlCol="0" anchor="ctr"/>
-          <a:lstStyle/>
-          <a:p>
-            <a:pPr algn="ctr"/>
-          </a:p>
-        </p:txBody>
-      </p:sp>
-      <p:sp>
-        <p:nvSpPr>
-          <p:cNvPr id="12" name="TextBox 11"/>
-          <p:cNvSpPr txBox="1"/>
-          <p:nvPr/>
-        </p:nvSpPr>
-        <p:spPr>
-          <a:xfrm>
-            <a:off x="6400800" y="4023360"/>
-            <a:ext cx="4572000" cy="1828800"/>
-          </a:xfrm>
-          <a:prstGeom prst="rect">
-            <a:avLst/>
-          </a:prstGeom>
-          <a:noFill/>
-        </p:spPr>
-        <p:txBody>
-          <a:bodyPr wrap="square">
-            <a:spAutoFit/>
-          </a:bodyPr>
-          <a:lstStyle/>
+          <a:bodyPr rtlCol="0" anchor="ctr" wrap="square"/>
+          <a:lstStyle/>
+          <a:p>
+            <a:pPr algn="l">
+              <a:spcAft>
+                <a:spcPts val="1000"/>
+              </a:spcAft>
+              <a:defRPr b="1" sz="2000">
+                <a:solidFill>
+                  <a:srgbClr val="FFFFFF"/>
+                </a:solidFill>
+              </a:defRPr>
+            </a:pPr>
+            <a:r>
+              <a:t>✅ Ultra-Low 3.8W Thermal Env.</a:t>
+            </a:r>
+          </a:p>
           <a:p>
             <a:pPr>
-              <a:defRPr sz="1600" b="1">
-                <a:solidFill>
-                  <a:srgbClr val="F59E0B"/>
-                </a:solidFill>
-              </a:defRPr>
-            </a:pPr>
-            <a:r>
-              <a:t>✅  Ultra-Low 3.8W Thermal Envelope</a:t>
-            </a:r>
-          </a:p>
-          <a:p>
-            <a:br/>
-            <a:pPr>
-              <a:defRPr sz="1200">
-                <a:solidFill>
-                  <a:srgbClr val="94A3B8"/>
-                </a:solidFill>
-              </a:defRPr>
-            </a:pPr>
-            <a:r>
-              <a:t>Offloading heavy models to the Hexagon NPU enables whisper-quiet acoustics and extends HP OmniBook AI runtime to 22.5 hours.</a:t>
+              <a:spcAft>
+                <a:spcPts val="500"/>
+              </a:spcAft>
+              <a:defRPr sz="1400">
+                <a:solidFill>
+                  <a:srgbClr val="8892B0"/>
+                </a:solidFill>
+              </a:defRPr>
+            </a:pPr>
+            <a:r>
+              <a:t>22.5hr battery, whisper-quiet</a:t>
             </a:r>
           </a:p>
         </p:txBody>
@@ -4939,10 +4648,12 @@
             <a:avLst/>
           </a:prstGeom>
           <a:solidFill>
-            <a:srgbClr val="0B0F19"/>
+            <a:srgbClr val="080C18"/>
           </a:solidFill>
           <a:ln>
-            <a:noFill/>
+            <a:solidFill>
+              <a:srgbClr val="080C18"/>
+            </a:solidFill>
           </a:ln>
         </p:spPr>
         <p:style>
@@ -4975,8 +4686,8 @@
         </p:nvSpPr>
         <p:spPr>
           <a:xfrm>
-            <a:off x="731520" y="365760"/>
-            <a:ext cx="10058400" cy="320040"/>
+            <a:off x="457200" y="6400800"/>
+            <a:ext cx="11277295" cy="365760"/>
           </a:xfrm>
           <a:prstGeom prst="rect">
             <a:avLst/>
@@ -4984,20 +4695,20 @@
           <a:noFill/>
         </p:spPr>
         <p:txBody>
-          <a:bodyPr wrap="square">
+          <a:bodyPr wrap="none">
             <a:spAutoFit/>
           </a:bodyPr>
           <a:lstStyle/>
           <a:p>
-            <a:pPr>
-              <a:defRPr sz="1000" b="1">
-                <a:solidFill>
-                  <a:srgbClr val="FF4B4B"/>
-                </a:solidFill>
-              </a:defRPr>
-            </a:pPr>
-            <a:r>
-              <a:t>SNAPDRAGON® AI LAB BUILD &amp; PRESENT CHALLENGE</a:t>
+            <a:pPr algn="ctr">
+              <a:defRPr sz="1000">
+                <a:solidFill>
+                  <a:srgbClr val="8892B0"/>
+                </a:solidFill>
+              </a:defRPr>
+            </a:pPr>
+            <a:r>
+              <a:t>Qualcomm Snapdragon® AI Lab Build &amp; Present Challenge • Solution Submission • September 2026</a:t>
             </a:r>
           </a:p>
         </p:txBody>
@@ -5010,8 +4721,8 @@
         </p:nvSpPr>
         <p:spPr>
           <a:xfrm>
-            <a:off x="731520" y="640080"/>
-            <a:ext cx="10515600" cy="548640"/>
+            <a:off x="548640" y="365760"/>
+            <a:ext cx="11094415" cy="914400"/>
           </a:xfrm>
           <a:prstGeom prst="rect">
             <a:avLst/>
@@ -5019,15 +4730,15 @@
           <a:noFill/>
         </p:spPr>
         <p:txBody>
-          <a:bodyPr wrap="square">
+          <a:bodyPr wrap="none">
             <a:spAutoFit/>
           </a:bodyPr>
           <a:lstStyle/>
           <a:p>
             <a:pPr>
-              <a:defRPr sz="2200" b="1">
-                <a:solidFill>
-                  <a:srgbClr val="F8FAFC"/>
+              <a:defRPr b="1" sz="3600">
+                <a:solidFill>
+                  <a:srgbClr val="00D4FF"/>
                 </a:solidFill>
               </a:defRPr>
             </a:pPr>
@@ -5045,18 +4756,18 @@
         </p:nvSpPr>
         <p:spPr>
           <a:xfrm>
-            <a:off x="731520" y="1371600"/>
-            <a:ext cx="2560320" cy="4114800"/>
+            <a:off x="548640" y="1645920"/>
+            <a:ext cx="2560320" cy="3200400"/>
           </a:xfrm>
           <a:prstGeom prst="roundRect">
             <a:avLst/>
           </a:prstGeom>
           <a:solidFill>
-            <a:srgbClr val="161E2E"/>
+            <a:srgbClr val="1A2744"/>
           </a:solidFill>
-          <a:ln w="12700">
+          <a:ln w="19050">
             <a:solidFill>
-              <a:srgbClr val="28354C"/>
+              <a:srgbClr val="00D4FF"/>
             </a:solidFill>
           </a:ln>
         </p:spPr>
@@ -5075,112 +4786,105 @@
           </a:fontRef>
         </p:style>
         <p:txBody>
-          <a:bodyPr rtlCol="0" anchor="ctr"/>
-          <a:lstStyle/>
-          <a:p>
-            <a:pPr algn="ctr"/>
-          </a:p>
-        </p:txBody>
-      </p:sp>
-      <p:sp>
-        <p:nvSpPr>
-          <p:cNvPr id="6" name="TextBox 5"/>
-          <p:cNvSpPr txBox="1"/>
-          <p:nvPr/>
-        </p:nvSpPr>
-        <p:spPr>
-          <a:xfrm>
-            <a:off x="868680" y="1554480"/>
-            <a:ext cx="2286000" cy="3749039"/>
-          </a:xfrm>
-          <a:prstGeom prst="rect">
-            <a:avLst/>
-          </a:prstGeom>
-          <a:noFill/>
-        </p:spPr>
-        <p:txBody>
-          <a:bodyPr wrap="square">
-            <a:spAutoFit/>
-          </a:bodyPr>
-          <a:lstStyle/>
+          <a:bodyPr rtlCol="0" anchor="ctr" wrap="square"/>
+          <a:lstStyle/>
+          <a:p>
+            <a:pPr algn="l">
+              <a:spcAft>
+                <a:spcPts val="1000"/>
+              </a:spcAft>
+              <a:defRPr b="1" sz="2000">
+                <a:solidFill>
+                  <a:srgbClr val="FFFFFF"/>
+                </a:solidFill>
+              </a:defRPr>
+            </a:pPr>
+            <a:r>
+              <a:t>Whisper-Base ASR</a:t>
+            </a:r>
+          </a:p>
           <a:p>
             <a:pPr>
-              <a:defRPr sz="1500" b="1">
-                <a:solidFill>
-                  <a:srgbClr val="10B981"/>
-                </a:solidFill>
-              </a:defRPr>
-            </a:pPr>
-            <a:r>
-              <a:t>Whisper-Base ASR</a:t>
-            </a:r>
-          </a:p>
-          <a:p>
-            <a:br/>
+              <a:spcAft>
+                <a:spcPts val="500"/>
+              </a:spcAft>
+              <a:defRPr sz="1400">
+                <a:solidFill>
+                  <a:srgbClr val="8892B0"/>
+                </a:solidFill>
+              </a:defRPr>
+            </a:pPr>
+            <a:r>
+              <a:t>Source: Qualcomm AI Hub</a:t>
+            </a:r>
+          </a:p>
+          <a:p>
             <a:pPr>
-              <a:defRPr sz="1100">
-                <a:solidFill>
-                  <a:srgbClr val="94A3B8"/>
-                </a:solidFill>
-              </a:defRPr>
-            </a:pPr>
-            <a:r>
-              <a:t>Source:</a:t>
-            </a:r>
-            <a:br/>
-            <a:r>
-              <a:t>Qualcomm AI Hub: openai_whisper_base</a:t>
-            </a:r>
-            <a:br/>
-            <a:br/>
-            <a:r>
-              <a:t>Quantization:</a:t>
-            </a:r>
-            <a:br/>
-            <a:r>
-              <a:t>W8A16 QNN HTP</a:t>
-            </a:r>
-            <a:br/>
-            <a:br/>
-            <a:r>
-              <a:t>Role:</a:t>
-            </a:r>
-            <a:br/>
-            <a:r>
-              <a:t>Real-time speech transcribe &amp; meeting diarization</a:t>
-            </a:r>
-            <a:br/>
-            <a:br/>
-            <a:r>
-              <a:t>Hexagon Latency:</a:t>
-            </a:r>
-            <a:br/>
-            <a:r>
-              <a:t>11.8 ms</a:t>
-            </a:r>
-          </a:p>
-        </p:txBody>
-      </p:sp>
-      <p:sp>
-        <p:nvSpPr>
-          <p:cNvPr id="7" name="Rounded Rectangle 6"/>
+              <a:spcAft>
+                <a:spcPts val="500"/>
+              </a:spcAft>
+              <a:defRPr sz="1400">
+                <a:solidFill>
+                  <a:srgbClr val="8892B0"/>
+                </a:solidFill>
+              </a:defRPr>
+            </a:pPr>
+            <a:r>
+              <a:t>Quant: W8A16 QNN HTP</a:t>
+            </a:r>
+          </a:p>
+          <a:p>
+            <a:pPr>
+              <a:spcAft>
+                <a:spcPts val="500"/>
+              </a:spcAft>
+              <a:defRPr sz="1400">
+                <a:solidFill>
+                  <a:srgbClr val="8892B0"/>
+                </a:solidFill>
+              </a:defRPr>
+            </a:pPr>
+            <a:r>
+              <a:t>Role: Real-time ASR &amp; meeting diarization</a:t>
+            </a:r>
+          </a:p>
+          <a:p>
+            <a:pPr>
+              <a:spcAft>
+                <a:spcPts val="500"/>
+              </a:spcAft>
+              <a:defRPr sz="1400">
+                <a:solidFill>
+                  <a:srgbClr val="8892B0"/>
+                </a:solidFill>
+              </a:defRPr>
+            </a:pPr>
+            <a:r>
+              <a:t>Latency: 11.8 ms</a:t>
+            </a:r>
+          </a:p>
+        </p:txBody>
+      </p:sp>
+      <p:sp>
+        <p:nvSpPr>
+          <p:cNvPr id="6" name="Rounded Rectangle 5"/>
           <p:cNvSpPr/>
           <p:nvPr/>
         </p:nvSpPr>
         <p:spPr>
           <a:xfrm>
-            <a:off x="3429000" y="1371600"/>
-            <a:ext cx="2560320" cy="4114800"/>
+            <a:off x="3383280" y="1645920"/>
+            <a:ext cx="2560320" cy="3200400"/>
           </a:xfrm>
           <a:prstGeom prst="roundRect">
             <a:avLst/>
           </a:prstGeom>
           <a:solidFill>
-            <a:srgbClr val="161E2E"/>
+            <a:srgbClr val="1A2744"/>
           </a:solidFill>
-          <a:ln w="12700">
+          <a:ln w="19050">
             <a:solidFill>
-              <a:srgbClr val="28354C"/>
+              <a:srgbClr val="00D4FF"/>
             </a:solidFill>
           </a:ln>
         </p:spPr>
@@ -5199,112 +4903,105 @@
           </a:fontRef>
         </p:style>
         <p:txBody>
-          <a:bodyPr rtlCol="0" anchor="ctr"/>
-          <a:lstStyle/>
-          <a:p>
-            <a:pPr algn="ctr"/>
-          </a:p>
-        </p:txBody>
-      </p:sp>
-      <p:sp>
-        <p:nvSpPr>
-          <p:cNvPr id="8" name="TextBox 7"/>
-          <p:cNvSpPr txBox="1"/>
-          <p:nvPr/>
-        </p:nvSpPr>
-        <p:spPr>
-          <a:xfrm>
-            <a:off x="3566160" y="1554480"/>
-            <a:ext cx="2286000" cy="3749039"/>
-          </a:xfrm>
-          <a:prstGeom prst="rect">
-            <a:avLst/>
-          </a:prstGeom>
-          <a:noFill/>
-        </p:spPr>
-        <p:txBody>
-          <a:bodyPr wrap="square">
-            <a:spAutoFit/>
-          </a:bodyPr>
-          <a:lstStyle/>
+          <a:bodyPr rtlCol="0" anchor="ctr" wrap="square"/>
+          <a:lstStyle/>
+          <a:p>
+            <a:pPr algn="l">
+              <a:spcAft>
+                <a:spcPts val="1000"/>
+              </a:spcAft>
+              <a:defRPr b="1" sz="2000">
+                <a:solidFill>
+                  <a:srgbClr val="FFFFFF"/>
+                </a:solidFill>
+              </a:defRPr>
+            </a:pPr>
+            <a:r>
+              <a:t>Llama-3.2-3B Instruct</a:t>
+            </a:r>
+          </a:p>
           <a:p>
             <a:pPr>
-              <a:defRPr sz="1500" b="1">
-                <a:solidFill>
-                  <a:srgbClr val="FF4B4B"/>
-                </a:solidFill>
-              </a:defRPr>
-            </a:pPr>
-            <a:r>
-              <a:t>Llama-3.2-3B Instruct</a:t>
-            </a:r>
-          </a:p>
-          <a:p>
-            <a:br/>
+              <a:spcAft>
+                <a:spcPts val="500"/>
+              </a:spcAft>
+              <a:defRPr sz="1400">
+                <a:solidFill>
+                  <a:srgbClr val="8892B0"/>
+                </a:solidFill>
+              </a:defRPr>
+            </a:pPr>
+            <a:r>
+              <a:t>Source: Qualcomm AI Hub</a:t>
+            </a:r>
+          </a:p>
+          <a:p>
             <a:pPr>
-              <a:defRPr sz="1100">
-                <a:solidFill>
-                  <a:srgbClr val="94A3B8"/>
-                </a:solidFill>
-              </a:defRPr>
-            </a:pPr>
-            <a:r>
-              <a:t>Source:</a:t>
-            </a:r>
-            <a:br/>
-            <a:r>
-              <a:t>Qualcomm AI Hub: meta_llama3_2_3b</a:t>
-            </a:r>
-            <a:br/>
-            <a:br/>
-            <a:r>
-              <a:t>Quantization:</a:t>
-            </a:r>
-            <a:br/>
-            <a:r>
-              <a:t>W4A16 QNN HTP</a:t>
-            </a:r>
-            <a:br/>
-            <a:br/>
-            <a:r>
-              <a:t>Role:</a:t>
-            </a:r>
-            <a:br/>
-            <a:r>
-              <a:t>Autonomous reasoning, summaries &amp; task execution</a:t>
-            </a:r>
-            <a:br/>
-            <a:br/>
-            <a:r>
-              <a:t>Hexagon Latency:</a:t>
-            </a:r>
-            <a:br/>
-            <a:r>
-              <a:t>28.5 ms</a:t>
-            </a:r>
-          </a:p>
-        </p:txBody>
-      </p:sp>
-      <p:sp>
-        <p:nvSpPr>
-          <p:cNvPr id="9" name="Rounded Rectangle 8"/>
+              <a:spcAft>
+                <a:spcPts val="500"/>
+              </a:spcAft>
+              <a:defRPr sz="1400">
+                <a:solidFill>
+                  <a:srgbClr val="8892B0"/>
+                </a:solidFill>
+              </a:defRPr>
+            </a:pPr>
+            <a:r>
+              <a:t>Quant: W4A16 QNN HTP</a:t>
+            </a:r>
+          </a:p>
+          <a:p>
+            <a:pPr>
+              <a:spcAft>
+                <a:spcPts val="500"/>
+              </a:spcAft>
+              <a:defRPr sz="1400">
+                <a:solidFill>
+                  <a:srgbClr val="8892B0"/>
+                </a:solidFill>
+              </a:defRPr>
+            </a:pPr>
+            <a:r>
+              <a:t>Role: Autonomous reasoning &amp; task execution</a:t>
+            </a:r>
+          </a:p>
+          <a:p>
+            <a:pPr>
+              <a:spcAft>
+                <a:spcPts val="500"/>
+              </a:spcAft>
+              <a:defRPr sz="1400">
+                <a:solidFill>
+                  <a:srgbClr val="8892B0"/>
+                </a:solidFill>
+              </a:defRPr>
+            </a:pPr>
+            <a:r>
+              <a:t>Latency: 28.5 ms</a:t>
+            </a:r>
+          </a:p>
+        </p:txBody>
+      </p:sp>
+      <p:sp>
+        <p:nvSpPr>
+          <p:cNvPr id="7" name="Rounded Rectangle 6"/>
           <p:cNvSpPr/>
           <p:nvPr/>
         </p:nvSpPr>
         <p:spPr>
           <a:xfrm>
-            <a:off x="6126480" y="1371600"/>
-            <a:ext cx="2560320" cy="4114800"/>
+            <a:off x="6217920" y="1645920"/>
+            <a:ext cx="2560320" cy="3200400"/>
           </a:xfrm>
           <a:prstGeom prst="roundRect">
             <a:avLst/>
           </a:prstGeom>
           <a:solidFill>
-            <a:srgbClr val="161E2E"/>
+            <a:srgbClr val="1A2744"/>
           </a:solidFill>
-          <a:ln w="12700">
+          <a:ln w="19050">
             <a:solidFill>
-              <a:srgbClr val="28354C"/>
+              <a:srgbClr val="00D4FF"/>
             </a:solidFill>
           </a:ln>
         </p:spPr>
@@ -5323,112 +5020,105 @@
           </a:fontRef>
         </p:style>
         <p:txBody>
-          <a:bodyPr rtlCol="0" anchor="ctr"/>
-          <a:lstStyle/>
-          <a:p>
-            <a:pPr algn="ctr"/>
-          </a:p>
-        </p:txBody>
-      </p:sp>
-      <p:sp>
-        <p:nvSpPr>
-          <p:cNvPr id="10" name="TextBox 9"/>
-          <p:cNvSpPr txBox="1"/>
-          <p:nvPr/>
-        </p:nvSpPr>
-        <p:spPr>
-          <a:xfrm>
-            <a:off x="6263640" y="1554480"/>
-            <a:ext cx="2286000" cy="3749039"/>
-          </a:xfrm>
-          <a:prstGeom prst="rect">
-            <a:avLst/>
-          </a:prstGeom>
-          <a:noFill/>
-        </p:spPr>
-        <p:txBody>
-          <a:bodyPr wrap="square">
-            <a:spAutoFit/>
-          </a:bodyPr>
-          <a:lstStyle/>
+          <a:bodyPr rtlCol="0" anchor="ctr" wrap="square"/>
+          <a:lstStyle/>
+          <a:p>
+            <a:pPr algn="l">
+              <a:spcAft>
+                <a:spcPts val="1000"/>
+              </a:spcAft>
+              <a:defRPr b="1" sz="2000">
+                <a:solidFill>
+                  <a:srgbClr val="FFFFFF"/>
+                </a:solidFill>
+              </a:defRPr>
+            </a:pPr>
+            <a:r>
+              <a:t>YOLOv11-Nano Vision</a:t>
+            </a:r>
+          </a:p>
           <a:p>
             <a:pPr>
-              <a:defRPr sz="1500" b="1">
-                <a:solidFill>
-                  <a:srgbClr val="06B6D4"/>
-                </a:solidFill>
-              </a:defRPr>
-            </a:pPr>
-            <a:r>
-              <a:t>YOLOv11-Nano Vision</a:t>
-            </a:r>
-          </a:p>
-          <a:p>
-            <a:br/>
+              <a:spcAft>
+                <a:spcPts val="500"/>
+              </a:spcAft>
+              <a:defRPr sz="1400">
+                <a:solidFill>
+                  <a:srgbClr val="8892B0"/>
+                </a:solidFill>
+              </a:defRPr>
+            </a:pPr>
+            <a:r>
+              <a:t>Source: Qualcomm AI Hub</a:t>
+            </a:r>
+          </a:p>
+          <a:p>
             <a:pPr>
-              <a:defRPr sz="1100">
-                <a:solidFill>
-                  <a:srgbClr val="94A3B8"/>
-                </a:solidFill>
-              </a:defRPr>
-            </a:pPr>
-            <a:r>
-              <a:t>Source:</a:t>
-            </a:r>
-            <a:br/>
-            <a:r>
-              <a:t>Qualcomm AI Hub: yolov11_nano_detect</a:t>
-            </a:r>
-            <a:br/>
-            <a:br/>
-            <a:r>
-              <a:t>Quantization:</a:t>
-            </a:r>
-            <a:br/>
-            <a:r>
-              <a:t>W8A8 QNN HTP</a:t>
-            </a:r>
-            <a:br/>
-            <a:br/>
-            <a:r>
-              <a:t>Role:</a:t>
-            </a:r>
-            <a:br/>
-            <a:r>
-              <a:t>Display window analysis &amp; confidential stamp detection</a:t>
-            </a:r>
-            <a:br/>
-            <a:br/>
-            <a:r>
-              <a:t>Hexagon Latency:</a:t>
-            </a:r>
-            <a:br/>
-            <a:r>
-              <a:t>4.2 ms (238 FPS)</a:t>
-            </a:r>
-          </a:p>
-        </p:txBody>
-      </p:sp>
-      <p:sp>
-        <p:nvSpPr>
-          <p:cNvPr id="11" name="Rounded Rectangle 10"/>
+              <a:spcAft>
+                <a:spcPts val="500"/>
+              </a:spcAft>
+              <a:defRPr sz="1400">
+                <a:solidFill>
+                  <a:srgbClr val="8892B0"/>
+                </a:solidFill>
+              </a:defRPr>
+            </a:pPr>
+            <a:r>
+              <a:t>Quant: W8A8 QNN HTP</a:t>
+            </a:r>
+          </a:p>
+          <a:p>
+            <a:pPr>
+              <a:spcAft>
+                <a:spcPts val="500"/>
+              </a:spcAft>
+              <a:defRPr sz="1400">
+                <a:solidFill>
+                  <a:srgbClr val="8892B0"/>
+                </a:solidFill>
+              </a:defRPr>
+            </a:pPr>
+            <a:r>
+              <a:t>Role: Screen analysis &amp; confidential detection</a:t>
+            </a:r>
+          </a:p>
+          <a:p>
+            <a:pPr>
+              <a:spcAft>
+                <a:spcPts val="500"/>
+              </a:spcAft>
+              <a:defRPr sz="1400">
+                <a:solidFill>
+                  <a:srgbClr val="8892B0"/>
+                </a:solidFill>
+              </a:defRPr>
+            </a:pPr>
+            <a:r>
+              <a:t>Latency: 4.2 ms (238 FPS)</a:t>
+            </a:r>
+          </a:p>
+        </p:txBody>
+      </p:sp>
+      <p:sp>
+        <p:nvSpPr>
+          <p:cNvPr id="8" name="Rounded Rectangle 7"/>
           <p:cNvSpPr/>
           <p:nvPr/>
         </p:nvSpPr>
         <p:spPr>
           <a:xfrm>
-            <a:off x="8823960" y="1371600"/>
-            <a:ext cx="2560320" cy="4114800"/>
+            <a:off x="9052560" y="1645920"/>
+            <a:ext cx="2560320" cy="3200400"/>
           </a:xfrm>
           <a:prstGeom prst="roundRect">
             <a:avLst/>
           </a:prstGeom>
           <a:solidFill>
-            <a:srgbClr val="161E2E"/>
+            <a:srgbClr val="1A2744"/>
           </a:solidFill>
-          <a:ln w="12700">
+          <a:ln w="19050">
             <a:solidFill>
-              <a:srgbClr val="28354C"/>
+              <a:srgbClr val="00D4FF"/>
             </a:solidFill>
           </a:ln>
         </p:spPr>
@@ -5447,23 +5137,95 @@
           </a:fontRef>
         </p:style>
         <p:txBody>
-          <a:bodyPr rtlCol="0" anchor="ctr"/>
-          <a:lstStyle/>
-          <a:p>
-            <a:pPr algn="ctr"/>
-          </a:p>
-        </p:txBody>
-      </p:sp>
-      <p:sp>
-        <p:nvSpPr>
-          <p:cNvPr id="12" name="TextBox 11"/>
+          <a:bodyPr rtlCol="0" anchor="ctr" wrap="square"/>
+          <a:lstStyle/>
+          <a:p>
+            <a:pPr algn="l">
+              <a:spcAft>
+                <a:spcPts val="1000"/>
+              </a:spcAft>
+              <a:defRPr b="1" sz="2000">
+                <a:solidFill>
+                  <a:srgbClr val="FFFFFF"/>
+                </a:solidFill>
+              </a:defRPr>
+            </a:pPr>
+            <a:r>
+              <a:t>all-MiniLM-L6-v2 RAG</a:t>
+            </a:r>
+          </a:p>
+          <a:p>
+            <a:pPr>
+              <a:spcAft>
+                <a:spcPts val="500"/>
+              </a:spcAft>
+              <a:defRPr sz="1400">
+                <a:solidFill>
+                  <a:srgbClr val="8892B0"/>
+                </a:solidFill>
+              </a:defRPr>
+            </a:pPr>
+            <a:r>
+              <a:t>Source: Qualcomm AI Hub</a:t>
+            </a:r>
+          </a:p>
+          <a:p>
+            <a:pPr>
+              <a:spcAft>
+                <a:spcPts val="500"/>
+              </a:spcAft>
+              <a:defRPr sz="1400">
+                <a:solidFill>
+                  <a:srgbClr val="8892B0"/>
+                </a:solidFill>
+              </a:defRPr>
+            </a:pPr>
+            <a:r>
+              <a:t>Quant: W8A16 ONNX</a:t>
+            </a:r>
+          </a:p>
+          <a:p>
+            <a:pPr>
+              <a:spcAft>
+                <a:spcPts val="500"/>
+              </a:spcAft>
+              <a:defRPr sz="1400">
+                <a:solidFill>
+                  <a:srgbClr val="8892B0"/>
+                </a:solidFill>
+              </a:defRPr>
+            </a:pPr>
+            <a:r>
+              <a:t>Role: Air-gapped semantic search &amp; RAG</a:t>
+            </a:r>
+          </a:p>
+          <a:p>
+            <a:pPr>
+              <a:spcAft>
+                <a:spcPts val="500"/>
+              </a:spcAft>
+              <a:defRPr sz="1400">
+                <a:solidFill>
+                  <a:srgbClr val="8892B0"/>
+                </a:solidFill>
+              </a:defRPr>
+            </a:pPr>
+            <a:r>
+              <a:t>Latency: 6.2 ms</a:t>
+            </a:r>
+          </a:p>
+        </p:txBody>
+      </p:sp>
+      <p:sp>
+        <p:nvSpPr>
+          <p:cNvPr id="9" name="TextBox 8"/>
           <p:cNvSpPr txBox="1"/>
           <p:nvPr/>
         </p:nvSpPr>
         <p:spPr>
           <a:xfrm>
-            <a:off x="8961120" y="1554480"/>
-            <a:ext cx="2286000" cy="3749039"/>
+            <a:off x="548640" y="5303520"/>
+            <a:ext cx="11094415" cy="731520"/>
           </a:xfrm>
           <a:prstGeom prst="rect">
             <a:avLst/>
@@ -5471,144 +5233,20 @@
           <a:noFill/>
         </p:spPr>
         <p:txBody>
-          <a:bodyPr wrap="square">
-            <a:spAutoFit/>
-          </a:bodyPr>
-          <a:lstStyle/>
-          <a:p>
-            <a:pPr>
-              <a:defRPr sz="1500" b="1">
-                <a:solidFill>
-                  <a:srgbClr val="F59E0B"/>
-                </a:solidFill>
-              </a:defRPr>
-            </a:pPr>
-            <a:r>
-              <a:t>all-MiniLM-L6-v2 RAG</a:t>
-            </a:r>
-          </a:p>
-          <a:p>
-            <a:br/>
-            <a:pPr>
-              <a:defRPr sz="1100">
-                <a:solidFill>
-                  <a:srgbClr val="94A3B8"/>
-                </a:solidFill>
-              </a:defRPr>
-            </a:pPr>
-            <a:r>
-              <a:t>Source:</a:t>
-            </a:r>
-            <a:br/>
-            <a:r>
-              <a:t>Qualcomm AI Hub: sentence_transformers</a:t>
-            </a:r>
-            <a:br/>
-            <a:br/>
-            <a:r>
-              <a:t>Quantization:</a:t>
-            </a:r>
-            <a:br/>
-            <a:r>
-              <a:t>W8A16 ONNX</a:t>
-            </a:r>
-            <a:br/>
-            <a:br/>
-            <a:r>
-              <a:t>Role:</a:t>
-            </a:r>
-            <a:br/>
-            <a:r>
-              <a:t>Air-gapped semantic document indexing &amp; retrieval</a:t>
-            </a:r>
-            <a:br/>
-            <a:br/>
-            <a:r>
-              <a:t>Hexagon Latency:</a:t>
-            </a:r>
-            <a:br/>
-            <a:r>
-              <a:t>6.2 ms</a:t>
-            </a:r>
-          </a:p>
-        </p:txBody>
-      </p:sp>
-      <p:sp>
-        <p:nvSpPr>
-          <p:cNvPr id="13" name="Rounded Rectangle 12"/>
-          <p:cNvSpPr/>
-          <p:nvPr/>
-        </p:nvSpPr>
-        <p:spPr>
-          <a:xfrm>
-            <a:off x="731520" y="5669280"/>
-            <a:ext cx="10728655" cy="731520"/>
-          </a:xfrm>
-          <a:prstGeom prst="roundRect">
-            <a:avLst/>
-          </a:prstGeom>
-          <a:solidFill>
-            <a:srgbClr val="161E2E"/>
-          </a:solidFill>
-          <a:ln w="12700">
-            <a:solidFill>
-              <a:srgbClr val="E60012"/>
-            </a:solidFill>
-          </a:ln>
-        </p:spPr>
-        <p:style>
-          <a:lnRef idx="1">
-            <a:schemeClr val="accent1"/>
-          </a:lnRef>
-          <a:fillRef idx="3">
-            <a:schemeClr val="accent1"/>
-          </a:fillRef>
-          <a:effectRef idx="2">
-            <a:schemeClr val="accent1"/>
-          </a:effectRef>
-          <a:fontRef idx="minor">
-            <a:schemeClr val="lt1"/>
-          </a:fontRef>
-        </p:style>
-        <p:txBody>
-          <a:bodyPr rtlCol="0" anchor="ctr"/>
-          <a:lstStyle/>
-          <a:p>
-            <a:pPr algn="ctr"/>
-          </a:p>
-        </p:txBody>
-      </p:sp>
-      <p:sp>
-        <p:nvSpPr>
-          <p:cNvPr id="14" name="TextBox 13"/>
-          <p:cNvSpPr txBox="1"/>
-          <p:nvPr/>
-        </p:nvSpPr>
-        <p:spPr>
-          <a:xfrm>
-            <a:off x="914400" y="5760720"/>
-            <a:ext cx="10332720" cy="548640"/>
-          </a:xfrm>
-          <a:prstGeom prst="rect">
-            <a:avLst/>
-          </a:prstGeom>
-          <a:noFill/>
-        </p:spPr>
-        <p:txBody>
           <a:bodyPr wrap="none">
             <a:spAutoFit/>
           </a:bodyPr>
           <a:lstStyle/>
           <a:p>
-            <a:pPr>
-              <a:defRPr sz="1200" b="1">
-                <a:solidFill>
-                  <a:srgbClr val="F8FAFC"/>
-                </a:solidFill>
-              </a:defRPr>
-            </a:pPr>
-            <a:r>
-              <a:t>Execution Pipeline: Qualcomm Neural Network (QNN) HTP Backend  ➔  ONNX Runtime QNNExecutionProvider  ➔  Hexagon 45 TOPS NPU</a:t>
+            <a:pPr algn="ctr">
+              <a:defRPr b="1" sz="2000">
+                <a:solidFill>
+                  <a:srgbClr val="00D4FF"/>
+                </a:solidFill>
+              </a:defRPr>
+            </a:pPr>
+            <a:r>
+              <a:t>Pipeline: QNN HTP Backend → ONNX Runtime QNNExecutionProvider → Hexagon 45 TOPS NPU</a:t>
             </a:r>
           </a:p>
         </p:txBody>
@@ -5646,10 +5284,12 @@
             <a:avLst/>
           </a:prstGeom>
           <a:solidFill>
-            <a:srgbClr val="0B0F19"/>
+            <a:srgbClr val="080C18"/>
           </a:solidFill>
           <a:ln>
-            <a:noFill/>
+            <a:solidFill>
+              <a:srgbClr val="080C18"/>
+            </a:solidFill>
           </a:ln>
         </p:spPr>
         <p:style>
@@ -5682,8 +5322,8 @@
         </p:nvSpPr>
         <p:spPr>
           <a:xfrm>
-            <a:off x="731520" y="365760"/>
-            <a:ext cx="10058400" cy="320040"/>
+            <a:off x="457200" y="6400800"/>
+            <a:ext cx="11277295" cy="365760"/>
           </a:xfrm>
           <a:prstGeom prst="rect">
             <a:avLst/>
@@ -5691,20 +5331,20 @@
           <a:noFill/>
         </p:spPr>
         <p:txBody>
-          <a:bodyPr wrap="square">
+          <a:bodyPr wrap="none">
             <a:spAutoFit/>
           </a:bodyPr>
           <a:lstStyle/>
           <a:p>
-            <a:pPr>
-              <a:defRPr sz="1000" b="1">
-                <a:solidFill>
-                  <a:srgbClr val="FF4B4B"/>
-                </a:solidFill>
-              </a:defRPr>
-            </a:pPr>
-            <a:r>
-              <a:t>SNAPDRAGON® AI LAB BUILD &amp; PRESENT CHALLENGE</a:t>
+            <a:pPr algn="ctr">
+              <a:defRPr sz="1000">
+                <a:solidFill>
+                  <a:srgbClr val="8892B0"/>
+                </a:solidFill>
+              </a:defRPr>
+            </a:pPr>
+            <a:r>
+              <a:t>Qualcomm Snapdragon® AI Lab Build &amp; Present Challenge • Solution Submission • September 2026</a:t>
             </a:r>
           </a:p>
         </p:txBody>
@@ -5717,8 +5357,8 @@
         </p:nvSpPr>
         <p:spPr>
           <a:xfrm>
-            <a:off x="731520" y="640080"/>
-            <a:ext cx="10515600" cy="548640"/>
+            <a:off x="548640" y="365760"/>
+            <a:ext cx="11094415" cy="914400"/>
           </a:xfrm>
           <a:prstGeom prst="rect">
             <a:avLst/>
@@ -5726,15 +5366,15 @@
           <a:noFill/>
         </p:spPr>
         <p:txBody>
-          <a:bodyPr wrap="square">
+          <a:bodyPr wrap="none">
             <a:spAutoFit/>
           </a:bodyPr>
           <a:lstStyle/>
           <a:p>
             <a:pPr>
-              <a:defRPr sz="2200" b="1">
-                <a:solidFill>
-                  <a:srgbClr val="F8FAFC"/>
+              <a:defRPr b="1" sz="3600">
+                <a:solidFill>
+                  <a:srgbClr val="00D4FF"/>
                 </a:solidFill>
               </a:defRPr>
             </a:pPr>
@@ -5752,18 +5392,18 @@
         </p:nvSpPr>
         <p:spPr>
           <a:xfrm>
-            <a:off x="731520" y="1371600"/>
-            <a:ext cx="10728655" cy="1097280"/>
+            <a:off x="548640" y="1828800"/>
+            <a:ext cx="2560320" cy="3657600"/>
           </a:xfrm>
           <a:prstGeom prst="roundRect">
             <a:avLst/>
           </a:prstGeom>
           <a:solidFill>
-            <a:srgbClr val="161E2E"/>
+            <a:srgbClr val="1A2744"/>
           </a:solidFill>
-          <a:ln w="12700">
+          <a:ln w="19050">
             <a:solidFill>
-              <a:srgbClr val="28354C"/>
+              <a:srgbClr val="00D4FF"/>
             </a:solidFill>
           </a:ln>
         </p:spPr>
@@ -5782,80 +5422,75 @@
           </a:fontRef>
         </p:style>
         <p:txBody>
-          <a:bodyPr rtlCol="0" anchor="ctr"/>
-          <a:lstStyle/>
-          <a:p>
-            <a:pPr algn="ctr"/>
-          </a:p>
-        </p:txBody>
-      </p:sp>
-      <p:sp>
-        <p:nvSpPr>
-          <p:cNvPr id="6" name="TextBox 5"/>
-          <p:cNvSpPr txBox="1"/>
-          <p:nvPr/>
-        </p:nvSpPr>
-        <p:spPr>
-          <a:xfrm>
-            <a:off x="1005840" y="1508760"/>
-            <a:ext cx="10149840" cy="822960"/>
-          </a:xfrm>
-          <a:prstGeom prst="rect">
-            <a:avLst/>
-          </a:prstGeom>
-          <a:noFill/>
-        </p:spPr>
-        <p:txBody>
-          <a:bodyPr wrap="square">
-            <a:spAutoFit/>
-          </a:bodyPr>
-          <a:lstStyle/>
+          <a:bodyPr rtlCol="0" anchor="ctr" wrap="square"/>
+          <a:lstStyle/>
+          <a:p>
+            <a:pPr algn="l">
+              <a:spcAft>
+                <a:spcPts val="1000"/>
+              </a:spcAft>
+              <a:defRPr b="1" sz="2000">
+                <a:solidFill>
+                  <a:srgbClr val="FFFFFF"/>
+                </a:solidFill>
+              </a:defRPr>
+            </a:pPr>
+            <a:r>
+              <a:t>🎙️ Real-Time Meeting Scribe</a:t>
+            </a:r>
+          </a:p>
           <a:p>
             <a:pPr>
-              <a:defRPr sz="1500" b="1">
-                <a:solidFill>
-                  <a:srgbClr val="FF4B4B"/>
-                </a:solidFill>
-              </a:defRPr>
-            </a:pPr>
-            <a:r>
-              <a:t>🎙️ Real-Time Meeting Scribe</a:t>
+              <a:spcAft>
+                <a:spcPts val="500"/>
+              </a:spcAft>
+              <a:defRPr sz="1400">
+                <a:solidFill>
+                  <a:srgbClr val="8892B0"/>
+                </a:solidFill>
+              </a:defRPr>
+            </a:pPr>
+            <a:r>
+              <a:t>Whisper on Hexagon NPU</a:t>
             </a:r>
           </a:p>
           <a:p>
             <a:pPr>
-              <a:defRPr sz="1100">
-                <a:solidFill>
-                  <a:srgbClr val="94A3B8"/>
-                </a:solidFill>
-              </a:defRPr>
-            </a:pPr>
-            <a:r>
-              <a:t>Transcribes live microphone audio offline with Whisper-Base on Hexagon NPU. Automatically extracts action items, owners, and decisions with 0 cloud latency.</a:t>
-            </a:r>
-          </a:p>
-        </p:txBody>
-      </p:sp>
-      <p:sp>
-        <p:nvSpPr>
-          <p:cNvPr id="7" name="Rounded Rectangle 6"/>
+              <a:spcAft>
+                <a:spcPts val="500"/>
+              </a:spcAft>
+              <a:defRPr sz="1400">
+                <a:solidFill>
+                  <a:srgbClr val="8892B0"/>
+                </a:solidFill>
+              </a:defRPr>
+            </a:pPr>
+            <a:r>
+              <a:t>Extracts action items &amp; decisions</a:t>
+            </a:r>
+          </a:p>
+        </p:txBody>
+      </p:sp>
+      <p:sp>
+        <p:nvSpPr>
+          <p:cNvPr id="6" name="Rounded Rectangle 5"/>
           <p:cNvSpPr/>
           <p:nvPr/>
         </p:nvSpPr>
         <p:spPr>
           <a:xfrm>
-            <a:off x="731520" y="2606040"/>
-            <a:ext cx="10728655" cy="1097280"/>
+            <a:off x="3383280" y="1828800"/>
+            <a:ext cx="2560320" cy="3657600"/>
           </a:xfrm>
           <a:prstGeom prst="roundRect">
             <a:avLst/>
           </a:prstGeom>
           <a:solidFill>
-            <a:srgbClr val="161E2E"/>
+            <a:srgbClr val="1A2744"/>
           </a:solidFill>
-          <a:ln w="12700">
+          <a:ln w="19050">
             <a:solidFill>
-              <a:srgbClr val="28354C"/>
+              <a:srgbClr val="00D4FF"/>
             </a:solidFill>
           </a:ln>
         </p:spPr>
@@ -5874,80 +5509,75 @@
           </a:fontRef>
         </p:style>
         <p:txBody>
-          <a:bodyPr rtlCol="0" anchor="ctr"/>
-          <a:lstStyle/>
-          <a:p>
-            <a:pPr algn="ctr"/>
-          </a:p>
-        </p:txBody>
-      </p:sp>
-      <p:sp>
-        <p:nvSpPr>
-          <p:cNvPr id="8" name="TextBox 7"/>
-          <p:cNvSpPr txBox="1"/>
-          <p:nvPr/>
-        </p:nvSpPr>
-        <p:spPr>
-          <a:xfrm>
-            <a:off x="1005840" y="2743200"/>
-            <a:ext cx="10149840" cy="822960"/>
-          </a:xfrm>
-          <a:prstGeom prst="rect">
-            <a:avLst/>
-          </a:prstGeom>
-          <a:noFill/>
-        </p:spPr>
-        <p:txBody>
-          <a:bodyPr wrap="square">
-            <a:spAutoFit/>
-          </a:bodyPr>
-          <a:lstStyle/>
+          <a:bodyPr rtlCol="0" anchor="ctr" wrap="square"/>
+          <a:lstStyle/>
+          <a:p>
+            <a:pPr algn="l">
+              <a:spcAft>
+                <a:spcPts val="1000"/>
+              </a:spcAft>
+              <a:defRPr b="1" sz="2000">
+                <a:solidFill>
+                  <a:srgbClr val="FFFFFF"/>
+                </a:solidFill>
+              </a:defRPr>
+            </a:pPr>
+            <a:r>
+              <a:t>💬 Hexagon Reasoning Copilot</a:t>
+            </a:r>
+          </a:p>
           <a:p>
             <a:pPr>
-              <a:defRPr sz="1500" b="1">
-                <a:solidFill>
-                  <a:srgbClr val="FF4B4B"/>
-                </a:solidFill>
-              </a:defRPr>
-            </a:pPr>
-            <a:r>
-              <a:t>💬 Hexagon Reasoning Copilot</a:t>
+              <a:spcAft>
+                <a:spcPts val="500"/>
+              </a:spcAft>
+              <a:defRPr sz="1400">
+                <a:solidFill>
+                  <a:srgbClr val="8892B0"/>
+                </a:solidFill>
+              </a:defRPr>
+            </a:pPr>
+            <a:r>
+              <a:t>Sub-30ms Llama-3.2-3B INT4</a:t>
             </a:r>
           </a:p>
           <a:p>
             <a:pPr>
-              <a:defRPr sz="1100">
-                <a:solidFill>
-                  <a:srgbClr val="94A3B8"/>
-                </a:solidFill>
-              </a:defRPr>
-            </a:pPr>
-            <a:r>
-              <a:t>Sub-30ms prompt reasoning powered by Llama-3.2-3B INT4. Drafts executive briefs, refactors code, and generates strategy memos completely offline.</a:t>
-            </a:r>
-          </a:p>
-        </p:txBody>
-      </p:sp>
-      <p:sp>
-        <p:nvSpPr>
-          <p:cNvPr id="9" name="Rounded Rectangle 8"/>
+              <a:spcAft>
+                <a:spcPts val="500"/>
+              </a:spcAft>
+              <a:defRPr sz="1400">
+                <a:solidFill>
+                  <a:srgbClr val="8892B0"/>
+                </a:solidFill>
+              </a:defRPr>
+            </a:pPr>
+            <a:r>
+              <a:t>Drafts briefs, refactors code</a:t>
+            </a:r>
+          </a:p>
+        </p:txBody>
+      </p:sp>
+      <p:sp>
+        <p:nvSpPr>
+          <p:cNvPr id="7" name="Rounded Rectangle 6"/>
           <p:cNvSpPr/>
           <p:nvPr/>
         </p:nvSpPr>
         <p:spPr>
           <a:xfrm>
-            <a:off x="731520" y="3840480"/>
-            <a:ext cx="10728655" cy="1097280"/>
+            <a:off x="6217920" y="1828800"/>
+            <a:ext cx="2560320" cy="3657600"/>
           </a:xfrm>
           <a:prstGeom prst="roundRect">
             <a:avLst/>
           </a:prstGeom>
           <a:solidFill>
-            <a:srgbClr val="161E2E"/>
+            <a:srgbClr val="1A2744"/>
           </a:solidFill>
-          <a:ln w="12700">
+          <a:ln w="19050">
             <a:solidFill>
-              <a:srgbClr val="28354C"/>
+              <a:srgbClr val="00D4FF"/>
             </a:solidFill>
           </a:ln>
         </p:spPr>
@@ -5966,80 +5596,75 @@
           </a:fontRef>
         </p:style>
         <p:txBody>
-          <a:bodyPr rtlCol="0" anchor="ctr"/>
-          <a:lstStyle/>
-          <a:p>
-            <a:pPr algn="ctr"/>
-          </a:p>
-        </p:txBody>
-      </p:sp>
-      <p:sp>
-        <p:nvSpPr>
-          <p:cNvPr id="10" name="TextBox 9"/>
-          <p:cNvSpPr txBox="1"/>
-          <p:nvPr/>
-        </p:nvSpPr>
-        <p:spPr>
-          <a:xfrm>
-            <a:off x="1005840" y="3977640"/>
-            <a:ext cx="10149840" cy="822960"/>
-          </a:xfrm>
-          <a:prstGeom prst="rect">
-            <a:avLst/>
-          </a:prstGeom>
-          <a:noFill/>
-        </p:spPr>
-        <p:txBody>
-          <a:bodyPr wrap="square">
-            <a:spAutoFit/>
-          </a:bodyPr>
-          <a:lstStyle/>
+          <a:bodyPr rtlCol="0" anchor="ctr" wrap="square"/>
+          <a:lstStyle/>
+          <a:p>
+            <a:pPr algn="l">
+              <a:spcAft>
+                <a:spcPts val="1000"/>
+              </a:spcAft>
+              <a:defRPr b="1" sz="2000">
+                <a:solidFill>
+                  <a:srgbClr val="FFFFFF"/>
+                </a:solidFill>
+              </a:defRPr>
+            </a:pPr>
+            <a:r>
+              <a:t>📚 Air-Gapped Document RAG</a:t>
+            </a:r>
+          </a:p>
           <a:p>
             <a:pPr>
-              <a:defRPr sz="1500" b="1">
-                <a:solidFill>
-                  <a:srgbClr val="FF4B4B"/>
-                </a:solidFill>
-              </a:defRPr>
-            </a:pPr>
-            <a:r>
-              <a:t>📚 Air-Gapped Document RAG</a:t>
+              <a:spcAft>
+                <a:spcPts val="500"/>
+              </a:spcAft>
+              <a:defRPr sz="1400">
+                <a:solidFill>
+                  <a:srgbClr val="8892B0"/>
+                </a:solidFill>
+              </a:defRPr>
+            </a:pPr>
+            <a:r>
+              <a:t>Encrypted vector DB</a:t>
             </a:r>
           </a:p>
           <a:p>
             <a:pPr>
-              <a:defRPr sz="1100">
-                <a:solidFill>
-                  <a:srgbClr val="94A3B8"/>
-                </a:solidFill>
-              </a:defRPr>
-            </a:pPr>
-            <a:r>
-              <a:t>Indexes local corporate PDFs, spreadsheets, and markdown notes into an encrypted vector database. Sub-7ms semantic search with all-MiniLM-L6-v2 embeddings.</a:t>
-            </a:r>
-          </a:p>
-        </p:txBody>
-      </p:sp>
-      <p:sp>
-        <p:nvSpPr>
-          <p:cNvPr id="11" name="Rounded Rectangle 10"/>
+              <a:spcAft>
+                <a:spcPts val="500"/>
+              </a:spcAft>
+              <a:defRPr sz="1400">
+                <a:solidFill>
+                  <a:srgbClr val="8892B0"/>
+                </a:solidFill>
+              </a:defRPr>
+            </a:pPr>
+            <a:r>
+              <a:t>Sub-7ms semantic search</a:t>
+            </a:r>
+          </a:p>
+        </p:txBody>
+      </p:sp>
+      <p:sp>
+        <p:nvSpPr>
+          <p:cNvPr id="8" name="Rounded Rectangle 7"/>
           <p:cNvSpPr/>
           <p:nvPr/>
         </p:nvSpPr>
         <p:spPr>
           <a:xfrm>
-            <a:off x="731520" y="5074920"/>
-            <a:ext cx="10728655" cy="1097280"/>
+            <a:off x="9052560" y="1828800"/>
+            <a:ext cx="2560320" cy="3657600"/>
           </a:xfrm>
           <a:prstGeom prst="roundRect">
             <a:avLst/>
           </a:prstGeom>
           <a:solidFill>
-            <a:srgbClr val="161E2E"/>
+            <a:srgbClr val="1A2744"/>
           </a:solidFill>
-          <a:ln w="12700">
+          <a:ln w="19050">
             <a:solidFill>
-              <a:srgbClr val="28354C"/>
+              <a:srgbClr val="00D4FF"/>
             </a:solidFill>
           </a:ln>
         </p:spPr>
@@ -6058,56 +5683,51 @@
           </a:fontRef>
         </p:style>
         <p:txBody>
-          <a:bodyPr rtlCol="0" anchor="ctr"/>
-          <a:lstStyle/>
-          <a:p>
-            <a:pPr algn="ctr"/>
-          </a:p>
-        </p:txBody>
-      </p:sp>
-      <p:sp>
-        <p:nvSpPr>
-          <p:cNvPr id="12" name="TextBox 11"/>
-          <p:cNvSpPr txBox="1"/>
-          <p:nvPr/>
-        </p:nvSpPr>
-        <p:spPr>
-          <a:xfrm>
-            <a:off x="1005840" y="5212080"/>
-            <a:ext cx="10149840" cy="822960"/>
-          </a:xfrm>
-          <a:prstGeom prst="rect">
-            <a:avLst/>
-          </a:prstGeom>
-          <a:noFill/>
-        </p:spPr>
-        <p:txBody>
-          <a:bodyPr wrap="square">
-            <a:spAutoFit/>
-          </a:bodyPr>
-          <a:lstStyle/>
+          <a:bodyPr rtlCol="0" anchor="ctr" wrap="square"/>
+          <a:lstStyle/>
+          <a:p>
+            <a:pPr algn="l">
+              <a:spcAft>
+                <a:spcPts val="1000"/>
+              </a:spcAft>
+              <a:defRPr b="1" sz="2000">
+                <a:solidFill>
+                  <a:srgbClr val="FFFFFF"/>
+                </a:solidFill>
+              </a:defRPr>
+            </a:pPr>
+            <a:r>
+              <a:t>👁️ Screen Guard &amp; Vision Inspector</a:t>
+            </a:r>
+          </a:p>
           <a:p>
             <a:pPr>
-              <a:defRPr sz="1500" b="1">
-                <a:solidFill>
-                  <a:srgbClr val="FF4B4B"/>
-                </a:solidFill>
-              </a:defRPr>
-            </a:pPr>
-            <a:r>
-              <a:t>👁️ Screen Guard &amp; Vision Inspector</a:t>
+              <a:spcAft>
+                <a:spcPts val="500"/>
+              </a:spcAft>
+              <a:defRPr sz="1400">
+                <a:solidFill>
+                  <a:srgbClr val="8892B0"/>
+                </a:solidFill>
+              </a:defRPr>
+            </a:pPr>
+            <a:r>
+              <a:t>YOLOv11-Nano at 238 FPS</a:t>
             </a:r>
           </a:p>
           <a:p>
             <a:pPr>
-              <a:defRPr sz="1100">
-                <a:solidFill>
-                  <a:srgbClr val="94A3B8"/>
-                </a:solidFill>
-              </a:defRPr>
-            </a:pPr>
-            <a:r>
-              <a:t>Scans active workspace windows and shared screens via YOLOv11-Nano at 238 FPS. Alerts users before sharing displays containing sensitive PII or credentials.</a:t>
+              <a:spcAft>
+                <a:spcPts val="500"/>
+              </a:spcAft>
+              <a:defRPr sz="1400">
+                <a:solidFill>
+                  <a:srgbClr val="8892B0"/>
+                </a:solidFill>
+              </a:defRPr>
+            </a:pPr>
+            <a:r>
+              <a:t>PII alerts</a:t>
             </a:r>
           </a:p>
         </p:txBody>
@@ -6145,10 +5765,12 @@
             <a:avLst/>
           </a:prstGeom>
           <a:solidFill>
-            <a:srgbClr val="0B0F19"/>
+            <a:srgbClr val="080C18"/>
           </a:solidFill>
           <a:ln>
-            <a:noFill/>
+            <a:solidFill>
+              <a:srgbClr val="080C18"/>
+            </a:solidFill>
           </a:ln>
         </p:spPr>
         <p:style>
@@ -6181,8 +5803,8 @@
         </p:nvSpPr>
         <p:spPr>
           <a:xfrm>
-            <a:off x="731520" y="365760"/>
-            <a:ext cx="10058400" cy="320040"/>
+            <a:off x="457200" y="6400800"/>
+            <a:ext cx="11277295" cy="365760"/>
           </a:xfrm>
           <a:prstGeom prst="rect">
             <a:avLst/>
@@ -6190,20 +5812,20 @@
           <a:noFill/>
         </p:spPr>
         <p:txBody>
-          <a:bodyPr wrap="square">
+          <a:bodyPr wrap="none">
             <a:spAutoFit/>
           </a:bodyPr>
           <a:lstStyle/>
           <a:p>
-            <a:pPr>
-              <a:defRPr sz="1000" b="1">
-                <a:solidFill>
-                  <a:srgbClr val="FF4B4B"/>
-                </a:solidFill>
-              </a:defRPr>
-            </a:pPr>
-            <a:r>
-              <a:t>SNAPDRAGON® AI LAB BUILD &amp; PRESENT CHALLENGE</a:t>
+            <a:pPr algn="ctr">
+              <a:defRPr sz="1000">
+                <a:solidFill>
+                  <a:srgbClr val="8892B0"/>
+                </a:solidFill>
+              </a:defRPr>
+            </a:pPr>
+            <a:r>
+              <a:t>Qualcomm Snapdragon® AI Lab Build &amp; Present Challenge • Solution Submission • September 2026</a:t>
             </a:r>
           </a:p>
         </p:txBody>
@@ -6216,8 +5838,8 @@
         </p:nvSpPr>
         <p:spPr>
           <a:xfrm>
-            <a:off x="731520" y="640080"/>
-            <a:ext cx="10515600" cy="548640"/>
+            <a:off x="548640" y="365760"/>
+            <a:ext cx="11094415" cy="914400"/>
           </a:xfrm>
           <a:prstGeom prst="rect">
             <a:avLst/>
@@ -6225,15 +5847,15 @@
           <a:noFill/>
         </p:spPr>
         <p:txBody>
-          <a:bodyPr wrap="square">
+          <a:bodyPr wrap="none">
             <a:spAutoFit/>
           </a:bodyPr>
           <a:lstStyle/>
           <a:p>
             <a:pPr>
-              <a:defRPr sz="2200" b="1">
-                <a:solidFill>
-                  <a:srgbClr val="F8FAFC"/>
+              <a:defRPr b="1" sz="3600">
+                <a:solidFill>
+                  <a:srgbClr val="00D4FF"/>
                 </a:solidFill>
               </a:defRPr>
             </a:pPr>
@@ -6251,18 +5873,18 @@
         </p:nvSpPr>
         <p:spPr>
           <a:xfrm>
-            <a:off x="731520" y="1371600"/>
-            <a:ext cx="2560320" cy="4114800"/>
+            <a:off x="548640" y="1828800"/>
+            <a:ext cx="2560320" cy="3657600"/>
           </a:xfrm>
           <a:prstGeom prst="roundRect">
             <a:avLst/>
           </a:prstGeom>
           <a:solidFill>
-            <a:srgbClr val="161E2E"/>
+            <a:srgbClr val="1A2744"/>
           </a:solidFill>
-          <a:ln w="12700">
+          <a:ln w="19050">
             <a:solidFill>
-              <a:srgbClr val="28354C"/>
+              <a:srgbClr val="00D4FF"/>
             </a:solidFill>
           </a:ln>
         </p:spPr>
@@ -6281,81 +5903,60 @@
           </a:fontRef>
         </p:style>
         <p:txBody>
-          <a:bodyPr rtlCol="0" anchor="ctr"/>
-          <a:lstStyle/>
-          <a:p>
-            <a:pPr algn="ctr"/>
-          </a:p>
-        </p:txBody>
-      </p:sp>
-      <p:sp>
-        <p:nvSpPr>
-          <p:cNvPr id="6" name="TextBox 5"/>
-          <p:cNvSpPr txBox="1"/>
-          <p:nvPr/>
-        </p:nvSpPr>
-        <p:spPr>
-          <a:xfrm>
-            <a:off x="914400" y="1645920"/>
-            <a:ext cx="2194560" cy="3657600"/>
-          </a:xfrm>
-          <a:prstGeom prst="rect">
-            <a:avLst/>
-          </a:prstGeom>
-          <a:noFill/>
-        </p:spPr>
-        <p:txBody>
-          <a:bodyPr wrap="square">
-            <a:spAutoFit/>
-          </a:bodyPr>
-          <a:lstStyle/>
+          <a:bodyPr rtlCol="0" anchor="ctr" wrap="square"/>
+          <a:lstStyle/>
+          <a:p>
+            <a:pPr algn="l">
+              <a:spcAft>
+                <a:spcPts val="1000"/>
+              </a:spcAft>
+              <a:defRPr b="1" sz="2000">
+                <a:solidFill>
+                  <a:srgbClr val="FFFFFF"/>
+                </a:solidFill>
+              </a:defRPr>
+            </a:pPr>
+            <a:r>
+              <a:t>45 Peak NPU TOPS</a:t>
+            </a:r>
+          </a:p>
           <a:p>
             <a:pPr>
-              <a:defRPr sz="1600" b="1">
-                <a:solidFill>
-                  <a:srgbClr val="FF4B4B"/>
-                </a:solidFill>
-              </a:defRPr>
-            </a:pPr>
-            <a:r>
-              <a:t>45 Peak NPU TOPS</a:t>
-            </a:r>
-          </a:p>
-          <a:p>
-            <a:br/>
-            <a:pPr>
-              <a:defRPr sz="1200">
-                <a:solidFill>
-                  <a:srgbClr val="94A3B8"/>
-                </a:solidFill>
-              </a:defRPr>
-            </a:pPr>
-            <a:r>
-              <a:t>Hexagon NPU executes multi-model concurrent pipelines (Whisper + Llama + YOLO) while keeping Oryon CPU idle.</a:t>
-            </a:r>
-          </a:p>
-        </p:txBody>
-      </p:sp>
-      <p:sp>
-        <p:nvSpPr>
-          <p:cNvPr id="7" name="Rounded Rectangle 6"/>
+              <a:spcAft>
+                <a:spcPts val="500"/>
+              </a:spcAft>
+              <a:defRPr sz="1400">
+                <a:solidFill>
+                  <a:srgbClr val="8892B0"/>
+                </a:solidFill>
+              </a:defRPr>
+            </a:pPr>
+            <a:r>
+              <a:t>Multi-model concurrent execution</a:t>
+            </a:r>
+          </a:p>
+        </p:txBody>
+      </p:sp>
+      <p:sp>
+        <p:nvSpPr>
+          <p:cNvPr id="6" name="Rounded Rectangle 5"/>
           <p:cNvSpPr/>
           <p:nvPr/>
         </p:nvSpPr>
         <p:spPr>
           <a:xfrm>
-            <a:off x="3429000" y="1371600"/>
-            <a:ext cx="2560320" cy="4114800"/>
+            <a:off x="3383280" y="1828800"/>
+            <a:ext cx="2560320" cy="3657600"/>
           </a:xfrm>
           <a:prstGeom prst="roundRect">
             <a:avLst/>
           </a:prstGeom>
           <a:solidFill>
-            <a:srgbClr val="161E2E"/>
+            <a:srgbClr val="1A2744"/>
           </a:solidFill>
-          <a:ln w="12700">
+          <a:ln w="19050">
             <a:solidFill>
-              <a:srgbClr val="28354C"/>
+              <a:srgbClr val="00D4FF"/>
             </a:solidFill>
           </a:ln>
         </p:spPr>
@@ -6374,81 +5975,60 @@
           </a:fontRef>
         </p:style>
         <p:txBody>
-          <a:bodyPr rtlCol="0" anchor="ctr"/>
-          <a:lstStyle/>
-          <a:p>
-            <a:pPr algn="ctr"/>
-          </a:p>
-        </p:txBody>
-      </p:sp>
-      <p:sp>
-        <p:nvSpPr>
-          <p:cNvPr id="8" name="TextBox 7"/>
-          <p:cNvSpPr txBox="1"/>
-          <p:nvPr/>
-        </p:nvSpPr>
-        <p:spPr>
-          <a:xfrm>
-            <a:off x="3611880" y="1645920"/>
-            <a:ext cx="2194560" cy="3657600"/>
-          </a:xfrm>
-          <a:prstGeom prst="rect">
-            <a:avLst/>
-          </a:prstGeom>
-          <a:noFill/>
-        </p:spPr>
-        <p:txBody>
-          <a:bodyPr wrap="square">
-            <a:spAutoFit/>
-          </a:bodyPr>
-          <a:lstStyle/>
+          <a:bodyPr rtlCol="0" anchor="ctr" wrap="square"/>
+          <a:lstStyle/>
+          <a:p>
+            <a:pPr algn="l">
+              <a:spcAft>
+                <a:spcPts val="1000"/>
+              </a:spcAft>
+              <a:defRPr b="1" sz="2000">
+                <a:solidFill>
+                  <a:srgbClr val="FFFFFF"/>
+                </a:solidFill>
+              </a:defRPr>
+            </a:pPr>
+            <a:r>
+              <a:t>22.5 Hours AI Battery</a:t>
+            </a:r>
+          </a:p>
           <a:p>
             <a:pPr>
-              <a:defRPr sz="1600" b="1">
-                <a:solidFill>
-                  <a:srgbClr val="10B981"/>
-                </a:solidFill>
-              </a:defRPr>
-            </a:pPr>
-            <a:r>
-              <a:t>22.5 Hours AI Battery</a:t>
-            </a:r>
-          </a:p>
-          <a:p>
-            <a:br/>
-            <a:pPr>
-              <a:defRPr sz="1200">
-                <a:solidFill>
-                  <a:srgbClr val="94A3B8"/>
-                </a:solidFill>
-              </a:defRPr>
-            </a:pPr>
-            <a:r>
-              <a:t>Sustained AI inference draws only 3.8W, compared to 38.5W on legacy x86 laptops, preserving HP OmniBook all-day endurance.</a:t>
-            </a:r>
-          </a:p>
-        </p:txBody>
-      </p:sp>
-      <p:sp>
-        <p:nvSpPr>
-          <p:cNvPr id="9" name="Rounded Rectangle 8"/>
+              <a:spcAft>
+                <a:spcPts val="500"/>
+              </a:spcAft>
+              <a:defRPr sz="1400">
+                <a:solidFill>
+                  <a:srgbClr val="8892B0"/>
+                </a:solidFill>
+              </a:defRPr>
+            </a:pPr>
+            <a:r>
+              <a:t>3.8W vs 38.5W on x86</a:t>
+            </a:r>
+          </a:p>
+        </p:txBody>
+      </p:sp>
+      <p:sp>
+        <p:nvSpPr>
+          <p:cNvPr id="7" name="Rounded Rectangle 6"/>
           <p:cNvSpPr/>
           <p:nvPr/>
         </p:nvSpPr>
         <p:spPr>
           <a:xfrm>
-            <a:off x="6126480" y="1371600"/>
-            <a:ext cx="2560320" cy="4114800"/>
+            <a:off x="6217920" y="1828800"/>
+            <a:ext cx="2560320" cy="3657600"/>
           </a:xfrm>
           <a:prstGeom prst="roundRect">
             <a:avLst/>
           </a:prstGeom>
           <a:solidFill>
-            <a:srgbClr val="161E2E"/>
+            <a:srgbClr val="1A2744"/>
           </a:solidFill>
-          <a:ln w="12700">
+          <a:ln w="19050">
             <a:solidFill>
-              <a:srgbClr val="28354C"/>
+              <a:srgbClr val="00D4FF"/>
             </a:solidFill>
           </a:ln>
         </p:spPr>
@@ -6467,81 +6047,75 @@
           </a:fontRef>
         </p:style>
         <p:txBody>
-          <a:bodyPr rtlCol="0" anchor="ctr"/>
-          <a:lstStyle/>
-          <a:p>
-            <a:pPr algn="ctr"/>
-          </a:p>
-        </p:txBody>
-      </p:sp>
-      <p:sp>
-        <p:nvSpPr>
-          <p:cNvPr id="10" name="TextBox 9"/>
-          <p:cNvSpPr txBox="1"/>
-          <p:nvPr/>
-        </p:nvSpPr>
-        <p:spPr>
-          <a:xfrm>
-            <a:off x="6309360" y="1645920"/>
-            <a:ext cx="2194560" cy="3657600"/>
-          </a:xfrm>
-          <a:prstGeom prst="rect">
-            <a:avLst/>
-          </a:prstGeom>
-          <a:noFill/>
-        </p:spPr>
-        <p:txBody>
-          <a:bodyPr wrap="square">
-            <a:spAutoFit/>
-          </a:bodyPr>
-          <a:lstStyle/>
+          <a:bodyPr rtlCol="0" anchor="ctr" wrap="square"/>
+          <a:lstStyle/>
+          <a:p>
+            <a:pPr algn="l">
+              <a:spcAft>
+                <a:spcPts val="1000"/>
+              </a:spcAft>
+              <a:defRPr b="1" sz="2000">
+                <a:solidFill>
+                  <a:srgbClr val="FFFFFF"/>
+                </a:solidFill>
+              </a:defRPr>
+            </a:pPr>
+            <a:r>
+              <a:t>Whisper-Quiet Thermals</a:t>
+            </a:r>
+          </a:p>
           <a:p>
             <a:pPr>
-              <a:defRPr sz="1600" b="1">
-                <a:solidFill>
-                  <a:srgbClr val="06B6D4"/>
-                </a:solidFill>
-              </a:defRPr>
-            </a:pPr>
-            <a:r>
-              <a:t>Whisper-Quiet Thermals</a:t>
-            </a:r>
-          </a:p>
-          <a:p>
-            <a:br/>
+              <a:spcAft>
+                <a:spcPts val="500"/>
+              </a:spcAft>
+              <a:defRPr sz="1400">
+                <a:solidFill>
+                  <a:srgbClr val="8892B0"/>
+                </a:solidFill>
+              </a:defRPr>
+            </a:pPr>
+            <a:r>
+              <a:t>&lt;18 dBA</a:t>
+            </a:r>
+          </a:p>
+          <a:p>
             <a:pPr>
-              <a:defRPr sz="1200">
-                <a:solidFill>
-                  <a:srgbClr val="94A3B8"/>
-                </a:solidFill>
-              </a:defRPr>
-            </a:pPr>
-            <a:r>
-              <a:t>Zero thermal throttling and &lt;18 dBA fan acoustic profile. HP OmniBook remains cool to the touch during heavy AI generation.</a:t>
-            </a:r>
-          </a:p>
-        </p:txBody>
-      </p:sp>
-      <p:sp>
-        <p:nvSpPr>
-          <p:cNvPr id="11" name="Rounded Rectangle 10"/>
+              <a:spcAft>
+                <a:spcPts val="500"/>
+              </a:spcAft>
+              <a:defRPr sz="1400">
+                <a:solidFill>
+                  <a:srgbClr val="8892B0"/>
+                </a:solidFill>
+              </a:defRPr>
+            </a:pPr>
+            <a:r>
+              <a:t>Zero thermal throttling</a:t>
+            </a:r>
+          </a:p>
+        </p:txBody>
+      </p:sp>
+      <p:sp>
+        <p:nvSpPr>
+          <p:cNvPr id="8" name="Rounded Rectangle 7"/>
           <p:cNvSpPr/>
           <p:nvPr/>
         </p:nvSpPr>
         <p:spPr>
           <a:xfrm>
-            <a:off x="8823960" y="1371600"/>
-            <a:ext cx="2560320" cy="4114800"/>
+            <a:off x="9052560" y="1828800"/>
+            <a:ext cx="2560320" cy="3657600"/>
           </a:xfrm>
           <a:prstGeom prst="roundRect">
             <a:avLst/>
           </a:prstGeom>
           <a:solidFill>
-            <a:srgbClr val="161E2E"/>
+            <a:srgbClr val="1A2744"/>
           </a:solidFill>
-          <a:ln w="12700">
+          <a:ln w="19050">
             <a:solidFill>
-              <a:srgbClr val="28354C"/>
+              <a:srgbClr val="00D4FF"/>
             </a:solidFill>
           </a:ln>
         </p:spPr>
@@ -6560,57 +6134,51 @@
           </a:fontRef>
         </p:style>
         <p:txBody>
-          <a:bodyPr rtlCol="0" anchor="ctr"/>
-          <a:lstStyle/>
-          <a:p>
-            <a:pPr algn="ctr"/>
-          </a:p>
-        </p:txBody>
-      </p:sp>
-      <p:sp>
-        <p:nvSpPr>
-          <p:cNvPr id="12" name="TextBox 11"/>
-          <p:cNvSpPr txBox="1"/>
-          <p:nvPr/>
-        </p:nvSpPr>
-        <p:spPr>
-          <a:xfrm>
-            <a:off x="9006840" y="1645920"/>
-            <a:ext cx="2194560" cy="3657600"/>
-          </a:xfrm>
-          <a:prstGeom prst="rect">
-            <a:avLst/>
-          </a:prstGeom>
-          <a:noFill/>
-        </p:spPr>
-        <p:txBody>
-          <a:bodyPr wrap="square">
-            <a:spAutoFit/>
-          </a:bodyPr>
-          <a:lstStyle/>
+          <a:bodyPr rtlCol="0" anchor="ctr" wrap="square"/>
+          <a:lstStyle/>
+          <a:p>
+            <a:pPr algn="l">
+              <a:spcAft>
+                <a:spcPts val="1000"/>
+              </a:spcAft>
+              <a:defRPr b="1" sz="2000">
+                <a:solidFill>
+                  <a:srgbClr val="FFFFFF"/>
+                </a:solidFill>
+              </a:defRPr>
+            </a:pPr>
+            <a:r>
+              <a:t>Windows on ARM Native</a:t>
+            </a:r>
+          </a:p>
           <a:p>
             <a:pPr>
-              <a:defRPr sz="1600" b="1">
-                <a:solidFill>
-                  <a:srgbClr val="F59E0B"/>
-                </a:solidFill>
-              </a:defRPr>
-            </a:pPr>
-            <a:r>
-              <a:t>Windows on ARM Native</a:t>
-            </a:r>
-          </a:p>
-          <a:p>
-            <a:br/>
+              <a:spcAft>
+                <a:spcPts val="500"/>
+              </a:spcAft>
+              <a:defRPr sz="1400">
+                <a:solidFill>
+                  <a:srgbClr val="8892B0"/>
+                </a:solidFill>
+              </a:defRPr>
+            </a:pPr>
+            <a:r>
+              <a:t>QNN HTP DLLs</a:t>
+            </a:r>
+          </a:p>
+          <a:p>
             <a:pPr>
-              <a:defRPr sz="1200">
-                <a:solidFill>
-                  <a:srgbClr val="94A3B8"/>
-                </a:solidFill>
-              </a:defRPr>
-            </a:pPr>
-            <a:r>
-              <a:t>Engineered with QNN HTP DLLs and DirectML fallbacks for plug-and-play operation on Windows 11 on Snapdragon ARM64.</a:t>
+              <a:spcAft>
+                <a:spcPts val="500"/>
+              </a:spcAft>
+              <a:defRPr sz="1400">
+                <a:solidFill>
+                  <a:srgbClr val="8892B0"/>
+                </a:solidFill>
+              </a:defRPr>
+            </a:pPr>
+            <a:r>
+              <a:t>DirectML fallbacks</a:t>
             </a:r>
           </a:p>
         </p:txBody>
@@ -6648,10 +6216,12 @@
             <a:avLst/>
           </a:prstGeom>
           <a:solidFill>
-            <a:srgbClr val="0B0F19"/>
+            <a:srgbClr val="080C18"/>
           </a:solidFill>
           <a:ln>
-            <a:noFill/>
+            <a:solidFill>
+              <a:srgbClr val="080C18"/>
+            </a:solidFill>
           </a:ln>
         </p:spPr>
         <p:style>
@@ -6684,8 +6254,8 @@
         </p:nvSpPr>
         <p:spPr>
           <a:xfrm>
-            <a:off x="731520" y="365760"/>
-            <a:ext cx="10058400" cy="320040"/>
+            <a:off x="457200" y="6400800"/>
+            <a:ext cx="11277295" cy="365760"/>
           </a:xfrm>
           <a:prstGeom prst="rect">
             <a:avLst/>
@@ -6693,20 +6263,20 @@
           <a:noFill/>
         </p:spPr>
         <p:txBody>
-          <a:bodyPr wrap="square">
+          <a:bodyPr wrap="none">
             <a:spAutoFit/>
           </a:bodyPr>
           <a:lstStyle/>
           <a:p>
-            <a:pPr>
-              <a:defRPr sz="1000" b="1">
-                <a:solidFill>
-                  <a:srgbClr val="FF4B4B"/>
-                </a:solidFill>
-              </a:defRPr>
-            </a:pPr>
-            <a:r>
-              <a:t>SNAPDRAGON® AI LAB BUILD &amp; PRESENT CHALLENGE</a:t>
+            <a:pPr algn="ctr">
+              <a:defRPr sz="1000">
+                <a:solidFill>
+                  <a:srgbClr val="8892B0"/>
+                </a:solidFill>
+              </a:defRPr>
+            </a:pPr>
+            <a:r>
+              <a:t>Qualcomm Snapdragon® AI Lab Build &amp; Present Challenge • Solution Submission • September 2026</a:t>
             </a:r>
           </a:p>
         </p:txBody>
@@ -6719,8 +6289,8 @@
         </p:nvSpPr>
         <p:spPr>
           <a:xfrm>
-            <a:off x="731520" y="640080"/>
-            <a:ext cx="10515600" cy="548640"/>
+            <a:off x="548640" y="365760"/>
+            <a:ext cx="11094415" cy="914400"/>
           </a:xfrm>
           <a:prstGeom prst="rect">
             <a:avLst/>
@@ -6728,15 +6298,15 @@
           <a:noFill/>
         </p:spPr>
         <p:txBody>
-          <a:bodyPr wrap="square">
+          <a:bodyPr wrap="none">
             <a:spAutoFit/>
           </a:bodyPr>
           <a:lstStyle/>
           <a:p>
             <a:pPr>
-              <a:defRPr sz="2200" b="1">
-                <a:solidFill>
-                  <a:srgbClr val="F8FAFC"/>
+              <a:defRPr b="1" sz="3600">
+                <a:solidFill>
+                  <a:srgbClr val="00D4FF"/>
                 </a:solidFill>
               </a:defRPr>
             </a:pPr>
@@ -6754,18 +6324,18 @@
         </p:nvSpPr>
         <p:spPr>
           <a:xfrm>
-            <a:off x="731520" y="1371600"/>
-            <a:ext cx="2560320" cy="1645920"/>
+            <a:off x="548640" y="1463040"/>
+            <a:ext cx="2560320" cy="1097280"/>
           </a:xfrm>
           <a:prstGeom prst="roundRect">
             <a:avLst/>
           </a:prstGeom>
           <a:solidFill>
-            <a:srgbClr val="161E2E"/>
+            <a:srgbClr val="1A2744"/>
           </a:solidFill>
-          <a:ln w="12700">
+          <a:ln w="19050">
             <a:solidFill>
-              <a:srgbClr val="28354C"/>
+              <a:srgbClr val="00D4FF"/>
             </a:solidFill>
           </a:ln>
         </p:spPr>
@@ -6784,92 +6354,45 @@
           </a:fontRef>
         </p:style>
         <p:txBody>
-          <a:bodyPr rtlCol="0" anchor="ctr"/>
-          <a:lstStyle/>
-          <a:p>
-            <a:pPr algn="ctr"/>
-          </a:p>
-        </p:txBody>
-      </p:sp>
-      <p:sp>
-        <p:nvSpPr>
-          <p:cNvPr id="6" name="TextBox 5"/>
-          <p:cNvSpPr txBox="1"/>
-          <p:nvPr/>
-        </p:nvSpPr>
-        <p:spPr>
-          <a:xfrm>
-            <a:off x="822960" y="1508760"/>
-            <a:ext cx="2377440" cy="1371600"/>
-          </a:xfrm>
-          <a:prstGeom prst="rect">
-            <a:avLst/>
-          </a:prstGeom>
-          <a:noFill/>
-        </p:spPr>
-        <p:txBody>
-          <a:bodyPr wrap="square">
-            <a:spAutoFit/>
-          </a:bodyPr>
-          <a:lstStyle/>
-          <a:p>
-            <a:pPr>
-              <a:defRPr sz="2800" b="1">
-                <a:solidFill>
-                  <a:srgbClr val="10B981"/>
-                </a:solidFill>
-              </a:defRPr>
-            </a:pPr>
-            <a:r>
-              <a:t>7.2x</a:t>
-            </a:r>
-          </a:p>
-          <a:p>
-            <a:pPr>
-              <a:defRPr sz="1200" b="1">
-                <a:solidFill>
-                  <a:srgbClr val="F8FAFC"/>
-                </a:solidFill>
-              </a:defRPr>
-            </a:pPr>
-            <a:r>
-              <a:t>Speedup vs x86 CPU</a:t>
-            </a:r>
-          </a:p>
-          <a:p>
-            <a:pPr>
-              <a:defRPr sz="1000">
-                <a:solidFill>
-                  <a:srgbClr val="94A3B8"/>
-                </a:solidFill>
-              </a:defRPr>
-            </a:pPr>
-            <a:r>
-              <a:t>Whisper Speech ASR</a:t>
-            </a:r>
-          </a:p>
-        </p:txBody>
-      </p:sp>
-      <p:sp>
-        <p:nvSpPr>
-          <p:cNvPr id="7" name="Rounded Rectangle 6"/>
+          <a:bodyPr rtlCol="0" anchor="ctr" wrap="square"/>
+          <a:lstStyle/>
+          <a:p>
+            <a:pPr algn="l">
+              <a:spcAft>
+                <a:spcPts val="1000"/>
+              </a:spcAft>
+              <a:defRPr b="1" sz="2000">
+                <a:solidFill>
+                  <a:srgbClr val="FFFFFF"/>
+                </a:solidFill>
+              </a:defRPr>
+            </a:pPr>
+            <a:r>
+              <a:t>7.2x Speedup</a:t>
+            </a:r>
+          </a:p>
+        </p:txBody>
+      </p:sp>
+      <p:sp>
+        <p:nvSpPr>
+          <p:cNvPr id="6" name="Rounded Rectangle 5"/>
           <p:cNvSpPr/>
           <p:nvPr/>
         </p:nvSpPr>
         <p:spPr>
           <a:xfrm>
-            <a:off x="3429000" y="1371600"/>
-            <a:ext cx="2560320" cy="1645920"/>
+            <a:off x="3383280" y="1463040"/>
+            <a:ext cx="2560320" cy="1097280"/>
           </a:xfrm>
           <a:prstGeom prst="roundRect">
             <a:avLst/>
           </a:prstGeom>
           <a:solidFill>
-            <a:srgbClr val="161E2E"/>
+            <a:srgbClr val="1A2744"/>
           </a:solidFill>
-          <a:ln w="12700">
+          <a:ln w="19050">
             <a:solidFill>
-              <a:srgbClr val="28354C"/>
+              <a:srgbClr val="00D4FF"/>
             </a:solidFill>
           </a:ln>
         </p:spPr>
@@ -6888,92 +6411,45 @@
           </a:fontRef>
         </p:style>
         <p:txBody>
-          <a:bodyPr rtlCol="0" anchor="ctr"/>
-          <a:lstStyle/>
-          <a:p>
-            <a:pPr algn="ctr"/>
-          </a:p>
-        </p:txBody>
-      </p:sp>
-      <p:sp>
-        <p:nvSpPr>
-          <p:cNvPr id="8" name="TextBox 7"/>
-          <p:cNvSpPr txBox="1"/>
-          <p:nvPr/>
-        </p:nvSpPr>
-        <p:spPr>
-          <a:xfrm>
-            <a:off x="3520440" y="1508760"/>
-            <a:ext cx="2377440" cy="1371600"/>
-          </a:xfrm>
-          <a:prstGeom prst="rect">
-            <a:avLst/>
-          </a:prstGeom>
-          <a:noFill/>
-        </p:spPr>
-        <p:txBody>
-          <a:bodyPr wrap="square">
-            <a:spAutoFit/>
-          </a:bodyPr>
-          <a:lstStyle/>
-          <a:p>
-            <a:pPr>
-              <a:defRPr sz="2800" b="1">
-                <a:solidFill>
-                  <a:srgbClr val="06B6D4"/>
-                </a:solidFill>
-              </a:defRPr>
-            </a:pPr>
-            <a:r>
-              <a:t>10.1x</a:t>
-            </a:r>
-          </a:p>
-          <a:p>
-            <a:pPr>
-              <a:defRPr sz="1200" b="1">
-                <a:solidFill>
-                  <a:srgbClr val="F8FAFC"/>
-                </a:solidFill>
-              </a:defRPr>
-            </a:pPr>
-            <a:r>
-              <a:t>Lower Power Draw</a:t>
-            </a:r>
-          </a:p>
-          <a:p>
-            <a:pPr>
-              <a:defRPr sz="1000">
-                <a:solidFill>
-                  <a:srgbClr val="94A3B8"/>
-                </a:solidFill>
-              </a:defRPr>
-            </a:pPr>
-            <a:r>
-              <a:t>3.8W vs 38.5W on CPU</a:t>
-            </a:r>
-          </a:p>
-        </p:txBody>
-      </p:sp>
-      <p:sp>
-        <p:nvSpPr>
-          <p:cNvPr id="9" name="Rounded Rectangle 8"/>
+          <a:bodyPr rtlCol="0" anchor="ctr" wrap="square"/>
+          <a:lstStyle/>
+          <a:p>
+            <a:pPr algn="l">
+              <a:spcAft>
+                <a:spcPts val="1000"/>
+              </a:spcAft>
+              <a:defRPr b="1" sz="2000">
+                <a:solidFill>
+                  <a:srgbClr val="FFFFFF"/>
+                </a:solidFill>
+              </a:defRPr>
+            </a:pPr>
+            <a:r>
+              <a:t>10.1x Lower Power</a:t>
+            </a:r>
+          </a:p>
+        </p:txBody>
+      </p:sp>
+      <p:sp>
+        <p:nvSpPr>
+          <p:cNvPr id="7" name="Rounded Rectangle 6"/>
           <p:cNvSpPr/>
           <p:nvPr/>
         </p:nvSpPr>
         <p:spPr>
           <a:xfrm>
-            <a:off x="6126480" y="1371600"/>
-            <a:ext cx="2560320" cy="1645920"/>
+            <a:off x="6217920" y="1463040"/>
+            <a:ext cx="2560320" cy="1097280"/>
           </a:xfrm>
           <a:prstGeom prst="roundRect">
             <a:avLst/>
           </a:prstGeom>
           <a:solidFill>
-            <a:srgbClr val="161E2E"/>
+            <a:srgbClr val="1A2744"/>
           </a:solidFill>
-          <a:ln w="12700">
+          <a:ln w="19050">
             <a:solidFill>
-              <a:srgbClr val="28354C"/>
+              <a:srgbClr val="00D4FF"/>
             </a:solidFill>
           </a:ln>
         </p:spPr>
@@ -6992,92 +6468,45 @@
           </a:fontRef>
         </p:style>
         <p:txBody>
-          <a:bodyPr rtlCol="0" anchor="ctr"/>
-          <a:lstStyle/>
-          <a:p>
-            <a:pPr algn="ctr"/>
-          </a:p>
-        </p:txBody>
-      </p:sp>
-      <p:sp>
-        <p:nvSpPr>
-          <p:cNvPr id="10" name="TextBox 9"/>
-          <p:cNvSpPr txBox="1"/>
-          <p:nvPr/>
-        </p:nvSpPr>
-        <p:spPr>
-          <a:xfrm>
-            <a:off x="6217920" y="1508760"/>
-            <a:ext cx="2377440" cy="1371600"/>
-          </a:xfrm>
-          <a:prstGeom prst="rect">
-            <a:avLst/>
-          </a:prstGeom>
-          <a:noFill/>
-        </p:spPr>
-        <p:txBody>
-          <a:bodyPr wrap="square">
-            <a:spAutoFit/>
-          </a:bodyPr>
-          <a:lstStyle/>
-          <a:p>
-            <a:pPr>
-              <a:defRPr sz="2800" b="1">
-                <a:solidFill>
-                  <a:srgbClr val="F59E0B"/>
-                </a:solidFill>
-              </a:defRPr>
-            </a:pPr>
-            <a:r>
-              <a:t>22.5 hrs</a:t>
-            </a:r>
-          </a:p>
-          <a:p>
-            <a:pPr>
-              <a:defRPr sz="1200" b="1">
-                <a:solidFill>
-                  <a:srgbClr val="F8FAFC"/>
-                </a:solidFill>
-              </a:defRPr>
-            </a:pPr>
-            <a:r>
-              <a:t>HP OmniBook Battery</a:t>
-            </a:r>
-          </a:p>
-          <a:p>
-            <a:pPr>
-              <a:defRPr sz="1000">
-                <a:solidFill>
-                  <a:srgbClr val="94A3B8"/>
-                </a:solidFill>
-              </a:defRPr>
-            </a:pPr>
-            <a:r>
-              <a:t>vs 3.2 hrs on rival x86</a:t>
-            </a:r>
-          </a:p>
-        </p:txBody>
-      </p:sp>
-      <p:sp>
-        <p:nvSpPr>
-          <p:cNvPr id="11" name="Rounded Rectangle 10"/>
+          <a:bodyPr rtlCol="0" anchor="ctr" wrap="square"/>
+          <a:lstStyle/>
+          <a:p>
+            <a:pPr algn="l">
+              <a:spcAft>
+                <a:spcPts val="1000"/>
+              </a:spcAft>
+              <a:defRPr b="1" sz="2000">
+                <a:solidFill>
+                  <a:srgbClr val="FFFFFF"/>
+                </a:solidFill>
+              </a:defRPr>
+            </a:pPr>
+            <a:r>
+              <a:t>22.5 hrs Battery</a:t>
+            </a:r>
+          </a:p>
+        </p:txBody>
+      </p:sp>
+      <p:sp>
+        <p:nvSpPr>
+          <p:cNvPr id="8" name="Rounded Rectangle 7"/>
           <p:cNvSpPr/>
           <p:nvPr/>
         </p:nvSpPr>
         <p:spPr>
           <a:xfrm>
-            <a:off x="8823960" y="1371600"/>
-            <a:ext cx="2560320" cy="1645920"/>
+            <a:off x="9052560" y="1463040"/>
+            <a:ext cx="2560320" cy="1097280"/>
           </a:xfrm>
           <a:prstGeom prst="roundRect">
             <a:avLst/>
           </a:prstGeom>
           <a:solidFill>
-            <a:srgbClr val="161E2E"/>
+            <a:srgbClr val="1A2744"/>
           </a:solidFill>
-          <a:ln w="12700">
+          <a:ln w="19050">
             <a:solidFill>
-              <a:srgbClr val="28354C"/>
+              <a:srgbClr val="00D4FF"/>
             </a:solidFill>
           </a:ln>
         </p:spPr>
@@ -7096,200 +6525,639 @@
           </a:fontRef>
         </p:style>
         <p:txBody>
-          <a:bodyPr rtlCol="0" anchor="ctr"/>
-          <a:lstStyle/>
-          <a:p>
-            <a:pPr algn="ctr"/>
-          </a:p>
-        </p:txBody>
-      </p:sp>
-      <p:sp>
-        <p:nvSpPr>
-          <p:cNvPr id="12" name="TextBox 11"/>
-          <p:cNvSpPr txBox="1"/>
+          <a:bodyPr rtlCol="0" anchor="ctr" wrap="square"/>
+          <a:lstStyle/>
+          <a:p>
+            <a:pPr algn="l">
+              <a:spcAft>
+                <a:spcPts val="1000"/>
+              </a:spcAft>
+              <a:defRPr b="1" sz="2000">
+                <a:solidFill>
+                  <a:srgbClr val="FFFFFF"/>
+                </a:solidFill>
+              </a:defRPr>
+            </a:pPr>
+            <a:r>
+              <a:t>$0/mo Cloud Fee</a:t>
+            </a:r>
+          </a:p>
+        </p:txBody>
+      </p:sp>
+      <p:graphicFrame>
+        <p:nvGraphicFramePr>
+          <p:cNvPr id="9" name="Table 8"/>
+          <p:cNvGraphicFramePr>
+            <a:graphicFrameLocks noGrp="1"/>
+          </p:cNvGraphicFramePr>
           <p:nvPr/>
-        </p:nvSpPr>
-        <p:spPr>
-          <a:xfrm>
-            <a:off x="8915400" y="1508760"/>
-            <a:ext cx="2377440" cy="1371600"/>
-          </a:xfrm>
-          <a:prstGeom prst="rect">
-            <a:avLst/>
-          </a:prstGeom>
-          <a:noFill/>
-        </p:spPr>
-        <p:txBody>
-          <a:bodyPr wrap="square">
-            <a:spAutoFit/>
-          </a:bodyPr>
-          <a:lstStyle/>
-          <a:p>
-            <a:pPr>
-              <a:defRPr sz="2800" b="1">
-                <a:solidFill>
-                  <a:srgbClr val="FF4B4B"/>
-                </a:solidFill>
-              </a:defRPr>
-            </a:pPr>
-            <a:r>
-              <a:t>$0 / mo</a:t>
-            </a:r>
-          </a:p>
-          <a:p>
-            <a:pPr>
-              <a:defRPr sz="1200" b="1">
-                <a:solidFill>
-                  <a:srgbClr val="F8FAFC"/>
-                </a:solidFill>
-              </a:defRPr>
-            </a:pPr>
-            <a:r>
-              <a:t>Recurring Cloud Fee</a:t>
-            </a:r>
-          </a:p>
-          <a:p>
-            <a:pPr>
-              <a:defRPr sz="1000">
-                <a:solidFill>
-                  <a:srgbClr val="94A3B8"/>
-                </a:solidFill>
-              </a:defRPr>
-            </a:pPr>
-            <a:r>
-              <a:t>100% On-Device Compute</a:t>
-            </a:r>
-          </a:p>
-        </p:txBody>
-      </p:sp>
-      <p:sp>
-        <p:nvSpPr>
-          <p:cNvPr id="13" name="Rounded Rectangle 12"/>
-          <p:cNvSpPr/>
-          <p:nvPr/>
-        </p:nvSpPr>
-        <p:spPr>
-          <a:xfrm>
-            <a:off x="731520" y="3291840"/>
-            <a:ext cx="10728655" cy="3108960"/>
-          </a:xfrm>
-          <a:prstGeom prst="roundRect">
-            <a:avLst/>
-          </a:prstGeom>
-          <a:solidFill>
-            <a:srgbClr val="161E2E"/>
-          </a:solidFill>
-          <a:ln w="12700">
-            <a:solidFill>
-              <a:srgbClr val="28354C"/>
-            </a:solidFill>
-          </a:ln>
-        </p:spPr>
-        <p:style>
-          <a:lnRef idx="1">
-            <a:schemeClr val="accent1"/>
-          </a:lnRef>
-          <a:fillRef idx="3">
-            <a:schemeClr val="accent1"/>
-          </a:fillRef>
-          <a:effectRef idx="2">
-            <a:schemeClr val="accent1"/>
-          </a:effectRef>
-          <a:fontRef idx="minor">
-            <a:schemeClr val="lt1"/>
-          </a:fontRef>
-        </p:style>
-        <p:txBody>
-          <a:bodyPr rtlCol="0" anchor="ctr"/>
-          <a:lstStyle/>
-          <a:p>
-            <a:pPr algn="ctr"/>
-          </a:p>
-        </p:txBody>
-      </p:sp>
-      <p:sp>
-        <p:nvSpPr>
-          <p:cNvPr id="14" name="TextBox 13"/>
-          <p:cNvSpPr txBox="1"/>
-          <p:nvPr/>
-        </p:nvSpPr>
-        <p:spPr>
-          <a:xfrm>
-            <a:off x="914400" y="3474720"/>
-            <a:ext cx="10332720" cy="2743200"/>
-          </a:xfrm>
-          <a:prstGeom prst="rect">
-            <a:avLst/>
-          </a:prstGeom>
-          <a:noFill/>
-        </p:spPr>
-        <p:txBody>
-          <a:bodyPr wrap="square">
-            <a:spAutoFit/>
-          </a:bodyPr>
-          <a:lstStyle/>
-          <a:p>
-            <a:pPr>
-              <a:defRPr sz="1200" b="1">
-                <a:solidFill>
-                  <a:srgbClr val="FF4B4B"/>
-                </a:solidFill>
-              </a:defRPr>
-            </a:pPr>
-            <a:r>
-              <a:t>Workload                       | Snapdragon Hexagon NPU   | x86 CPU Rival    | Speedup    | Power Saved </a:t>
-            </a:r>
-          </a:p>
-          <a:p>
-            <a:pPr>
-              <a:defRPr sz="1100">
-                <a:solidFill>
-                  <a:srgbClr val="94A3B8"/>
-                </a:solidFill>
-              </a:defRPr>
-            </a:pPr>
-            <a:r>
-              <a:t>Whisper-Base Speech ASR        | 11.8 ms (2.8W)           | 84.5 ms (28.0W)  | 7.2x       | 90%         </a:t>
-            </a:r>
-          </a:p>
-          <a:p>
-            <a:pPr>
-              <a:defRPr sz="1100">
-                <a:solidFill>
-                  <a:srgbClr val="94A3B8"/>
-                </a:solidFill>
-              </a:defRPr>
-            </a:pPr>
-            <a:r>
-              <a:t>Llama-3.2-3B Reasoning         | 28.5 ms (3.9W)           | 195.0 ms (35.0W) | 6.8x       | 89%         </a:t>
-            </a:r>
-          </a:p>
-          <a:p>
-            <a:pPr>
-              <a:defRPr sz="1100">
-                <a:solidFill>
-                  <a:srgbClr val="94A3B8"/>
-                </a:solidFill>
-              </a:defRPr>
-            </a:pPr>
-            <a:r>
-              <a:t>Dense Text Embeddings (RAG)    | 6.2 ms (2.3W)            | 46.0 ms (24.0W)  | 7.4x       | 90%         </a:t>
-            </a:r>
-          </a:p>
-          <a:p>
-            <a:pPr>
-              <a:defRPr sz="1100">
-                <a:solidFill>
-                  <a:srgbClr val="94A3B8"/>
-                </a:solidFill>
-              </a:defRPr>
-            </a:pPr>
-            <a:r>
-              <a:t>YOLOv11-Nano Vision Guard      | 4.2 ms (2.1W)            | 42.0 ms (22.0W)  | 10.0x      | 90%         </a:t>
-            </a:r>
-          </a:p>
-        </p:txBody>
-      </p:sp>
+        </p:nvGraphicFramePr>
+        <p:xfrm>
+          <a:off x="548640" y="2926080"/>
+          <a:ext cx="11094415" cy="2743200"/>
+        </p:xfrm>
+        <a:graphic>
+          <a:graphicData uri="http://schemas.openxmlformats.org/drawingml/2006/table">
+            <a:tbl>
+              <a:tblPr firstRow="1" bandRow="1">
+                <a:tableStyleId>{5C22544A-7EE6-4342-B048-85BDC9FD1C3A}</a:tableStyleId>
+              </a:tblPr>
+              <a:tblGrid>
+                <a:gridCol w="2218883"/>
+                <a:gridCol w="2218883"/>
+                <a:gridCol w="2218883"/>
+                <a:gridCol w="2218883"/>
+                <a:gridCol w="2218883"/>
+              </a:tblGrid>
+              <a:tr h="548640">
+                <a:tc>
+                  <a:txBody>
+                    <a:bodyPr/>
+                    <a:lstStyle/>
+                    <a:p>
+                      <a:pPr>
+                        <a:defRPr b="1" sz="1600">
+                          <a:solidFill>
+                            <a:srgbClr val="00D4FF"/>
+                          </a:solidFill>
+                        </a:defRPr>
+                      </a:pPr>
+                      <a:r>
+                        <a:t>Workload</a:t>
+                      </a:r>
+                    </a:p>
+                  </a:txBody>
+                  <a:tcPr>
+                    <a:solidFill>
+                      <a:srgbClr val="1A2744"/>
+                    </a:solidFill>
+                  </a:tcPr>
+                </a:tc>
+                <a:tc>
+                  <a:txBody>
+                    <a:bodyPr/>
+                    <a:lstStyle/>
+                    <a:p>
+                      <a:pPr>
+                        <a:defRPr b="1" sz="1600">
+                          <a:solidFill>
+                            <a:srgbClr val="00D4FF"/>
+                          </a:solidFill>
+                        </a:defRPr>
+                      </a:pPr>
+                      <a:r>
+                        <a:t>Snapdragon NPU</a:t>
+                      </a:r>
+                    </a:p>
+                  </a:txBody>
+                  <a:tcPr>
+                    <a:solidFill>
+                      <a:srgbClr val="1A2744"/>
+                    </a:solidFill>
+                  </a:tcPr>
+                </a:tc>
+                <a:tc>
+                  <a:txBody>
+                    <a:bodyPr/>
+                    <a:lstStyle/>
+                    <a:p>
+                      <a:pPr>
+                        <a:defRPr b="1" sz="1600">
+                          <a:solidFill>
+                            <a:srgbClr val="00D4FF"/>
+                          </a:solidFill>
+                        </a:defRPr>
+                      </a:pPr>
+                      <a:r>
+                        <a:t>x86 CPU</a:t>
+                      </a:r>
+                    </a:p>
+                  </a:txBody>
+                  <a:tcPr>
+                    <a:solidFill>
+                      <a:srgbClr val="1A2744"/>
+                    </a:solidFill>
+                  </a:tcPr>
+                </a:tc>
+                <a:tc>
+                  <a:txBody>
+                    <a:bodyPr/>
+                    <a:lstStyle/>
+                    <a:p>
+                      <a:pPr>
+                        <a:defRPr b="1" sz="1600">
+                          <a:solidFill>
+                            <a:srgbClr val="00D4FF"/>
+                          </a:solidFill>
+                        </a:defRPr>
+                      </a:pPr>
+                      <a:r>
+                        <a:t>Speedup</a:t>
+                      </a:r>
+                    </a:p>
+                  </a:txBody>
+                  <a:tcPr>
+                    <a:solidFill>
+                      <a:srgbClr val="1A2744"/>
+                    </a:solidFill>
+                  </a:tcPr>
+                </a:tc>
+                <a:tc>
+                  <a:txBody>
+                    <a:bodyPr/>
+                    <a:lstStyle/>
+                    <a:p>
+                      <a:pPr>
+                        <a:defRPr b="1" sz="1600">
+                          <a:solidFill>
+                            <a:srgbClr val="00D4FF"/>
+                          </a:solidFill>
+                        </a:defRPr>
+                      </a:pPr>
+                      <a:r>
+                        <a:t>Power Saved</a:t>
+                      </a:r>
+                    </a:p>
+                  </a:txBody>
+                  <a:tcPr>
+                    <a:solidFill>
+                      <a:srgbClr val="1A2744"/>
+                    </a:solidFill>
+                  </a:tcPr>
+                </a:tc>
+              </a:tr>
+              <a:tr h="548640">
+                <a:tc>
+                  <a:txBody>
+                    <a:bodyPr/>
+                    <a:lstStyle/>
+                    <a:p>
+                      <a:pPr>
+                        <a:defRPr sz="1400">
+                          <a:solidFill>
+                            <a:srgbClr val="FFFFFF"/>
+                          </a:solidFill>
+                        </a:defRPr>
+                      </a:pPr>
+                      <a:r>
+                        <a:t>Whisper-Base ASR</a:t>
+                      </a:r>
+                    </a:p>
+                  </a:txBody>
+                  <a:tcPr>
+                    <a:solidFill>
+                      <a:srgbClr val="080C18"/>
+                    </a:solidFill>
+                  </a:tcPr>
+                </a:tc>
+                <a:tc>
+                  <a:txBody>
+                    <a:bodyPr/>
+                    <a:lstStyle/>
+                    <a:p>
+                      <a:pPr>
+                        <a:defRPr sz="1400">
+                          <a:solidFill>
+                            <a:srgbClr val="FFFFFF"/>
+                          </a:solidFill>
+                        </a:defRPr>
+                      </a:pPr>
+                      <a:r>
+                        <a:t>11.8ms (2.8W)</a:t>
+                      </a:r>
+                    </a:p>
+                  </a:txBody>
+                  <a:tcPr>
+                    <a:solidFill>
+                      <a:srgbClr val="080C18"/>
+                    </a:solidFill>
+                  </a:tcPr>
+                </a:tc>
+                <a:tc>
+                  <a:txBody>
+                    <a:bodyPr/>
+                    <a:lstStyle/>
+                    <a:p>
+                      <a:pPr>
+                        <a:defRPr sz="1400">
+                          <a:solidFill>
+                            <a:srgbClr val="FFFFFF"/>
+                          </a:solidFill>
+                        </a:defRPr>
+                      </a:pPr>
+                      <a:r>
+                        <a:t>84.5ms (28.0W)</a:t>
+                      </a:r>
+                    </a:p>
+                  </a:txBody>
+                  <a:tcPr>
+                    <a:solidFill>
+                      <a:srgbClr val="080C18"/>
+                    </a:solidFill>
+                  </a:tcPr>
+                </a:tc>
+                <a:tc>
+                  <a:txBody>
+                    <a:bodyPr/>
+                    <a:lstStyle/>
+                    <a:p>
+                      <a:pPr>
+                        <a:defRPr sz="1400">
+                          <a:solidFill>
+                            <a:srgbClr val="FFFFFF"/>
+                          </a:solidFill>
+                        </a:defRPr>
+                      </a:pPr>
+                      <a:r>
+                        <a:t>7.2x</a:t>
+                      </a:r>
+                    </a:p>
+                  </a:txBody>
+                  <a:tcPr>
+                    <a:solidFill>
+                      <a:srgbClr val="080C18"/>
+                    </a:solidFill>
+                  </a:tcPr>
+                </a:tc>
+                <a:tc>
+                  <a:txBody>
+                    <a:bodyPr/>
+                    <a:lstStyle/>
+                    <a:p>
+                      <a:pPr>
+                        <a:defRPr sz="1400">
+                          <a:solidFill>
+                            <a:srgbClr val="FFFFFF"/>
+                          </a:solidFill>
+                        </a:defRPr>
+                      </a:pPr>
+                      <a:r>
+                        <a:t>90%</a:t>
+                      </a:r>
+                    </a:p>
+                  </a:txBody>
+                  <a:tcPr>
+                    <a:solidFill>
+                      <a:srgbClr val="080C18"/>
+                    </a:solidFill>
+                  </a:tcPr>
+                </a:tc>
+              </a:tr>
+              <a:tr h="548640">
+                <a:tc>
+                  <a:txBody>
+                    <a:bodyPr/>
+                    <a:lstStyle/>
+                    <a:p>
+                      <a:pPr>
+                        <a:defRPr sz="1400">
+                          <a:solidFill>
+                            <a:srgbClr val="FFFFFF"/>
+                          </a:solidFill>
+                        </a:defRPr>
+                      </a:pPr>
+                      <a:r>
+                        <a:t>Llama-3.2-3B</a:t>
+                      </a:r>
+                    </a:p>
+                  </a:txBody>
+                  <a:tcPr>
+                    <a:solidFill>
+                      <a:srgbClr val="080C18"/>
+                    </a:solidFill>
+                  </a:tcPr>
+                </a:tc>
+                <a:tc>
+                  <a:txBody>
+                    <a:bodyPr/>
+                    <a:lstStyle/>
+                    <a:p>
+                      <a:pPr>
+                        <a:defRPr sz="1400">
+                          <a:solidFill>
+                            <a:srgbClr val="FFFFFF"/>
+                          </a:solidFill>
+                        </a:defRPr>
+                      </a:pPr>
+                      <a:r>
+                        <a:t>28.5ms (3.9W)</a:t>
+                      </a:r>
+                    </a:p>
+                  </a:txBody>
+                  <a:tcPr>
+                    <a:solidFill>
+                      <a:srgbClr val="080C18"/>
+                    </a:solidFill>
+                  </a:tcPr>
+                </a:tc>
+                <a:tc>
+                  <a:txBody>
+                    <a:bodyPr/>
+                    <a:lstStyle/>
+                    <a:p>
+                      <a:pPr>
+                        <a:defRPr sz="1400">
+                          <a:solidFill>
+                            <a:srgbClr val="FFFFFF"/>
+                          </a:solidFill>
+                        </a:defRPr>
+                      </a:pPr>
+                      <a:r>
+                        <a:t>195.0ms (35.0W)</a:t>
+                      </a:r>
+                    </a:p>
+                  </a:txBody>
+                  <a:tcPr>
+                    <a:solidFill>
+                      <a:srgbClr val="080C18"/>
+                    </a:solidFill>
+                  </a:tcPr>
+                </a:tc>
+                <a:tc>
+                  <a:txBody>
+                    <a:bodyPr/>
+                    <a:lstStyle/>
+                    <a:p>
+                      <a:pPr>
+                        <a:defRPr sz="1400">
+                          <a:solidFill>
+                            <a:srgbClr val="FFFFFF"/>
+                          </a:solidFill>
+                        </a:defRPr>
+                      </a:pPr>
+                      <a:r>
+                        <a:t>6.8x</a:t>
+                      </a:r>
+                    </a:p>
+                  </a:txBody>
+                  <a:tcPr>
+                    <a:solidFill>
+                      <a:srgbClr val="080C18"/>
+                    </a:solidFill>
+                  </a:tcPr>
+                </a:tc>
+                <a:tc>
+                  <a:txBody>
+                    <a:bodyPr/>
+                    <a:lstStyle/>
+                    <a:p>
+                      <a:pPr>
+                        <a:defRPr sz="1400">
+                          <a:solidFill>
+                            <a:srgbClr val="FFFFFF"/>
+                          </a:solidFill>
+                        </a:defRPr>
+                      </a:pPr>
+                      <a:r>
+                        <a:t>89%</a:t>
+                      </a:r>
+                    </a:p>
+                  </a:txBody>
+                  <a:tcPr>
+                    <a:solidFill>
+                      <a:srgbClr val="080C18"/>
+                    </a:solidFill>
+                  </a:tcPr>
+                </a:tc>
+              </a:tr>
+              <a:tr h="548640">
+                <a:tc>
+                  <a:txBody>
+                    <a:bodyPr/>
+                    <a:lstStyle/>
+                    <a:p>
+                      <a:pPr>
+                        <a:defRPr sz="1400">
+                          <a:solidFill>
+                            <a:srgbClr val="FFFFFF"/>
+                          </a:solidFill>
+                        </a:defRPr>
+                      </a:pPr>
+                      <a:r>
+                        <a:t>Embeddings (RAG)</a:t>
+                      </a:r>
+                    </a:p>
+                  </a:txBody>
+                  <a:tcPr>
+                    <a:solidFill>
+                      <a:srgbClr val="080C18"/>
+                    </a:solidFill>
+                  </a:tcPr>
+                </a:tc>
+                <a:tc>
+                  <a:txBody>
+                    <a:bodyPr/>
+                    <a:lstStyle/>
+                    <a:p>
+                      <a:pPr>
+                        <a:defRPr sz="1400">
+                          <a:solidFill>
+                            <a:srgbClr val="FFFFFF"/>
+                          </a:solidFill>
+                        </a:defRPr>
+                      </a:pPr>
+                      <a:r>
+                        <a:t>6.2ms (2.3W)</a:t>
+                      </a:r>
+                    </a:p>
+                  </a:txBody>
+                  <a:tcPr>
+                    <a:solidFill>
+                      <a:srgbClr val="080C18"/>
+                    </a:solidFill>
+                  </a:tcPr>
+                </a:tc>
+                <a:tc>
+                  <a:txBody>
+                    <a:bodyPr/>
+                    <a:lstStyle/>
+                    <a:p>
+                      <a:pPr>
+                        <a:defRPr sz="1400">
+                          <a:solidFill>
+                            <a:srgbClr val="FFFFFF"/>
+                          </a:solidFill>
+                        </a:defRPr>
+                      </a:pPr>
+                      <a:r>
+                        <a:t>46.0ms (24.0W)</a:t>
+                      </a:r>
+                    </a:p>
+                  </a:txBody>
+                  <a:tcPr>
+                    <a:solidFill>
+                      <a:srgbClr val="080C18"/>
+                    </a:solidFill>
+                  </a:tcPr>
+                </a:tc>
+                <a:tc>
+                  <a:txBody>
+                    <a:bodyPr/>
+                    <a:lstStyle/>
+                    <a:p>
+                      <a:pPr>
+                        <a:defRPr sz="1400">
+                          <a:solidFill>
+                            <a:srgbClr val="FFFFFF"/>
+                          </a:solidFill>
+                        </a:defRPr>
+                      </a:pPr>
+                      <a:r>
+                        <a:t>7.4x</a:t>
+                      </a:r>
+                    </a:p>
+                  </a:txBody>
+                  <a:tcPr>
+                    <a:solidFill>
+                      <a:srgbClr val="080C18"/>
+                    </a:solidFill>
+                  </a:tcPr>
+                </a:tc>
+                <a:tc>
+                  <a:txBody>
+                    <a:bodyPr/>
+                    <a:lstStyle/>
+                    <a:p>
+                      <a:pPr>
+                        <a:defRPr sz="1400">
+                          <a:solidFill>
+                            <a:srgbClr val="FFFFFF"/>
+                          </a:solidFill>
+                        </a:defRPr>
+                      </a:pPr>
+                      <a:r>
+                        <a:t>90%</a:t>
+                      </a:r>
+                    </a:p>
+                  </a:txBody>
+                  <a:tcPr>
+                    <a:solidFill>
+                      <a:srgbClr val="080C18"/>
+                    </a:solidFill>
+                  </a:tcPr>
+                </a:tc>
+              </a:tr>
+              <a:tr h="548640">
+                <a:tc>
+                  <a:txBody>
+                    <a:bodyPr/>
+                    <a:lstStyle/>
+                    <a:p>
+                      <a:pPr>
+                        <a:defRPr sz="1400">
+                          <a:solidFill>
+                            <a:srgbClr val="FFFFFF"/>
+                          </a:solidFill>
+                        </a:defRPr>
+                      </a:pPr>
+                      <a:r>
+                        <a:t>YOLOv11-Nano</a:t>
+                      </a:r>
+                    </a:p>
+                  </a:txBody>
+                  <a:tcPr>
+                    <a:solidFill>
+                      <a:srgbClr val="080C18"/>
+                    </a:solidFill>
+                  </a:tcPr>
+                </a:tc>
+                <a:tc>
+                  <a:txBody>
+                    <a:bodyPr/>
+                    <a:lstStyle/>
+                    <a:p>
+                      <a:pPr>
+                        <a:defRPr sz="1400">
+                          <a:solidFill>
+                            <a:srgbClr val="FFFFFF"/>
+                          </a:solidFill>
+                        </a:defRPr>
+                      </a:pPr>
+                      <a:r>
+                        <a:t>4.2ms (2.1W)</a:t>
+                      </a:r>
+                    </a:p>
+                  </a:txBody>
+                  <a:tcPr>
+                    <a:solidFill>
+                      <a:srgbClr val="080C18"/>
+                    </a:solidFill>
+                  </a:tcPr>
+                </a:tc>
+                <a:tc>
+                  <a:txBody>
+                    <a:bodyPr/>
+                    <a:lstStyle/>
+                    <a:p>
+                      <a:pPr>
+                        <a:defRPr sz="1400">
+                          <a:solidFill>
+                            <a:srgbClr val="FFFFFF"/>
+                          </a:solidFill>
+                        </a:defRPr>
+                      </a:pPr>
+                      <a:r>
+                        <a:t>42.0ms (22.0W)</a:t>
+                      </a:r>
+                    </a:p>
+                  </a:txBody>
+                  <a:tcPr>
+                    <a:solidFill>
+                      <a:srgbClr val="080C18"/>
+                    </a:solidFill>
+                  </a:tcPr>
+                </a:tc>
+                <a:tc>
+                  <a:txBody>
+                    <a:bodyPr/>
+                    <a:lstStyle/>
+                    <a:p>
+                      <a:pPr>
+                        <a:defRPr sz="1400">
+                          <a:solidFill>
+                            <a:srgbClr val="FFFFFF"/>
+                          </a:solidFill>
+                        </a:defRPr>
+                      </a:pPr>
+                      <a:r>
+                        <a:t>10.0x</a:t>
+                      </a:r>
+                    </a:p>
+                  </a:txBody>
+                  <a:tcPr>
+                    <a:solidFill>
+                      <a:srgbClr val="080C18"/>
+                    </a:solidFill>
+                  </a:tcPr>
+                </a:tc>
+                <a:tc>
+                  <a:txBody>
+                    <a:bodyPr/>
+                    <a:lstStyle/>
+                    <a:p>
+                      <a:pPr>
+                        <a:defRPr sz="1400">
+                          <a:solidFill>
+                            <a:srgbClr val="FFFFFF"/>
+                          </a:solidFill>
+                        </a:defRPr>
+                      </a:pPr>
+                      <a:r>
+                        <a:t>90%</a:t>
+                      </a:r>
+                    </a:p>
+                  </a:txBody>
+                  <a:tcPr>
+                    <a:solidFill>
+                      <a:srgbClr val="080C18"/>
+                    </a:solidFill>
+                  </a:tcPr>
+                </a:tc>
+              </a:tr>
+            </a:tbl>
+          </a:graphicData>
+        </a:graphic>
+      </p:graphicFrame>
     </p:spTree>
   </p:cSld>
   <p:clrMapOvr>
@@ -7323,10 +7191,12 @@
             <a:avLst/>
           </a:prstGeom>
           <a:solidFill>
-            <a:srgbClr val="0B0F19"/>
+            <a:srgbClr val="080C18"/>
           </a:solidFill>
           <a:ln>
-            <a:noFill/>
+            <a:solidFill>
+              <a:srgbClr val="080C18"/>
+            </a:solidFill>
           </a:ln>
         </p:spPr>
         <p:style>
@@ -7359,8 +7229,8 @@
         </p:nvSpPr>
         <p:spPr>
           <a:xfrm>
-            <a:off x="731520" y="365760"/>
-            <a:ext cx="10058400" cy="320040"/>
+            <a:off x="457200" y="6400800"/>
+            <a:ext cx="11277295" cy="365760"/>
           </a:xfrm>
           <a:prstGeom prst="rect">
             <a:avLst/>
@@ -7368,20 +7238,20 @@
           <a:noFill/>
         </p:spPr>
         <p:txBody>
-          <a:bodyPr wrap="square">
+          <a:bodyPr wrap="none">
             <a:spAutoFit/>
           </a:bodyPr>
           <a:lstStyle/>
           <a:p>
-            <a:pPr>
-              <a:defRPr sz="1000" b="1">
-                <a:solidFill>
-                  <a:srgbClr val="FF4B4B"/>
-                </a:solidFill>
-              </a:defRPr>
-            </a:pPr>
-            <a:r>
-              <a:t>SNAPDRAGON® AI LAB BUILD &amp; PRESENT CHALLENGE</a:t>
+            <a:pPr algn="ctr">
+              <a:defRPr sz="1000">
+                <a:solidFill>
+                  <a:srgbClr val="8892B0"/>
+                </a:solidFill>
+              </a:defRPr>
+            </a:pPr>
+            <a:r>
+              <a:t>Qualcomm Snapdragon® AI Lab Build &amp; Present Challenge • Solution Submission • September 2026</a:t>
             </a:r>
           </a:p>
         </p:txBody>
@@ -7394,8 +7264,8 @@
         </p:nvSpPr>
         <p:spPr>
           <a:xfrm>
-            <a:off x="731520" y="640080"/>
-            <a:ext cx="10515600" cy="548640"/>
+            <a:off x="548640" y="365760"/>
+            <a:ext cx="11094415" cy="914400"/>
           </a:xfrm>
           <a:prstGeom prst="rect">
             <a:avLst/>
@@ -7403,20 +7273,20 @@
           <a:noFill/>
         </p:spPr>
         <p:txBody>
-          <a:bodyPr wrap="square">
+          <a:bodyPr wrap="none">
             <a:spAutoFit/>
           </a:bodyPr>
           <a:lstStyle/>
           <a:p>
             <a:pPr>
-              <a:defRPr sz="2200" b="1">
-                <a:solidFill>
-                  <a:srgbClr val="F8FAFC"/>
-                </a:solidFill>
-              </a:defRPr>
-            </a:pPr>
-            <a:r>
-              <a:t>Deployment &amp; Accessibility: Ready for HP OmniBook</a:t>
+              <a:defRPr b="1" sz="3600">
+                <a:solidFill>
+                  <a:srgbClr val="00D4FF"/>
+                </a:solidFill>
+              </a:defRPr>
+            </a:pPr>
+            <a:r>
+              <a:t>Deployment &amp; Accessibility</a:t>
             </a:r>
           </a:p>
         </p:txBody>
@@ -7429,18 +7299,18 @@
         </p:nvSpPr>
         <p:spPr>
           <a:xfrm>
-            <a:off x="731520" y="1371600"/>
-            <a:ext cx="10728655" cy="1097280"/>
+            <a:off x="548640" y="1828800"/>
+            <a:ext cx="2560320" cy="3657600"/>
           </a:xfrm>
           <a:prstGeom prst="roundRect">
             <a:avLst/>
           </a:prstGeom>
           <a:solidFill>
-            <a:srgbClr val="161E2E"/>
+            <a:srgbClr val="1A2744"/>
           </a:solidFill>
-          <a:ln w="12700">
+          <a:ln w="19050">
             <a:solidFill>
-              <a:srgbClr val="28354C"/>
+              <a:srgbClr val="00D4FF"/>
             </a:solidFill>
           </a:ln>
         </p:spPr>
@@ -7459,80 +7329,60 @@
           </a:fontRef>
         </p:style>
         <p:txBody>
-          <a:bodyPr rtlCol="0" anchor="ctr"/>
-          <a:lstStyle/>
-          <a:p>
-            <a:pPr algn="ctr"/>
-          </a:p>
-        </p:txBody>
-      </p:sp>
-      <p:sp>
-        <p:nvSpPr>
-          <p:cNvPr id="6" name="TextBox 5"/>
-          <p:cNvSpPr txBox="1"/>
-          <p:nvPr/>
-        </p:nvSpPr>
-        <p:spPr>
-          <a:xfrm>
-            <a:off x="1005840" y="1508760"/>
-            <a:ext cx="10149840" cy="822960"/>
-          </a:xfrm>
-          <a:prstGeom prst="rect">
-            <a:avLst/>
-          </a:prstGeom>
-          <a:noFill/>
-        </p:spPr>
-        <p:txBody>
-          <a:bodyPr wrap="square">
-            <a:spAutoFit/>
-          </a:bodyPr>
-          <a:lstStyle/>
+          <a:bodyPr rtlCol="0" anchor="ctr" wrap="square"/>
+          <a:lstStyle/>
+          <a:p>
+            <a:pPr algn="l">
+              <a:spcAft>
+                <a:spcPts val="1000"/>
+              </a:spcAft>
+              <a:defRPr b="1" sz="2000">
+                <a:solidFill>
+                  <a:srgbClr val="FFFFFF"/>
+                </a:solidFill>
+              </a:defRPr>
+            </a:pPr>
+            <a:r>
+              <a:t>1. Plug &amp; Play QNN Runtime</a:t>
+            </a:r>
+          </a:p>
           <a:p>
             <a:pPr>
-              <a:defRPr sz="1500" b="1">
-                <a:solidFill>
-                  <a:srgbClr val="06B6D4"/>
-                </a:solidFill>
-              </a:defRPr>
-            </a:pPr>
-            <a:r>
-              <a:t>1. Plug &amp; Play QNN Runtime</a:t>
-            </a:r>
-          </a:p>
-          <a:p>
-            <a:pPr>
-              <a:defRPr sz="1100">
-                <a:solidFill>
-                  <a:srgbClr val="94A3B8"/>
-                </a:solidFill>
-              </a:defRPr>
-            </a:pPr>
-            <a:r>
-              <a:t>Auto-detects Snapdragon X Elite/Plus hardware. Automatically initializes QNN Execution Provider (QnnHtp.dll) with fallback to DirectML and CPU for cross-platform validation.</a:t>
-            </a:r>
-          </a:p>
-        </p:txBody>
-      </p:sp>
-      <p:sp>
-        <p:nvSpPr>
-          <p:cNvPr id="7" name="Rounded Rectangle 6"/>
+              <a:spcAft>
+                <a:spcPts val="500"/>
+              </a:spcAft>
+              <a:defRPr sz="1400">
+                <a:solidFill>
+                  <a:srgbClr val="8892B0"/>
+                </a:solidFill>
+              </a:defRPr>
+            </a:pPr>
+            <a:r>
+              <a:t>Auto-detects Snapdragon hardware</a:t>
+            </a:r>
+          </a:p>
+        </p:txBody>
+      </p:sp>
+      <p:sp>
+        <p:nvSpPr>
+          <p:cNvPr id="6" name="Rounded Rectangle 5"/>
           <p:cNvSpPr/>
           <p:nvPr/>
         </p:nvSpPr>
         <p:spPr>
           <a:xfrm>
-            <a:off x="731520" y="2606040"/>
-            <a:ext cx="10728655" cy="1097280"/>
+            <a:off x="3383280" y="1828800"/>
+            <a:ext cx="2560320" cy="3657600"/>
           </a:xfrm>
           <a:prstGeom prst="roundRect">
             <a:avLst/>
           </a:prstGeom>
           <a:solidFill>
-            <a:srgbClr val="161E2E"/>
+            <a:srgbClr val="1A2744"/>
           </a:solidFill>
-          <a:ln w="12700">
+          <a:ln w="19050">
             <a:solidFill>
-              <a:srgbClr val="28354C"/>
+              <a:srgbClr val="00D4FF"/>
             </a:solidFill>
           </a:ln>
         </p:spPr>
@@ -7551,80 +7401,60 @@
           </a:fontRef>
         </p:style>
         <p:txBody>
-          <a:bodyPr rtlCol="0" anchor="ctr"/>
-          <a:lstStyle/>
-          <a:p>
-            <a:pPr algn="ctr"/>
-          </a:p>
-        </p:txBody>
-      </p:sp>
-      <p:sp>
-        <p:nvSpPr>
-          <p:cNvPr id="8" name="TextBox 7"/>
-          <p:cNvSpPr txBox="1"/>
-          <p:nvPr/>
-        </p:nvSpPr>
-        <p:spPr>
-          <a:xfrm>
-            <a:off x="1005840" y="2743200"/>
-            <a:ext cx="10149840" cy="822960"/>
-          </a:xfrm>
-          <a:prstGeom prst="rect">
-            <a:avLst/>
-          </a:prstGeom>
-          <a:noFill/>
-        </p:spPr>
-        <p:txBody>
-          <a:bodyPr wrap="square">
-            <a:spAutoFit/>
-          </a:bodyPr>
-          <a:lstStyle/>
+          <a:bodyPr rtlCol="0" anchor="ctr" wrap="square"/>
+          <a:lstStyle/>
+          <a:p>
+            <a:pPr algn="l">
+              <a:spcAft>
+                <a:spcPts val="1000"/>
+              </a:spcAft>
+              <a:defRPr b="1" sz="2000">
+                <a:solidFill>
+                  <a:srgbClr val="FFFFFF"/>
+                </a:solidFill>
+              </a:defRPr>
+            </a:pPr>
+            <a:r>
+              <a:t>2. Modern Web &amp; Desktop UI</a:t>
+            </a:r>
+          </a:p>
           <a:p>
             <a:pPr>
-              <a:defRPr sz="1500" b="1">
-                <a:solidFill>
-                  <a:srgbClr val="06B6D4"/>
-                </a:solidFill>
-              </a:defRPr>
-            </a:pPr>
-            <a:r>
-              <a:t>2. Modern Web &amp; Desktop Interface</a:t>
-            </a:r>
-          </a:p>
-          <a:p>
-            <a:pPr>
-              <a:defRPr sz="1100">
-                <a:solidFill>
-                  <a:srgbClr val="94A3B8"/>
-                </a:solidFill>
-              </a:defRPr>
-            </a:pPr>
-            <a:r>
-              <a:t>FastAPI backend coupled with a glassmorphism dashboard. Includes real-time audio visualizer, chat copilot, local RAG knowledge base, and live NPU telemetry meters.</a:t>
-            </a:r>
-          </a:p>
-        </p:txBody>
-      </p:sp>
-      <p:sp>
-        <p:nvSpPr>
-          <p:cNvPr id="9" name="Rounded Rectangle 8"/>
+              <a:spcAft>
+                <a:spcPts val="500"/>
+              </a:spcAft>
+              <a:defRPr sz="1400">
+                <a:solidFill>
+                  <a:srgbClr val="8892B0"/>
+                </a:solidFill>
+              </a:defRPr>
+            </a:pPr>
+            <a:r>
+              <a:t>FastAPI + glassmorphism dashboard</a:t>
+            </a:r>
+          </a:p>
+        </p:txBody>
+      </p:sp>
+      <p:sp>
+        <p:nvSpPr>
+          <p:cNvPr id="7" name="Rounded Rectangle 6"/>
           <p:cNvSpPr/>
           <p:nvPr/>
         </p:nvSpPr>
         <p:spPr>
           <a:xfrm>
-            <a:off x="731520" y="3840480"/>
-            <a:ext cx="10728655" cy="1097280"/>
+            <a:off x="6217920" y="1828800"/>
+            <a:ext cx="2560320" cy="3657600"/>
           </a:xfrm>
           <a:prstGeom prst="roundRect">
             <a:avLst/>
           </a:prstGeom>
           <a:solidFill>
-            <a:srgbClr val="161E2E"/>
+            <a:srgbClr val="1A2744"/>
           </a:solidFill>
-          <a:ln w="12700">
+          <a:ln w="19050">
             <a:solidFill>
-              <a:srgbClr val="28354C"/>
+              <a:srgbClr val="00D4FF"/>
             </a:solidFill>
           </a:ln>
         </p:spPr>
@@ -7643,80 +7473,60 @@
           </a:fontRef>
         </p:style>
         <p:txBody>
-          <a:bodyPr rtlCol="0" anchor="ctr"/>
-          <a:lstStyle/>
-          <a:p>
-            <a:pPr algn="ctr"/>
-          </a:p>
-        </p:txBody>
-      </p:sp>
-      <p:sp>
-        <p:nvSpPr>
-          <p:cNvPr id="10" name="TextBox 9"/>
-          <p:cNvSpPr txBox="1"/>
-          <p:nvPr/>
-        </p:nvSpPr>
-        <p:spPr>
-          <a:xfrm>
-            <a:off x="1005840" y="3977640"/>
-            <a:ext cx="10149840" cy="822960"/>
-          </a:xfrm>
-          <a:prstGeom prst="rect">
-            <a:avLst/>
-          </a:prstGeom>
-          <a:noFill/>
-        </p:spPr>
-        <p:txBody>
-          <a:bodyPr wrap="square">
-            <a:spAutoFit/>
-          </a:bodyPr>
-          <a:lstStyle/>
+          <a:bodyPr rtlCol="0" anchor="ctr" wrap="square"/>
+          <a:lstStyle/>
+          <a:p>
+            <a:pPr algn="l">
+              <a:spcAft>
+                <a:spcPts val="1000"/>
+              </a:spcAft>
+              <a:defRPr b="1" sz="2000">
+                <a:solidFill>
+                  <a:srgbClr val="FFFFFF"/>
+                </a:solidFill>
+              </a:defRPr>
+            </a:pPr>
+            <a:r>
+              <a:t>3. Automated Verification Suite</a:t>
+            </a:r>
+          </a:p>
           <a:p>
             <a:pPr>
-              <a:defRPr sz="1500" b="1">
-                <a:solidFill>
-                  <a:srgbClr val="06B6D4"/>
-                </a:solidFill>
-              </a:defRPr>
-            </a:pPr>
-            <a:r>
-              <a:t>3. Automated Verification Suite</a:t>
-            </a:r>
-          </a:p>
-          <a:p>
-            <a:pPr>
-              <a:defRPr sz="1100">
-                <a:solidFill>
-                  <a:srgbClr val="94A3B8"/>
-                </a:solidFill>
-              </a:defRPr>
-            </a:pPr>
-            <a:r>
-              <a:t>Self-validating test runner ('python run_demo.py') exercises all 6 AI modules and asserts latency, throughput, and power efficiency benchmarks.</a:t>
-            </a:r>
-          </a:p>
-        </p:txBody>
-      </p:sp>
-      <p:sp>
-        <p:nvSpPr>
-          <p:cNvPr id="11" name="Rounded Rectangle 10"/>
+              <a:spcAft>
+                <a:spcPts val="500"/>
+              </a:spcAft>
+              <a:defRPr sz="1400">
+                <a:solidFill>
+                  <a:srgbClr val="8892B0"/>
+                </a:solidFill>
+              </a:defRPr>
+            </a:pPr>
+            <a:r>
+              <a:t>run_demo.py validates all modules</a:t>
+            </a:r>
+          </a:p>
+        </p:txBody>
+      </p:sp>
+      <p:sp>
+        <p:nvSpPr>
+          <p:cNvPr id="8" name="Rounded Rectangle 7"/>
           <p:cNvSpPr/>
           <p:nvPr/>
         </p:nvSpPr>
         <p:spPr>
           <a:xfrm>
-            <a:off x="731520" y="5074920"/>
-            <a:ext cx="10728655" cy="1097280"/>
+            <a:off x="9052560" y="1828800"/>
+            <a:ext cx="2560320" cy="3657600"/>
           </a:xfrm>
           <a:prstGeom prst="roundRect">
             <a:avLst/>
           </a:prstGeom>
           <a:solidFill>
-            <a:srgbClr val="161E2E"/>
+            <a:srgbClr val="1A2744"/>
           </a:solidFill>
-          <a:ln w="12700">
+          <a:ln w="19050">
             <a:solidFill>
-              <a:srgbClr val="28354C"/>
+              <a:srgbClr val="00D4FF"/>
             </a:solidFill>
           </a:ln>
         </p:spPr>
@@ -7735,56 +7545,36 @@
           </a:fontRef>
         </p:style>
         <p:txBody>
-          <a:bodyPr rtlCol="0" anchor="ctr"/>
-          <a:lstStyle/>
-          <a:p>
-            <a:pPr algn="ctr"/>
-          </a:p>
-        </p:txBody>
-      </p:sp>
-      <p:sp>
-        <p:nvSpPr>
-          <p:cNvPr id="12" name="TextBox 11"/>
-          <p:cNvSpPr txBox="1"/>
-          <p:nvPr/>
-        </p:nvSpPr>
-        <p:spPr>
-          <a:xfrm>
-            <a:off x="1005840" y="5212080"/>
-            <a:ext cx="10149840" cy="822960"/>
-          </a:xfrm>
-          <a:prstGeom prst="rect">
-            <a:avLst/>
-          </a:prstGeom>
-          <a:noFill/>
-        </p:spPr>
-        <p:txBody>
-          <a:bodyPr wrap="square">
-            <a:spAutoFit/>
-          </a:bodyPr>
-          <a:lstStyle/>
+          <a:bodyPr rtlCol="0" anchor="ctr" wrap="square"/>
+          <a:lstStyle/>
+          <a:p>
+            <a:pPr algn="l">
+              <a:spcAft>
+                <a:spcPts val="1000"/>
+              </a:spcAft>
+              <a:defRPr b="1" sz="2000">
+                <a:solidFill>
+                  <a:srgbClr val="FFFFFF"/>
+                </a:solidFill>
+              </a:defRPr>
+            </a:pPr>
+            <a:r>
+              <a:t>4. Enterprise OEM Pre-load</a:t>
+            </a:r>
+          </a:p>
           <a:p>
             <a:pPr>
-              <a:defRPr sz="1500" b="1">
-                <a:solidFill>
-                  <a:srgbClr val="06B6D4"/>
-                </a:solidFill>
-              </a:defRPr>
-            </a:pPr>
-            <a:r>
-              <a:t>4. Enterprise OEM Pre-load Potential</a:t>
-            </a:r>
-          </a:p>
-          <a:p>
-            <a:pPr>
-              <a:defRPr sz="1100">
-                <a:solidFill>
-                  <a:srgbClr val="94A3B8"/>
-                </a:solidFill>
-              </a:defRPr>
-            </a:pPr>
-            <a:r>
-              <a:t>Packaged for seamless inclusion in HP OmniBook default software image, giving Snapdragon PC buyers immediate out-of-the-box edge AI utility.</a:t>
+              <a:spcAft>
+                <a:spcPts val="500"/>
+              </a:spcAft>
+              <a:defRPr sz="1400">
+                <a:solidFill>
+                  <a:srgbClr val="8892B0"/>
+                </a:solidFill>
+              </a:defRPr>
+            </a:pPr>
+            <a:r>
+              <a:t>Ready for HP OmniBook default image</a:t>
             </a:r>
           </a:p>
         </p:txBody>
@@ -7822,10 +7612,12 @@
             <a:avLst/>
           </a:prstGeom>
           <a:solidFill>
-            <a:srgbClr val="0B0F19"/>
+            <a:srgbClr val="080C18"/>
           </a:solidFill>
           <a:ln>
-            <a:noFill/>
+            <a:solidFill>
+              <a:srgbClr val="080C18"/>
+            </a:solidFill>
           </a:ln>
         </p:spPr>
         <p:style>
@@ -7858,8 +7650,8 @@
         </p:nvSpPr>
         <p:spPr>
           <a:xfrm>
-            <a:off x="731520" y="365760"/>
-            <a:ext cx="10058400" cy="320040"/>
+            <a:off x="457200" y="6400800"/>
+            <a:ext cx="11277295" cy="365760"/>
           </a:xfrm>
           <a:prstGeom prst="rect">
             <a:avLst/>
@@ -7867,20 +7659,20 @@
           <a:noFill/>
         </p:spPr>
         <p:txBody>
-          <a:bodyPr wrap="square">
+          <a:bodyPr wrap="none">
             <a:spAutoFit/>
           </a:bodyPr>
           <a:lstStyle/>
           <a:p>
-            <a:pPr>
-              <a:defRPr sz="1000" b="1">
-                <a:solidFill>
-                  <a:srgbClr val="FF4B4B"/>
-                </a:solidFill>
-              </a:defRPr>
-            </a:pPr>
-            <a:r>
-              <a:t>SNAPDRAGON® AI LAB BUILD &amp; PRESENT CHALLENGE</a:t>
+            <a:pPr algn="ctr">
+              <a:defRPr sz="1000">
+                <a:solidFill>
+                  <a:srgbClr val="8892B0"/>
+                </a:solidFill>
+              </a:defRPr>
+            </a:pPr>
+            <a:r>
+              <a:t>Qualcomm Snapdragon® AI Lab Build &amp; Present Challenge • Solution Submission • September 2026</a:t>
             </a:r>
           </a:p>
         </p:txBody>
@@ -7893,8 +7685,8 @@
         </p:nvSpPr>
         <p:spPr>
           <a:xfrm>
-            <a:off x="731520" y="640080"/>
-            <a:ext cx="10515600" cy="548640"/>
+            <a:off x="548640" y="365760"/>
+            <a:ext cx="11094415" cy="914400"/>
           </a:xfrm>
           <a:prstGeom prst="rect">
             <a:avLst/>
@@ -7902,15 +7694,15 @@
           <a:noFill/>
         </p:spPr>
         <p:txBody>
-          <a:bodyPr wrap="square">
+          <a:bodyPr wrap="none">
             <a:spAutoFit/>
           </a:bodyPr>
           <a:lstStyle/>
           <a:p>
             <a:pPr>
-              <a:defRPr sz="2200" b="1">
-                <a:solidFill>
-                  <a:srgbClr val="F8FAFC"/>
+              <a:defRPr b="1" sz="3600">
+                <a:solidFill>
+                  <a:srgbClr val="00D4FF"/>
                 </a:solidFill>
               </a:defRPr>
             </a:pPr>
@@ -7928,18 +7720,18 @@
         </p:nvSpPr>
         <p:spPr>
           <a:xfrm>
-            <a:off x="731520" y="1371600"/>
-            <a:ext cx="5120640" cy="2194560"/>
+            <a:off x="1463040" y="1828800"/>
+            <a:ext cx="4114800" cy="1828800"/>
           </a:xfrm>
           <a:prstGeom prst="roundRect">
             <a:avLst/>
           </a:prstGeom>
           <a:solidFill>
-            <a:srgbClr val="161E2E"/>
+            <a:srgbClr val="1A2744"/>
           </a:solidFill>
-          <a:ln w="12700">
+          <a:ln w="19050">
             <a:solidFill>
-              <a:srgbClr val="28354C"/>
+              <a:srgbClr val="00D4FF"/>
             </a:solidFill>
           </a:ln>
         </p:spPr>
@@ -7958,81 +7750,60 @@
           </a:fontRef>
         </p:style>
         <p:txBody>
-          <a:bodyPr rtlCol="0" anchor="ctr"/>
-          <a:lstStyle/>
-          <a:p>
-            <a:pPr algn="ctr"/>
-          </a:p>
-        </p:txBody>
-      </p:sp>
-      <p:sp>
-        <p:nvSpPr>
-          <p:cNvPr id="6" name="TextBox 5"/>
-          <p:cNvSpPr txBox="1"/>
-          <p:nvPr/>
-        </p:nvSpPr>
-        <p:spPr>
-          <a:xfrm>
-            <a:off x="1005840" y="1554480"/>
-            <a:ext cx="4572000" cy="1828800"/>
-          </a:xfrm>
-          <a:prstGeom prst="rect">
-            <a:avLst/>
-          </a:prstGeom>
-          <a:noFill/>
-        </p:spPr>
-        <p:txBody>
-          <a:bodyPr wrap="square">
-            <a:spAutoFit/>
-          </a:bodyPr>
-          <a:lstStyle/>
+          <a:bodyPr rtlCol="0" anchor="ctr" wrap="square"/>
+          <a:lstStyle/>
+          <a:p>
+            <a:pPr algn="l">
+              <a:spcAft>
+                <a:spcPts val="1000"/>
+              </a:spcAft>
+              <a:defRPr b="1" sz="2000">
+                <a:solidFill>
+                  <a:srgbClr val="FFFFFF"/>
+                </a:solidFill>
+              </a:defRPr>
+            </a:pPr>
+            <a:r>
+              <a:t>Enterprise &amp; Finance</a:t>
+            </a:r>
+          </a:p>
           <a:p>
             <a:pPr>
-              <a:defRPr sz="1600" b="1">
-                <a:solidFill>
-                  <a:srgbClr val="10B981"/>
-                </a:solidFill>
-              </a:defRPr>
-            </a:pPr>
-            <a:r>
-              <a:t>Enterprise &amp; Finance</a:t>
-            </a:r>
-          </a:p>
-          <a:p>
-            <a:br/>
-            <a:pPr>
-              <a:defRPr sz="1200">
-                <a:solidFill>
-                  <a:srgbClr val="94A3B8"/>
-                </a:solidFill>
-              </a:defRPr>
-            </a:pPr>
-            <a:r>
-              <a:t>Investment banks, consulting firms, and executives who cannot legally stream confidential client data to cloud LLMs due to compliance.</a:t>
-            </a:r>
-          </a:p>
-        </p:txBody>
-      </p:sp>
-      <p:sp>
-        <p:nvSpPr>
-          <p:cNvPr id="7" name="Rounded Rectangle 6"/>
+              <a:spcAft>
+                <a:spcPts val="500"/>
+              </a:spcAft>
+              <a:defRPr sz="1400">
+                <a:solidFill>
+                  <a:srgbClr val="8892B0"/>
+                </a:solidFill>
+              </a:defRPr>
+            </a:pPr>
+            <a:r>
+              <a:t>Compliance-sensitive banks &amp; consultants</a:t>
+            </a:r>
+          </a:p>
+        </p:txBody>
+      </p:sp>
+      <p:sp>
+        <p:nvSpPr>
+          <p:cNvPr id="6" name="Rounded Rectangle 5"/>
           <p:cNvSpPr/>
           <p:nvPr/>
         </p:nvSpPr>
         <p:spPr>
           <a:xfrm>
-            <a:off x="6126480" y="1371600"/>
-            <a:ext cx="5120640" cy="2194560"/>
+            <a:off x="6583680" y="1828800"/>
+            <a:ext cx="4114800" cy="1828800"/>
           </a:xfrm>
           <a:prstGeom prst="roundRect">
             <a:avLst/>
           </a:prstGeom>
           <a:solidFill>
-            <a:srgbClr val="161E2E"/>
+            <a:srgbClr val="1A2744"/>
           </a:solidFill>
-          <a:ln w="12700">
+          <a:ln w="19050">
             <a:solidFill>
-              <a:srgbClr val="28354C"/>
+              <a:srgbClr val="00D4FF"/>
             </a:solidFill>
           </a:ln>
         </p:spPr>
@@ -8051,81 +7822,60 @@
           </a:fontRef>
         </p:style>
         <p:txBody>
-          <a:bodyPr rtlCol="0" anchor="ctr"/>
-          <a:lstStyle/>
-          <a:p>
-            <a:pPr algn="ctr"/>
-          </a:p>
-        </p:txBody>
-      </p:sp>
-      <p:sp>
-        <p:nvSpPr>
-          <p:cNvPr id="8" name="TextBox 7"/>
-          <p:cNvSpPr txBox="1"/>
-          <p:nvPr/>
-        </p:nvSpPr>
-        <p:spPr>
-          <a:xfrm>
-            <a:off x="6400800" y="1554480"/>
-            <a:ext cx="4572000" cy="1828800"/>
-          </a:xfrm>
-          <a:prstGeom prst="rect">
-            <a:avLst/>
-          </a:prstGeom>
-          <a:noFill/>
-        </p:spPr>
-        <p:txBody>
-          <a:bodyPr wrap="square">
-            <a:spAutoFit/>
-          </a:bodyPr>
-          <a:lstStyle/>
+          <a:bodyPr rtlCol="0" anchor="ctr" wrap="square"/>
+          <a:lstStyle/>
+          <a:p>
+            <a:pPr algn="l">
+              <a:spcAft>
+                <a:spcPts val="1000"/>
+              </a:spcAft>
+              <a:defRPr b="1" sz="2000">
+                <a:solidFill>
+                  <a:srgbClr val="FFFFFF"/>
+                </a:solidFill>
+              </a:defRPr>
+            </a:pPr>
+            <a:r>
+              <a:t>Healthcare &amp; Legal</a:t>
+            </a:r>
+          </a:p>
           <a:p>
             <a:pPr>
-              <a:defRPr sz="1600" b="1">
-                <a:solidFill>
-                  <a:srgbClr val="FF4B4B"/>
-                </a:solidFill>
-              </a:defRPr>
-            </a:pPr>
-            <a:r>
-              <a:t>Healthcare &amp; Legal</a:t>
-            </a:r>
-          </a:p>
-          <a:p>
-            <a:br/>
-            <a:pPr>
-              <a:defRPr sz="1200">
-                <a:solidFill>
-                  <a:srgbClr val="94A3B8"/>
-                </a:solidFill>
-              </a:defRPr>
-            </a:pPr>
-            <a:r>
-              <a:t>Doctors and attorneys requiring offline, zero-leakage transcription and case reasoning during patient consultations and courtroom depositions.</a:t>
-            </a:r>
-          </a:p>
-        </p:txBody>
-      </p:sp>
-      <p:sp>
-        <p:nvSpPr>
-          <p:cNvPr id="9" name="Rounded Rectangle 8"/>
+              <a:spcAft>
+                <a:spcPts val="500"/>
+              </a:spcAft>
+              <a:defRPr sz="1400">
+                <a:solidFill>
+                  <a:srgbClr val="8892B0"/>
+                </a:solidFill>
+              </a:defRPr>
+            </a:pPr>
+            <a:r>
+              <a:t>Offline transcription for patients &amp; depositions</a:t>
+            </a:r>
+          </a:p>
+        </p:txBody>
+      </p:sp>
+      <p:sp>
+        <p:nvSpPr>
+          <p:cNvPr id="7" name="Rounded Rectangle 6"/>
           <p:cNvSpPr/>
           <p:nvPr/>
         </p:nvSpPr>
         <p:spPr>
           <a:xfrm>
-            <a:off x="731520" y="3840480"/>
-            <a:ext cx="5120640" cy="2194560"/>
+            <a:off x="1463040" y="4114800"/>
+            <a:ext cx="4114800" cy="1828800"/>
           </a:xfrm>
           <a:prstGeom prst="roundRect">
             <a:avLst/>
           </a:prstGeom>
           <a:solidFill>
-            <a:srgbClr val="161E2E"/>
+            <a:srgbClr val="1A2744"/>
           </a:solidFill>
-          <a:ln w="12700">
+          <a:ln w="19050">
             <a:solidFill>
-              <a:srgbClr val="28354C"/>
+              <a:srgbClr val="00D4FF"/>
             </a:solidFill>
           </a:ln>
         </p:spPr>
@@ -8144,81 +7894,60 @@
           </a:fontRef>
         </p:style>
         <p:txBody>
-          <a:bodyPr rtlCol="0" anchor="ctr"/>
-          <a:lstStyle/>
-          <a:p>
-            <a:pPr algn="ctr"/>
-          </a:p>
-        </p:txBody>
-      </p:sp>
-      <p:sp>
-        <p:nvSpPr>
-          <p:cNvPr id="10" name="TextBox 9"/>
-          <p:cNvSpPr txBox="1"/>
-          <p:nvPr/>
-        </p:nvSpPr>
-        <p:spPr>
-          <a:xfrm>
-            <a:off x="1005840" y="4023360"/>
-            <a:ext cx="4572000" cy="1828800"/>
-          </a:xfrm>
-          <a:prstGeom prst="rect">
-            <a:avLst/>
-          </a:prstGeom>
-          <a:noFill/>
-        </p:spPr>
-        <p:txBody>
-          <a:bodyPr wrap="square">
-            <a:spAutoFit/>
-          </a:bodyPr>
-          <a:lstStyle/>
+          <a:bodyPr rtlCol="0" anchor="ctr" wrap="square"/>
+          <a:lstStyle/>
+          <a:p>
+            <a:pPr algn="l">
+              <a:spcAft>
+                <a:spcPts val="1000"/>
+              </a:spcAft>
+              <a:defRPr b="1" sz="2000">
+                <a:solidFill>
+                  <a:srgbClr val="FFFFFF"/>
+                </a:solidFill>
+              </a:defRPr>
+            </a:pPr>
+            <a:r>
+              <a:t>Defense &amp; Aerospace</a:t>
+            </a:r>
+          </a:p>
           <a:p>
             <a:pPr>
-              <a:defRPr sz="1600" b="1">
-                <a:solidFill>
-                  <a:srgbClr val="06B6D4"/>
-                </a:solidFill>
-              </a:defRPr>
-            </a:pPr>
-            <a:r>
-              <a:t>Defense &amp; Aerospace</a:t>
-            </a:r>
-          </a:p>
-          <a:p>
-            <a:br/>
-            <a:pPr>
-              <a:defRPr sz="1200">
-                <a:solidFill>
-                  <a:srgbClr val="94A3B8"/>
-                </a:solidFill>
-              </a:defRPr>
-            </a:pPr>
-            <a:r>
-              <a:t>Air-gapped military and defense environments operating in zero-connectivity or secure operational theaters.</a:t>
-            </a:r>
-          </a:p>
-        </p:txBody>
-      </p:sp>
-      <p:sp>
-        <p:nvSpPr>
-          <p:cNvPr id="11" name="Rounded Rectangle 10"/>
+              <a:spcAft>
+                <a:spcPts val="500"/>
+              </a:spcAft>
+              <a:defRPr sz="1400">
+                <a:solidFill>
+                  <a:srgbClr val="8892B0"/>
+                </a:solidFill>
+              </a:defRPr>
+            </a:pPr>
+            <a:r>
+              <a:t>Air-gapped military operations</a:t>
+            </a:r>
+          </a:p>
+        </p:txBody>
+      </p:sp>
+      <p:sp>
+        <p:nvSpPr>
+          <p:cNvPr id="8" name="Rounded Rectangle 7"/>
           <p:cNvSpPr/>
           <p:nvPr/>
         </p:nvSpPr>
         <p:spPr>
           <a:xfrm>
-            <a:off x="6126480" y="3840480"/>
-            <a:ext cx="5120640" cy="2194560"/>
+            <a:off x="6583680" y="4114800"/>
+            <a:ext cx="4114800" cy="1828800"/>
           </a:xfrm>
           <a:prstGeom prst="roundRect">
             <a:avLst/>
           </a:prstGeom>
           <a:solidFill>
-            <a:srgbClr val="161E2E"/>
+            <a:srgbClr val="1A2744"/>
           </a:solidFill>
-          <a:ln w="12700">
+          <a:ln w="19050">
             <a:solidFill>
-              <a:srgbClr val="28354C"/>
+              <a:srgbClr val="00D4FF"/>
             </a:solidFill>
           </a:ln>
         </p:spPr>
@@ -8237,57 +7966,36 @@
           </a:fontRef>
         </p:style>
         <p:txBody>
-          <a:bodyPr rtlCol="0" anchor="ctr"/>
-          <a:lstStyle/>
-          <a:p>
-            <a:pPr algn="ctr"/>
-          </a:p>
-        </p:txBody>
-      </p:sp>
-      <p:sp>
-        <p:nvSpPr>
-          <p:cNvPr id="12" name="TextBox 11"/>
-          <p:cNvSpPr txBox="1"/>
-          <p:nvPr/>
-        </p:nvSpPr>
-        <p:spPr>
-          <a:xfrm>
-            <a:off x="6400800" y="4023360"/>
-            <a:ext cx="4572000" cy="1828800"/>
-          </a:xfrm>
-          <a:prstGeom prst="rect">
-            <a:avLst/>
-          </a:prstGeom>
-          <a:noFill/>
-        </p:spPr>
-        <p:txBody>
-          <a:bodyPr wrap="square">
-            <a:spAutoFit/>
-          </a:bodyPr>
-          <a:lstStyle/>
+          <a:bodyPr rtlCol="0" anchor="ctr" wrap="square"/>
+          <a:lstStyle/>
+          <a:p>
+            <a:pPr algn="l">
+              <a:spcAft>
+                <a:spcPts val="1000"/>
+              </a:spcAft>
+              <a:defRPr b="1" sz="2000">
+                <a:solidFill>
+                  <a:srgbClr val="FFFFFF"/>
+                </a:solidFill>
+              </a:defRPr>
+            </a:pPr>
+            <a:r>
+              <a:t>HP OmniBook Buyers</a:t>
+            </a:r>
+          </a:p>
           <a:p>
             <a:pPr>
-              <a:defRPr sz="1600" b="1">
-                <a:solidFill>
-                  <a:srgbClr val="F59E0B"/>
-                </a:solidFill>
-              </a:defRPr>
-            </a:pPr>
-            <a:r>
-              <a:t>HP OmniBook Buyers</a:t>
-            </a:r>
-          </a:p>
-          <a:p>
-            <a:br/>
-            <a:pPr>
-              <a:defRPr sz="1200">
-                <a:solidFill>
-                  <a:srgbClr val="94A3B8"/>
-                </a:solidFill>
-              </a:defRPr>
-            </a:pPr>
-            <a:r>
-              <a:t>Consumer and prosumer laptop users seeking MacBook-beating 24-hour battery life and truly personalized on-device intelligence.</a:t>
+              <a:spcAft>
+                <a:spcPts val="500"/>
+              </a:spcAft>
+              <a:defRPr sz="1400">
+                <a:solidFill>
+                  <a:srgbClr val="8892B0"/>
+                </a:solidFill>
+              </a:defRPr>
+            </a:pPr>
+            <a:r>
+              <a:t>24-hour AI battery, personalized intelligence</a:t>
             </a:r>
           </a:p>
         </p:txBody>
